--- a/Diagramas/diagrama2.pptx
+++ b/Diagramas/diagrama2.pptx
@@ -109,7 +109,7 @@
   </p:defaultTextStyle>
   <p:extLst>
     <p:ext uri="{EFAFB233-063F-42B5-8137-9DF3F51BA10A}">
-      <p15:sldGuideLst xmlns:p15="http://schemas.microsoft.com/office/powerpoint/2012/main"/>
+      <p15:sldGuideLst xmlns:p15="http://schemas.microsoft.com/office/powerpoint/2012/main" xmlns=""/>
     </p:ext>
   </p:extLst>
 </p:presentation>
@@ -197,7 +197,8 @@
           <a:p>
             <a:fld id="{8584C277-B865-4BF4-927E-0729B9152B92}" type="datetimeFigureOut">
               <a:rPr lang="pt-BR" smtClean="0"/>
-              <a:t>09/08/2024</a:t>
+              <a:pPr/>
+              <a:t>24/12/2024</a:t>
             </a:fld>
             <a:endParaRPr lang="pt-BR"/>
           </a:p>
@@ -355,6 +356,7 @@
           <a:p>
             <a:fld id="{59BA7F67-056E-426D-A055-EE6F4F55BEFB}" type="slidenum">
               <a:rPr lang="pt-BR" smtClean="0"/>
+              <a:pPr/>
               <a:t>‹nº›</a:t>
             </a:fld>
             <a:endParaRPr lang="pt-BR"/>
@@ -364,7 +366,7 @@
     </p:spTree>
     <p:extLst>
       <p:ext uri="{BB962C8B-B14F-4D97-AF65-F5344CB8AC3E}">
-        <p14:creationId xmlns:p14="http://schemas.microsoft.com/office/powerpoint/2010/main" val="1733828657"/>
+        <p14:creationId xmlns:p14="http://schemas.microsoft.com/office/powerpoint/2010/main" xmlns="" val="1733828657"/>
       </p:ext>
     </p:extLst>
   </p:cSld>
@@ -529,6 +531,7 @@
           <a:p>
             <a:fld id="{59BA7F67-056E-426D-A055-EE6F4F55BEFB}" type="slidenum">
               <a:rPr lang="pt-BR" smtClean="0"/>
+              <a:pPr/>
               <a:t>1</a:t>
             </a:fld>
             <a:endParaRPr lang="pt-BR"/>
@@ -538,7 +541,7 @@
     </p:spTree>
     <p:extLst>
       <p:ext uri="{BB962C8B-B14F-4D97-AF65-F5344CB8AC3E}">
-        <p14:creationId xmlns:p14="http://schemas.microsoft.com/office/powerpoint/2010/main" val="49612895"/>
+        <p14:creationId xmlns:p14="http://schemas.microsoft.com/office/powerpoint/2010/main" xmlns="" val="49612895"/>
       </p:ext>
     </p:extLst>
   </p:cSld>
@@ -570,7 +573,7 @@
           <p:cNvPr id="2" name="Título 1">
             <a:extLst>
               <a:ext uri="{FF2B5EF4-FFF2-40B4-BE49-F238E27FC236}">
-                <a16:creationId xmlns:a16="http://schemas.microsoft.com/office/drawing/2014/main" id="{2FBD7B5D-1A31-8E2A-6788-0D622A91C228}"/>
+                <a16:creationId xmlns:a16="http://schemas.microsoft.com/office/drawing/2014/main" xmlns="" id="{2FBD7B5D-1A31-8E2A-6788-0D622A91C228}"/>
               </a:ext>
             </a:extLst>
           </p:cNvPr>
@@ -607,7 +610,7 @@
           <p:cNvPr id="3" name="Subtítulo 2">
             <a:extLst>
               <a:ext uri="{FF2B5EF4-FFF2-40B4-BE49-F238E27FC236}">
-                <a16:creationId xmlns:a16="http://schemas.microsoft.com/office/drawing/2014/main" id="{D14BAA4A-E511-63A4-9663-CD84647E4EC0}"/>
+                <a16:creationId xmlns:a16="http://schemas.microsoft.com/office/drawing/2014/main" xmlns="" id="{D14BAA4A-E511-63A4-9663-CD84647E4EC0}"/>
               </a:ext>
             </a:extLst>
           </p:cNvPr>
@@ -677,7 +680,7 @@
           <p:cNvPr id="4" name="Espaço Reservado para Data 3">
             <a:extLst>
               <a:ext uri="{FF2B5EF4-FFF2-40B4-BE49-F238E27FC236}">
-                <a16:creationId xmlns:a16="http://schemas.microsoft.com/office/drawing/2014/main" id="{B14B50A7-659F-D18A-E3EA-08FC8BE2E8B0}"/>
+                <a16:creationId xmlns:a16="http://schemas.microsoft.com/office/drawing/2014/main" xmlns="" id="{B14B50A7-659F-D18A-E3EA-08FC8BE2E8B0}"/>
               </a:ext>
             </a:extLst>
           </p:cNvPr>
@@ -695,7 +698,8 @@
           <a:p>
             <a:fld id="{C2FDB46F-F830-473B-9701-194C22094723}" type="datetimeFigureOut">
               <a:rPr lang="pt-BR" smtClean="0"/>
-              <a:t>09/08/2024</a:t>
+              <a:pPr/>
+              <a:t>24/12/2024</a:t>
             </a:fld>
             <a:endParaRPr lang="pt-BR"/>
           </a:p>
@@ -706,7 +710,7 @@
           <p:cNvPr id="5" name="Espaço Reservado para Rodapé 4">
             <a:extLst>
               <a:ext uri="{FF2B5EF4-FFF2-40B4-BE49-F238E27FC236}">
-                <a16:creationId xmlns:a16="http://schemas.microsoft.com/office/drawing/2014/main" id="{AF501E28-9F3D-9A2A-F892-2196FADBA838}"/>
+                <a16:creationId xmlns:a16="http://schemas.microsoft.com/office/drawing/2014/main" xmlns="" id="{AF501E28-9F3D-9A2A-F892-2196FADBA838}"/>
               </a:ext>
             </a:extLst>
           </p:cNvPr>
@@ -731,7 +735,7 @@
           <p:cNvPr id="6" name="Espaço Reservado para Número de Slide 5">
             <a:extLst>
               <a:ext uri="{FF2B5EF4-FFF2-40B4-BE49-F238E27FC236}">
-                <a16:creationId xmlns:a16="http://schemas.microsoft.com/office/drawing/2014/main" id="{BF83732F-6328-C9C7-00FA-8A5009EE813F}"/>
+                <a16:creationId xmlns:a16="http://schemas.microsoft.com/office/drawing/2014/main" xmlns="" id="{BF83732F-6328-C9C7-00FA-8A5009EE813F}"/>
               </a:ext>
             </a:extLst>
           </p:cNvPr>
@@ -749,6 +753,7 @@
           <a:p>
             <a:fld id="{657B0FD7-E630-4241-9447-F9BE32CA663E}" type="slidenum">
               <a:rPr lang="pt-BR" smtClean="0"/>
+              <a:pPr/>
               <a:t>‹nº›</a:t>
             </a:fld>
             <a:endParaRPr lang="pt-BR"/>
@@ -758,7 +763,7 @@
     </p:spTree>
     <p:extLst>
       <p:ext uri="{BB962C8B-B14F-4D97-AF65-F5344CB8AC3E}">
-        <p14:creationId xmlns:p14="http://schemas.microsoft.com/office/powerpoint/2010/main" val="3306190269"/>
+        <p14:creationId xmlns:p14="http://schemas.microsoft.com/office/powerpoint/2010/main" xmlns="" val="3306190269"/>
       </p:ext>
     </p:extLst>
   </p:cSld>
@@ -790,7 +795,7 @@
           <p:cNvPr id="2" name="Título 1">
             <a:extLst>
               <a:ext uri="{FF2B5EF4-FFF2-40B4-BE49-F238E27FC236}">
-                <a16:creationId xmlns:a16="http://schemas.microsoft.com/office/drawing/2014/main" id="{9AAFA4BB-50D5-17EA-0D13-3420891A9957}"/>
+                <a16:creationId xmlns:a16="http://schemas.microsoft.com/office/drawing/2014/main" xmlns="" id="{9AAFA4BB-50D5-17EA-0D13-3420891A9957}"/>
               </a:ext>
             </a:extLst>
           </p:cNvPr>
@@ -818,7 +823,7 @@
           <p:cNvPr id="3" name="Espaço Reservado para Texto Vertical 2">
             <a:extLst>
               <a:ext uri="{FF2B5EF4-FFF2-40B4-BE49-F238E27FC236}">
-                <a16:creationId xmlns:a16="http://schemas.microsoft.com/office/drawing/2014/main" id="{FD718ADC-AE0E-1796-333B-C37290F49CA2}"/>
+                <a16:creationId xmlns:a16="http://schemas.microsoft.com/office/drawing/2014/main" xmlns="" id="{FD718ADC-AE0E-1796-333B-C37290F49CA2}"/>
               </a:ext>
             </a:extLst>
           </p:cNvPr>
@@ -875,7 +880,7 @@
           <p:cNvPr id="4" name="Espaço Reservado para Data 3">
             <a:extLst>
               <a:ext uri="{FF2B5EF4-FFF2-40B4-BE49-F238E27FC236}">
-                <a16:creationId xmlns:a16="http://schemas.microsoft.com/office/drawing/2014/main" id="{AEE5EE24-5C05-2CC9-E55C-CE14C227677C}"/>
+                <a16:creationId xmlns:a16="http://schemas.microsoft.com/office/drawing/2014/main" xmlns="" id="{AEE5EE24-5C05-2CC9-E55C-CE14C227677C}"/>
               </a:ext>
             </a:extLst>
           </p:cNvPr>
@@ -893,7 +898,8 @@
           <a:p>
             <a:fld id="{C2FDB46F-F830-473B-9701-194C22094723}" type="datetimeFigureOut">
               <a:rPr lang="pt-BR" smtClean="0"/>
-              <a:t>09/08/2024</a:t>
+              <a:pPr/>
+              <a:t>24/12/2024</a:t>
             </a:fld>
             <a:endParaRPr lang="pt-BR"/>
           </a:p>
@@ -904,7 +910,7 @@
           <p:cNvPr id="5" name="Espaço Reservado para Rodapé 4">
             <a:extLst>
               <a:ext uri="{FF2B5EF4-FFF2-40B4-BE49-F238E27FC236}">
-                <a16:creationId xmlns:a16="http://schemas.microsoft.com/office/drawing/2014/main" id="{32D77E9C-D254-4B28-6E67-CD6379A635A3}"/>
+                <a16:creationId xmlns:a16="http://schemas.microsoft.com/office/drawing/2014/main" xmlns="" id="{32D77E9C-D254-4B28-6E67-CD6379A635A3}"/>
               </a:ext>
             </a:extLst>
           </p:cNvPr>
@@ -929,7 +935,7 @@
           <p:cNvPr id="6" name="Espaço Reservado para Número de Slide 5">
             <a:extLst>
               <a:ext uri="{FF2B5EF4-FFF2-40B4-BE49-F238E27FC236}">
-                <a16:creationId xmlns:a16="http://schemas.microsoft.com/office/drawing/2014/main" id="{8761390F-44E0-E956-38CB-9A14817E627A}"/>
+                <a16:creationId xmlns:a16="http://schemas.microsoft.com/office/drawing/2014/main" xmlns="" id="{8761390F-44E0-E956-38CB-9A14817E627A}"/>
               </a:ext>
             </a:extLst>
           </p:cNvPr>
@@ -947,6 +953,7 @@
           <a:p>
             <a:fld id="{657B0FD7-E630-4241-9447-F9BE32CA663E}" type="slidenum">
               <a:rPr lang="pt-BR" smtClean="0"/>
+              <a:pPr/>
               <a:t>‹nº›</a:t>
             </a:fld>
             <a:endParaRPr lang="pt-BR"/>
@@ -956,7 +963,7 @@
     </p:spTree>
     <p:extLst>
       <p:ext uri="{BB962C8B-B14F-4D97-AF65-F5344CB8AC3E}">
-        <p14:creationId xmlns:p14="http://schemas.microsoft.com/office/powerpoint/2010/main" val="2463119296"/>
+        <p14:creationId xmlns:p14="http://schemas.microsoft.com/office/powerpoint/2010/main" xmlns="" val="2463119296"/>
       </p:ext>
     </p:extLst>
   </p:cSld>
@@ -988,7 +995,7 @@
           <p:cNvPr id="2" name="Título Vertical 1">
             <a:extLst>
               <a:ext uri="{FF2B5EF4-FFF2-40B4-BE49-F238E27FC236}">
-                <a16:creationId xmlns:a16="http://schemas.microsoft.com/office/drawing/2014/main" id="{267AB665-DC1E-3C1C-C488-5F2DA860520D}"/>
+                <a16:creationId xmlns:a16="http://schemas.microsoft.com/office/drawing/2014/main" xmlns="" id="{267AB665-DC1E-3C1C-C488-5F2DA860520D}"/>
               </a:ext>
             </a:extLst>
           </p:cNvPr>
@@ -1021,7 +1028,7 @@
           <p:cNvPr id="3" name="Espaço Reservado para Texto Vertical 2">
             <a:extLst>
               <a:ext uri="{FF2B5EF4-FFF2-40B4-BE49-F238E27FC236}">
-                <a16:creationId xmlns:a16="http://schemas.microsoft.com/office/drawing/2014/main" id="{FDF39F5B-E813-3389-EF7F-EB0C7819527F}"/>
+                <a16:creationId xmlns:a16="http://schemas.microsoft.com/office/drawing/2014/main" xmlns="" id="{FDF39F5B-E813-3389-EF7F-EB0C7819527F}"/>
               </a:ext>
             </a:extLst>
           </p:cNvPr>
@@ -1083,7 +1090,7 @@
           <p:cNvPr id="4" name="Espaço Reservado para Data 3">
             <a:extLst>
               <a:ext uri="{FF2B5EF4-FFF2-40B4-BE49-F238E27FC236}">
-                <a16:creationId xmlns:a16="http://schemas.microsoft.com/office/drawing/2014/main" id="{056D968F-9955-C90C-C7A6-712EF4BDAB34}"/>
+                <a16:creationId xmlns:a16="http://schemas.microsoft.com/office/drawing/2014/main" xmlns="" id="{056D968F-9955-C90C-C7A6-712EF4BDAB34}"/>
               </a:ext>
             </a:extLst>
           </p:cNvPr>
@@ -1101,7 +1108,8 @@
           <a:p>
             <a:fld id="{C2FDB46F-F830-473B-9701-194C22094723}" type="datetimeFigureOut">
               <a:rPr lang="pt-BR" smtClean="0"/>
-              <a:t>09/08/2024</a:t>
+              <a:pPr/>
+              <a:t>24/12/2024</a:t>
             </a:fld>
             <a:endParaRPr lang="pt-BR"/>
           </a:p>
@@ -1112,7 +1120,7 @@
           <p:cNvPr id="5" name="Espaço Reservado para Rodapé 4">
             <a:extLst>
               <a:ext uri="{FF2B5EF4-FFF2-40B4-BE49-F238E27FC236}">
-                <a16:creationId xmlns:a16="http://schemas.microsoft.com/office/drawing/2014/main" id="{7BB6DB61-5BA2-6E49-9669-3AFE56D96FE9}"/>
+                <a16:creationId xmlns:a16="http://schemas.microsoft.com/office/drawing/2014/main" xmlns="" id="{7BB6DB61-5BA2-6E49-9669-3AFE56D96FE9}"/>
               </a:ext>
             </a:extLst>
           </p:cNvPr>
@@ -1137,7 +1145,7 @@
           <p:cNvPr id="6" name="Espaço Reservado para Número de Slide 5">
             <a:extLst>
               <a:ext uri="{FF2B5EF4-FFF2-40B4-BE49-F238E27FC236}">
-                <a16:creationId xmlns:a16="http://schemas.microsoft.com/office/drawing/2014/main" id="{0C1DE8DB-8BCE-E7AD-072A-CD66F467ABA9}"/>
+                <a16:creationId xmlns:a16="http://schemas.microsoft.com/office/drawing/2014/main" xmlns="" id="{0C1DE8DB-8BCE-E7AD-072A-CD66F467ABA9}"/>
               </a:ext>
             </a:extLst>
           </p:cNvPr>
@@ -1155,6 +1163,7 @@
           <a:p>
             <a:fld id="{657B0FD7-E630-4241-9447-F9BE32CA663E}" type="slidenum">
               <a:rPr lang="pt-BR" smtClean="0"/>
+              <a:pPr/>
               <a:t>‹nº›</a:t>
             </a:fld>
             <a:endParaRPr lang="pt-BR"/>
@@ -1164,7 +1173,7 @@
     </p:spTree>
     <p:extLst>
       <p:ext uri="{BB962C8B-B14F-4D97-AF65-F5344CB8AC3E}">
-        <p14:creationId xmlns:p14="http://schemas.microsoft.com/office/powerpoint/2010/main" val="2288897383"/>
+        <p14:creationId xmlns:p14="http://schemas.microsoft.com/office/powerpoint/2010/main" xmlns="" val="2288897383"/>
       </p:ext>
     </p:extLst>
   </p:cSld>
@@ -1196,7 +1205,7 @@
           <p:cNvPr id="2" name="Título 1">
             <a:extLst>
               <a:ext uri="{FF2B5EF4-FFF2-40B4-BE49-F238E27FC236}">
-                <a16:creationId xmlns:a16="http://schemas.microsoft.com/office/drawing/2014/main" id="{B12A5892-F254-9F72-6479-6F5390A7DA97}"/>
+                <a16:creationId xmlns:a16="http://schemas.microsoft.com/office/drawing/2014/main" xmlns="" id="{B12A5892-F254-9F72-6479-6F5390A7DA97}"/>
               </a:ext>
             </a:extLst>
           </p:cNvPr>
@@ -1224,7 +1233,7 @@
           <p:cNvPr id="3" name="Espaço Reservado para Conteúdo 2">
             <a:extLst>
               <a:ext uri="{FF2B5EF4-FFF2-40B4-BE49-F238E27FC236}">
-                <a16:creationId xmlns:a16="http://schemas.microsoft.com/office/drawing/2014/main" id="{70819183-0FB4-B9C0-90CD-23B76024EE57}"/>
+                <a16:creationId xmlns:a16="http://schemas.microsoft.com/office/drawing/2014/main" xmlns="" id="{70819183-0FB4-B9C0-90CD-23B76024EE57}"/>
               </a:ext>
             </a:extLst>
           </p:cNvPr>
@@ -1281,7 +1290,7 @@
           <p:cNvPr id="4" name="Espaço Reservado para Data 3">
             <a:extLst>
               <a:ext uri="{FF2B5EF4-FFF2-40B4-BE49-F238E27FC236}">
-                <a16:creationId xmlns:a16="http://schemas.microsoft.com/office/drawing/2014/main" id="{15FD0E21-C9CB-1CB5-EDB6-C492925A3971}"/>
+                <a16:creationId xmlns:a16="http://schemas.microsoft.com/office/drawing/2014/main" xmlns="" id="{15FD0E21-C9CB-1CB5-EDB6-C492925A3971}"/>
               </a:ext>
             </a:extLst>
           </p:cNvPr>
@@ -1299,7 +1308,8 @@
           <a:p>
             <a:fld id="{C2FDB46F-F830-473B-9701-194C22094723}" type="datetimeFigureOut">
               <a:rPr lang="pt-BR" smtClean="0"/>
-              <a:t>09/08/2024</a:t>
+              <a:pPr/>
+              <a:t>24/12/2024</a:t>
             </a:fld>
             <a:endParaRPr lang="pt-BR"/>
           </a:p>
@@ -1310,7 +1320,7 @@
           <p:cNvPr id="5" name="Espaço Reservado para Rodapé 4">
             <a:extLst>
               <a:ext uri="{FF2B5EF4-FFF2-40B4-BE49-F238E27FC236}">
-                <a16:creationId xmlns:a16="http://schemas.microsoft.com/office/drawing/2014/main" id="{08EDC0B4-D4C1-83C4-AFE9-C036A355B895}"/>
+                <a16:creationId xmlns:a16="http://schemas.microsoft.com/office/drawing/2014/main" xmlns="" id="{08EDC0B4-D4C1-83C4-AFE9-C036A355B895}"/>
               </a:ext>
             </a:extLst>
           </p:cNvPr>
@@ -1335,7 +1345,7 @@
           <p:cNvPr id="6" name="Espaço Reservado para Número de Slide 5">
             <a:extLst>
               <a:ext uri="{FF2B5EF4-FFF2-40B4-BE49-F238E27FC236}">
-                <a16:creationId xmlns:a16="http://schemas.microsoft.com/office/drawing/2014/main" id="{BCC18D1C-E7EC-4B8F-CAF2-C91C3CB14335}"/>
+                <a16:creationId xmlns:a16="http://schemas.microsoft.com/office/drawing/2014/main" xmlns="" id="{BCC18D1C-E7EC-4B8F-CAF2-C91C3CB14335}"/>
               </a:ext>
             </a:extLst>
           </p:cNvPr>
@@ -1353,6 +1363,7 @@
           <a:p>
             <a:fld id="{657B0FD7-E630-4241-9447-F9BE32CA663E}" type="slidenum">
               <a:rPr lang="pt-BR" smtClean="0"/>
+              <a:pPr/>
               <a:t>‹nº›</a:t>
             </a:fld>
             <a:endParaRPr lang="pt-BR"/>
@@ -1362,7 +1373,7 @@
     </p:spTree>
     <p:extLst>
       <p:ext uri="{BB962C8B-B14F-4D97-AF65-F5344CB8AC3E}">
-        <p14:creationId xmlns:p14="http://schemas.microsoft.com/office/powerpoint/2010/main" val="4125385576"/>
+        <p14:creationId xmlns:p14="http://schemas.microsoft.com/office/powerpoint/2010/main" xmlns="" val="4125385576"/>
       </p:ext>
     </p:extLst>
   </p:cSld>
@@ -1394,7 +1405,7 @@
           <p:cNvPr id="2" name="Título 1">
             <a:extLst>
               <a:ext uri="{FF2B5EF4-FFF2-40B4-BE49-F238E27FC236}">
-                <a16:creationId xmlns:a16="http://schemas.microsoft.com/office/drawing/2014/main" id="{D4A9C659-2AB9-5D51-1588-FD7F82AB5D2E}"/>
+                <a16:creationId xmlns:a16="http://schemas.microsoft.com/office/drawing/2014/main" xmlns="" id="{D4A9C659-2AB9-5D51-1588-FD7F82AB5D2E}"/>
               </a:ext>
             </a:extLst>
           </p:cNvPr>
@@ -1431,7 +1442,7 @@
           <p:cNvPr id="3" name="Espaço Reservado para Texto 2">
             <a:extLst>
               <a:ext uri="{FF2B5EF4-FFF2-40B4-BE49-F238E27FC236}">
-                <a16:creationId xmlns:a16="http://schemas.microsoft.com/office/drawing/2014/main" id="{E25B6C6C-A7AE-A925-2AF4-41DB2D7D790B}"/>
+                <a16:creationId xmlns:a16="http://schemas.microsoft.com/office/drawing/2014/main" xmlns="" id="{E25B6C6C-A7AE-A925-2AF4-41DB2D7D790B}"/>
               </a:ext>
             </a:extLst>
           </p:cNvPr>
@@ -1556,7 +1567,7 @@
           <p:cNvPr id="4" name="Espaço Reservado para Data 3">
             <a:extLst>
               <a:ext uri="{FF2B5EF4-FFF2-40B4-BE49-F238E27FC236}">
-                <a16:creationId xmlns:a16="http://schemas.microsoft.com/office/drawing/2014/main" id="{03722599-B41B-0B09-D625-F7FD538E2594}"/>
+                <a16:creationId xmlns:a16="http://schemas.microsoft.com/office/drawing/2014/main" xmlns="" id="{03722599-B41B-0B09-D625-F7FD538E2594}"/>
               </a:ext>
             </a:extLst>
           </p:cNvPr>
@@ -1574,7 +1585,8 @@
           <a:p>
             <a:fld id="{C2FDB46F-F830-473B-9701-194C22094723}" type="datetimeFigureOut">
               <a:rPr lang="pt-BR" smtClean="0"/>
-              <a:t>09/08/2024</a:t>
+              <a:pPr/>
+              <a:t>24/12/2024</a:t>
             </a:fld>
             <a:endParaRPr lang="pt-BR"/>
           </a:p>
@@ -1585,7 +1597,7 @@
           <p:cNvPr id="5" name="Espaço Reservado para Rodapé 4">
             <a:extLst>
               <a:ext uri="{FF2B5EF4-FFF2-40B4-BE49-F238E27FC236}">
-                <a16:creationId xmlns:a16="http://schemas.microsoft.com/office/drawing/2014/main" id="{625723C8-31AA-1E12-696A-6D53CE6F3B81}"/>
+                <a16:creationId xmlns:a16="http://schemas.microsoft.com/office/drawing/2014/main" xmlns="" id="{625723C8-31AA-1E12-696A-6D53CE6F3B81}"/>
               </a:ext>
             </a:extLst>
           </p:cNvPr>
@@ -1610,7 +1622,7 @@
           <p:cNvPr id="6" name="Espaço Reservado para Número de Slide 5">
             <a:extLst>
               <a:ext uri="{FF2B5EF4-FFF2-40B4-BE49-F238E27FC236}">
-                <a16:creationId xmlns:a16="http://schemas.microsoft.com/office/drawing/2014/main" id="{6ECD1FC4-C714-5359-F27E-EC7C9628E096}"/>
+                <a16:creationId xmlns:a16="http://schemas.microsoft.com/office/drawing/2014/main" xmlns="" id="{6ECD1FC4-C714-5359-F27E-EC7C9628E096}"/>
               </a:ext>
             </a:extLst>
           </p:cNvPr>
@@ -1628,6 +1640,7 @@
           <a:p>
             <a:fld id="{657B0FD7-E630-4241-9447-F9BE32CA663E}" type="slidenum">
               <a:rPr lang="pt-BR" smtClean="0"/>
+              <a:pPr/>
               <a:t>‹nº›</a:t>
             </a:fld>
             <a:endParaRPr lang="pt-BR"/>
@@ -1637,7 +1650,7 @@
     </p:spTree>
     <p:extLst>
       <p:ext uri="{BB962C8B-B14F-4D97-AF65-F5344CB8AC3E}">
-        <p14:creationId xmlns:p14="http://schemas.microsoft.com/office/powerpoint/2010/main" val="2788531181"/>
+        <p14:creationId xmlns:p14="http://schemas.microsoft.com/office/powerpoint/2010/main" xmlns="" val="2788531181"/>
       </p:ext>
     </p:extLst>
   </p:cSld>
@@ -1669,7 +1682,7 @@
           <p:cNvPr id="2" name="Título 1">
             <a:extLst>
               <a:ext uri="{FF2B5EF4-FFF2-40B4-BE49-F238E27FC236}">
-                <a16:creationId xmlns:a16="http://schemas.microsoft.com/office/drawing/2014/main" id="{8613735C-00C0-21B7-5CEB-82FAAB2228F5}"/>
+                <a16:creationId xmlns:a16="http://schemas.microsoft.com/office/drawing/2014/main" xmlns="" id="{8613735C-00C0-21B7-5CEB-82FAAB2228F5}"/>
               </a:ext>
             </a:extLst>
           </p:cNvPr>
@@ -1697,7 +1710,7 @@
           <p:cNvPr id="3" name="Espaço Reservado para Conteúdo 2">
             <a:extLst>
               <a:ext uri="{FF2B5EF4-FFF2-40B4-BE49-F238E27FC236}">
-                <a16:creationId xmlns:a16="http://schemas.microsoft.com/office/drawing/2014/main" id="{5C15BF11-2FBE-DC96-5A40-EE9DF04B2472}"/>
+                <a16:creationId xmlns:a16="http://schemas.microsoft.com/office/drawing/2014/main" xmlns="" id="{5C15BF11-2FBE-DC96-5A40-EE9DF04B2472}"/>
               </a:ext>
             </a:extLst>
           </p:cNvPr>
@@ -1759,7 +1772,7 @@
           <p:cNvPr id="4" name="Espaço Reservado para Conteúdo 3">
             <a:extLst>
               <a:ext uri="{FF2B5EF4-FFF2-40B4-BE49-F238E27FC236}">
-                <a16:creationId xmlns:a16="http://schemas.microsoft.com/office/drawing/2014/main" id="{C72EE9F7-AE7E-FCC0-489B-471F4F9C0A4C}"/>
+                <a16:creationId xmlns:a16="http://schemas.microsoft.com/office/drawing/2014/main" xmlns="" id="{C72EE9F7-AE7E-FCC0-489B-471F4F9C0A4C}"/>
               </a:ext>
             </a:extLst>
           </p:cNvPr>
@@ -1821,7 +1834,7 @@
           <p:cNvPr id="5" name="Espaço Reservado para Data 4">
             <a:extLst>
               <a:ext uri="{FF2B5EF4-FFF2-40B4-BE49-F238E27FC236}">
-                <a16:creationId xmlns:a16="http://schemas.microsoft.com/office/drawing/2014/main" id="{AA6E80F6-28CC-059A-CE6D-4B5D03B8C921}"/>
+                <a16:creationId xmlns:a16="http://schemas.microsoft.com/office/drawing/2014/main" xmlns="" id="{AA6E80F6-28CC-059A-CE6D-4B5D03B8C921}"/>
               </a:ext>
             </a:extLst>
           </p:cNvPr>
@@ -1839,7 +1852,8 @@
           <a:p>
             <a:fld id="{C2FDB46F-F830-473B-9701-194C22094723}" type="datetimeFigureOut">
               <a:rPr lang="pt-BR" smtClean="0"/>
-              <a:t>09/08/2024</a:t>
+              <a:pPr/>
+              <a:t>24/12/2024</a:t>
             </a:fld>
             <a:endParaRPr lang="pt-BR"/>
           </a:p>
@@ -1850,7 +1864,7 @@
           <p:cNvPr id="6" name="Espaço Reservado para Rodapé 5">
             <a:extLst>
               <a:ext uri="{FF2B5EF4-FFF2-40B4-BE49-F238E27FC236}">
-                <a16:creationId xmlns:a16="http://schemas.microsoft.com/office/drawing/2014/main" id="{F5414BE6-6AE2-305E-012A-857A7B84DC83}"/>
+                <a16:creationId xmlns:a16="http://schemas.microsoft.com/office/drawing/2014/main" xmlns="" id="{F5414BE6-6AE2-305E-012A-857A7B84DC83}"/>
               </a:ext>
             </a:extLst>
           </p:cNvPr>
@@ -1875,7 +1889,7 @@
           <p:cNvPr id="7" name="Espaço Reservado para Número de Slide 6">
             <a:extLst>
               <a:ext uri="{FF2B5EF4-FFF2-40B4-BE49-F238E27FC236}">
-                <a16:creationId xmlns:a16="http://schemas.microsoft.com/office/drawing/2014/main" id="{B46F6659-8128-77C6-2C72-BEBB52570B83}"/>
+                <a16:creationId xmlns:a16="http://schemas.microsoft.com/office/drawing/2014/main" xmlns="" id="{B46F6659-8128-77C6-2C72-BEBB52570B83}"/>
               </a:ext>
             </a:extLst>
           </p:cNvPr>
@@ -1893,6 +1907,7 @@
           <a:p>
             <a:fld id="{657B0FD7-E630-4241-9447-F9BE32CA663E}" type="slidenum">
               <a:rPr lang="pt-BR" smtClean="0"/>
+              <a:pPr/>
               <a:t>‹nº›</a:t>
             </a:fld>
             <a:endParaRPr lang="pt-BR"/>
@@ -1902,7 +1917,7 @@
     </p:spTree>
     <p:extLst>
       <p:ext uri="{BB962C8B-B14F-4D97-AF65-F5344CB8AC3E}">
-        <p14:creationId xmlns:p14="http://schemas.microsoft.com/office/powerpoint/2010/main" val="4284516959"/>
+        <p14:creationId xmlns:p14="http://schemas.microsoft.com/office/powerpoint/2010/main" xmlns="" val="4284516959"/>
       </p:ext>
     </p:extLst>
   </p:cSld>
@@ -1934,7 +1949,7 @@
           <p:cNvPr id="2" name="Título 1">
             <a:extLst>
               <a:ext uri="{FF2B5EF4-FFF2-40B4-BE49-F238E27FC236}">
-                <a16:creationId xmlns:a16="http://schemas.microsoft.com/office/drawing/2014/main" id="{3612DA4F-079F-A8A1-20F2-31983DB53A97}"/>
+                <a16:creationId xmlns:a16="http://schemas.microsoft.com/office/drawing/2014/main" xmlns="" id="{3612DA4F-079F-A8A1-20F2-31983DB53A97}"/>
               </a:ext>
             </a:extLst>
           </p:cNvPr>
@@ -1967,7 +1982,7 @@
           <p:cNvPr id="3" name="Espaço Reservado para Texto 2">
             <a:extLst>
               <a:ext uri="{FF2B5EF4-FFF2-40B4-BE49-F238E27FC236}">
-                <a16:creationId xmlns:a16="http://schemas.microsoft.com/office/drawing/2014/main" id="{B8F4E01B-9658-F701-6527-B33B2D96754A}"/>
+                <a16:creationId xmlns:a16="http://schemas.microsoft.com/office/drawing/2014/main" xmlns="" id="{B8F4E01B-9658-F701-6527-B33B2D96754A}"/>
               </a:ext>
             </a:extLst>
           </p:cNvPr>
@@ -2038,7 +2053,7 @@
           <p:cNvPr id="4" name="Espaço Reservado para Conteúdo 3">
             <a:extLst>
               <a:ext uri="{FF2B5EF4-FFF2-40B4-BE49-F238E27FC236}">
-                <a16:creationId xmlns:a16="http://schemas.microsoft.com/office/drawing/2014/main" id="{AC025872-62B5-128F-7AB8-DFB4717B15BA}"/>
+                <a16:creationId xmlns:a16="http://schemas.microsoft.com/office/drawing/2014/main" xmlns="" id="{AC025872-62B5-128F-7AB8-DFB4717B15BA}"/>
               </a:ext>
             </a:extLst>
           </p:cNvPr>
@@ -2100,7 +2115,7 @@
           <p:cNvPr id="5" name="Espaço Reservado para Texto 4">
             <a:extLst>
               <a:ext uri="{FF2B5EF4-FFF2-40B4-BE49-F238E27FC236}">
-                <a16:creationId xmlns:a16="http://schemas.microsoft.com/office/drawing/2014/main" id="{D533D800-9086-80CC-DD7E-723A30FF27F7}"/>
+                <a16:creationId xmlns:a16="http://schemas.microsoft.com/office/drawing/2014/main" xmlns="" id="{D533D800-9086-80CC-DD7E-723A30FF27F7}"/>
               </a:ext>
             </a:extLst>
           </p:cNvPr>
@@ -2171,7 +2186,7 @@
           <p:cNvPr id="6" name="Espaço Reservado para Conteúdo 5">
             <a:extLst>
               <a:ext uri="{FF2B5EF4-FFF2-40B4-BE49-F238E27FC236}">
-                <a16:creationId xmlns:a16="http://schemas.microsoft.com/office/drawing/2014/main" id="{3016CC00-624E-F690-8422-309AFDB9955B}"/>
+                <a16:creationId xmlns:a16="http://schemas.microsoft.com/office/drawing/2014/main" xmlns="" id="{3016CC00-624E-F690-8422-309AFDB9955B}"/>
               </a:ext>
             </a:extLst>
           </p:cNvPr>
@@ -2233,7 +2248,7 @@
           <p:cNvPr id="7" name="Espaço Reservado para Data 6">
             <a:extLst>
               <a:ext uri="{FF2B5EF4-FFF2-40B4-BE49-F238E27FC236}">
-                <a16:creationId xmlns:a16="http://schemas.microsoft.com/office/drawing/2014/main" id="{FBE7A5ED-3CE1-3796-02BA-6C49664749A0}"/>
+                <a16:creationId xmlns:a16="http://schemas.microsoft.com/office/drawing/2014/main" xmlns="" id="{FBE7A5ED-3CE1-3796-02BA-6C49664749A0}"/>
               </a:ext>
             </a:extLst>
           </p:cNvPr>
@@ -2251,7 +2266,8 @@
           <a:p>
             <a:fld id="{C2FDB46F-F830-473B-9701-194C22094723}" type="datetimeFigureOut">
               <a:rPr lang="pt-BR" smtClean="0"/>
-              <a:t>09/08/2024</a:t>
+              <a:pPr/>
+              <a:t>24/12/2024</a:t>
             </a:fld>
             <a:endParaRPr lang="pt-BR"/>
           </a:p>
@@ -2262,7 +2278,7 @@
           <p:cNvPr id="8" name="Espaço Reservado para Rodapé 7">
             <a:extLst>
               <a:ext uri="{FF2B5EF4-FFF2-40B4-BE49-F238E27FC236}">
-                <a16:creationId xmlns:a16="http://schemas.microsoft.com/office/drawing/2014/main" id="{F50868D7-BFB9-3448-86C3-39352E81B720}"/>
+                <a16:creationId xmlns:a16="http://schemas.microsoft.com/office/drawing/2014/main" xmlns="" id="{F50868D7-BFB9-3448-86C3-39352E81B720}"/>
               </a:ext>
             </a:extLst>
           </p:cNvPr>
@@ -2287,7 +2303,7 @@
           <p:cNvPr id="9" name="Espaço Reservado para Número de Slide 8">
             <a:extLst>
               <a:ext uri="{FF2B5EF4-FFF2-40B4-BE49-F238E27FC236}">
-                <a16:creationId xmlns:a16="http://schemas.microsoft.com/office/drawing/2014/main" id="{7E19B0E5-E9C1-76D9-9287-43771D209FB3}"/>
+                <a16:creationId xmlns:a16="http://schemas.microsoft.com/office/drawing/2014/main" xmlns="" id="{7E19B0E5-E9C1-76D9-9287-43771D209FB3}"/>
               </a:ext>
             </a:extLst>
           </p:cNvPr>
@@ -2305,6 +2321,7 @@
           <a:p>
             <a:fld id="{657B0FD7-E630-4241-9447-F9BE32CA663E}" type="slidenum">
               <a:rPr lang="pt-BR" smtClean="0"/>
+              <a:pPr/>
               <a:t>‹nº›</a:t>
             </a:fld>
             <a:endParaRPr lang="pt-BR"/>
@@ -2314,7 +2331,7 @@
     </p:spTree>
     <p:extLst>
       <p:ext uri="{BB962C8B-B14F-4D97-AF65-F5344CB8AC3E}">
-        <p14:creationId xmlns:p14="http://schemas.microsoft.com/office/powerpoint/2010/main" val="1925962630"/>
+        <p14:creationId xmlns:p14="http://schemas.microsoft.com/office/powerpoint/2010/main" xmlns="" val="1925962630"/>
       </p:ext>
     </p:extLst>
   </p:cSld>
@@ -2346,7 +2363,7 @@
           <p:cNvPr id="2" name="Título 1">
             <a:extLst>
               <a:ext uri="{FF2B5EF4-FFF2-40B4-BE49-F238E27FC236}">
-                <a16:creationId xmlns:a16="http://schemas.microsoft.com/office/drawing/2014/main" id="{54670FEC-2708-9003-B309-660E513082D8}"/>
+                <a16:creationId xmlns:a16="http://schemas.microsoft.com/office/drawing/2014/main" xmlns="" id="{54670FEC-2708-9003-B309-660E513082D8}"/>
               </a:ext>
             </a:extLst>
           </p:cNvPr>
@@ -2374,7 +2391,7 @@
           <p:cNvPr id="3" name="Espaço Reservado para Data 2">
             <a:extLst>
               <a:ext uri="{FF2B5EF4-FFF2-40B4-BE49-F238E27FC236}">
-                <a16:creationId xmlns:a16="http://schemas.microsoft.com/office/drawing/2014/main" id="{DB77D1E2-2D0B-D51B-494F-1F50BAF53B8B}"/>
+                <a16:creationId xmlns:a16="http://schemas.microsoft.com/office/drawing/2014/main" xmlns="" id="{DB77D1E2-2D0B-D51B-494F-1F50BAF53B8B}"/>
               </a:ext>
             </a:extLst>
           </p:cNvPr>
@@ -2392,7 +2409,8 @@
           <a:p>
             <a:fld id="{C2FDB46F-F830-473B-9701-194C22094723}" type="datetimeFigureOut">
               <a:rPr lang="pt-BR" smtClean="0"/>
-              <a:t>09/08/2024</a:t>
+              <a:pPr/>
+              <a:t>24/12/2024</a:t>
             </a:fld>
             <a:endParaRPr lang="pt-BR"/>
           </a:p>
@@ -2403,7 +2421,7 @@
           <p:cNvPr id="4" name="Espaço Reservado para Rodapé 3">
             <a:extLst>
               <a:ext uri="{FF2B5EF4-FFF2-40B4-BE49-F238E27FC236}">
-                <a16:creationId xmlns:a16="http://schemas.microsoft.com/office/drawing/2014/main" id="{F183C28A-D37D-8233-67BD-61661C4BCC4B}"/>
+                <a16:creationId xmlns:a16="http://schemas.microsoft.com/office/drawing/2014/main" xmlns="" id="{F183C28A-D37D-8233-67BD-61661C4BCC4B}"/>
               </a:ext>
             </a:extLst>
           </p:cNvPr>
@@ -2428,7 +2446,7 @@
           <p:cNvPr id="5" name="Espaço Reservado para Número de Slide 4">
             <a:extLst>
               <a:ext uri="{FF2B5EF4-FFF2-40B4-BE49-F238E27FC236}">
-                <a16:creationId xmlns:a16="http://schemas.microsoft.com/office/drawing/2014/main" id="{8AAD4D31-EB5F-9A8A-0F00-E2EB9E056BFE}"/>
+                <a16:creationId xmlns:a16="http://schemas.microsoft.com/office/drawing/2014/main" xmlns="" id="{8AAD4D31-EB5F-9A8A-0F00-E2EB9E056BFE}"/>
               </a:ext>
             </a:extLst>
           </p:cNvPr>
@@ -2446,6 +2464,7 @@
           <a:p>
             <a:fld id="{657B0FD7-E630-4241-9447-F9BE32CA663E}" type="slidenum">
               <a:rPr lang="pt-BR" smtClean="0"/>
+              <a:pPr/>
               <a:t>‹nº›</a:t>
             </a:fld>
             <a:endParaRPr lang="pt-BR"/>
@@ -2455,7 +2474,7 @@
     </p:spTree>
     <p:extLst>
       <p:ext uri="{BB962C8B-B14F-4D97-AF65-F5344CB8AC3E}">
-        <p14:creationId xmlns:p14="http://schemas.microsoft.com/office/powerpoint/2010/main" val="878959071"/>
+        <p14:creationId xmlns:p14="http://schemas.microsoft.com/office/powerpoint/2010/main" xmlns="" val="878959071"/>
       </p:ext>
     </p:extLst>
   </p:cSld>
@@ -2487,7 +2506,7 @@
           <p:cNvPr id="2" name="Espaço Reservado para Data 1">
             <a:extLst>
               <a:ext uri="{FF2B5EF4-FFF2-40B4-BE49-F238E27FC236}">
-                <a16:creationId xmlns:a16="http://schemas.microsoft.com/office/drawing/2014/main" id="{4E6002C2-D115-B1B8-0405-572044E7E8EB}"/>
+                <a16:creationId xmlns:a16="http://schemas.microsoft.com/office/drawing/2014/main" xmlns="" id="{4E6002C2-D115-B1B8-0405-572044E7E8EB}"/>
               </a:ext>
             </a:extLst>
           </p:cNvPr>
@@ -2505,7 +2524,8 @@
           <a:p>
             <a:fld id="{C2FDB46F-F830-473B-9701-194C22094723}" type="datetimeFigureOut">
               <a:rPr lang="pt-BR" smtClean="0"/>
-              <a:t>09/08/2024</a:t>
+              <a:pPr/>
+              <a:t>24/12/2024</a:t>
             </a:fld>
             <a:endParaRPr lang="pt-BR"/>
           </a:p>
@@ -2516,7 +2536,7 @@
           <p:cNvPr id="3" name="Espaço Reservado para Rodapé 2">
             <a:extLst>
               <a:ext uri="{FF2B5EF4-FFF2-40B4-BE49-F238E27FC236}">
-                <a16:creationId xmlns:a16="http://schemas.microsoft.com/office/drawing/2014/main" id="{C03CC9A0-BFAA-1921-7883-FBBFBED9FAE2}"/>
+                <a16:creationId xmlns:a16="http://schemas.microsoft.com/office/drawing/2014/main" xmlns="" id="{C03CC9A0-BFAA-1921-7883-FBBFBED9FAE2}"/>
               </a:ext>
             </a:extLst>
           </p:cNvPr>
@@ -2541,7 +2561,7 @@
           <p:cNvPr id="4" name="Espaço Reservado para Número de Slide 3">
             <a:extLst>
               <a:ext uri="{FF2B5EF4-FFF2-40B4-BE49-F238E27FC236}">
-                <a16:creationId xmlns:a16="http://schemas.microsoft.com/office/drawing/2014/main" id="{182BDB6B-26E2-6B24-567A-09A3C5C05913}"/>
+                <a16:creationId xmlns:a16="http://schemas.microsoft.com/office/drawing/2014/main" xmlns="" id="{182BDB6B-26E2-6B24-567A-09A3C5C05913}"/>
               </a:ext>
             </a:extLst>
           </p:cNvPr>
@@ -2559,6 +2579,7 @@
           <a:p>
             <a:fld id="{657B0FD7-E630-4241-9447-F9BE32CA663E}" type="slidenum">
               <a:rPr lang="pt-BR" smtClean="0"/>
+              <a:pPr/>
               <a:t>‹nº›</a:t>
             </a:fld>
             <a:endParaRPr lang="pt-BR"/>
@@ -2568,7 +2589,7 @@
     </p:spTree>
     <p:extLst>
       <p:ext uri="{BB962C8B-B14F-4D97-AF65-F5344CB8AC3E}">
-        <p14:creationId xmlns:p14="http://schemas.microsoft.com/office/powerpoint/2010/main" val="692293901"/>
+        <p14:creationId xmlns:p14="http://schemas.microsoft.com/office/powerpoint/2010/main" xmlns="" val="692293901"/>
       </p:ext>
     </p:extLst>
   </p:cSld>
@@ -2600,7 +2621,7 @@
           <p:cNvPr id="2" name="Título 1">
             <a:extLst>
               <a:ext uri="{FF2B5EF4-FFF2-40B4-BE49-F238E27FC236}">
-                <a16:creationId xmlns:a16="http://schemas.microsoft.com/office/drawing/2014/main" id="{C00FED91-2F70-32E0-C01D-7E8D60FB6405}"/>
+                <a16:creationId xmlns:a16="http://schemas.microsoft.com/office/drawing/2014/main" xmlns="" id="{C00FED91-2F70-32E0-C01D-7E8D60FB6405}"/>
               </a:ext>
             </a:extLst>
           </p:cNvPr>
@@ -2637,7 +2658,7 @@
           <p:cNvPr id="3" name="Espaço Reservado para Conteúdo 2">
             <a:extLst>
               <a:ext uri="{FF2B5EF4-FFF2-40B4-BE49-F238E27FC236}">
-                <a16:creationId xmlns:a16="http://schemas.microsoft.com/office/drawing/2014/main" id="{B57DF5A5-E2D1-E53C-6470-0B3A5E807F1E}"/>
+                <a16:creationId xmlns:a16="http://schemas.microsoft.com/office/drawing/2014/main" xmlns="" id="{B57DF5A5-E2D1-E53C-6470-0B3A5E807F1E}"/>
               </a:ext>
             </a:extLst>
           </p:cNvPr>
@@ -2727,7 +2748,7 @@
           <p:cNvPr id="4" name="Espaço Reservado para Texto 3">
             <a:extLst>
               <a:ext uri="{FF2B5EF4-FFF2-40B4-BE49-F238E27FC236}">
-                <a16:creationId xmlns:a16="http://schemas.microsoft.com/office/drawing/2014/main" id="{5921D17A-1508-E60C-1F79-C689CAA04622}"/>
+                <a16:creationId xmlns:a16="http://schemas.microsoft.com/office/drawing/2014/main" xmlns="" id="{5921D17A-1508-E60C-1F79-C689CAA04622}"/>
               </a:ext>
             </a:extLst>
           </p:cNvPr>
@@ -2798,7 +2819,7 @@
           <p:cNvPr id="5" name="Espaço Reservado para Data 4">
             <a:extLst>
               <a:ext uri="{FF2B5EF4-FFF2-40B4-BE49-F238E27FC236}">
-                <a16:creationId xmlns:a16="http://schemas.microsoft.com/office/drawing/2014/main" id="{EA8C5C6E-A82D-FC07-95D9-AC5ED4D315EB}"/>
+                <a16:creationId xmlns:a16="http://schemas.microsoft.com/office/drawing/2014/main" xmlns="" id="{EA8C5C6E-A82D-FC07-95D9-AC5ED4D315EB}"/>
               </a:ext>
             </a:extLst>
           </p:cNvPr>
@@ -2816,7 +2837,8 @@
           <a:p>
             <a:fld id="{C2FDB46F-F830-473B-9701-194C22094723}" type="datetimeFigureOut">
               <a:rPr lang="pt-BR" smtClean="0"/>
-              <a:t>09/08/2024</a:t>
+              <a:pPr/>
+              <a:t>24/12/2024</a:t>
             </a:fld>
             <a:endParaRPr lang="pt-BR"/>
           </a:p>
@@ -2827,7 +2849,7 @@
           <p:cNvPr id="6" name="Espaço Reservado para Rodapé 5">
             <a:extLst>
               <a:ext uri="{FF2B5EF4-FFF2-40B4-BE49-F238E27FC236}">
-                <a16:creationId xmlns:a16="http://schemas.microsoft.com/office/drawing/2014/main" id="{45C544C6-60EB-E2D0-DB19-179777E8B9DE}"/>
+                <a16:creationId xmlns:a16="http://schemas.microsoft.com/office/drawing/2014/main" xmlns="" id="{45C544C6-60EB-E2D0-DB19-179777E8B9DE}"/>
               </a:ext>
             </a:extLst>
           </p:cNvPr>
@@ -2852,7 +2874,7 @@
           <p:cNvPr id="7" name="Espaço Reservado para Número de Slide 6">
             <a:extLst>
               <a:ext uri="{FF2B5EF4-FFF2-40B4-BE49-F238E27FC236}">
-                <a16:creationId xmlns:a16="http://schemas.microsoft.com/office/drawing/2014/main" id="{A7ECD2E1-91AC-59E5-F3A8-788576D43F4F}"/>
+                <a16:creationId xmlns:a16="http://schemas.microsoft.com/office/drawing/2014/main" xmlns="" id="{A7ECD2E1-91AC-59E5-F3A8-788576D43F4F}"/>
               </a:ext>
             </a:extLst>
           </p:cNvPr>
@@ -2870,6 +2892,7 @@
           <a:p>
             <a:fld id="{657B0FD7-E630-4241-9447-F9BE32CA663E}" type="slidenum">
               <a:rPr lang="pt-BR" smtClean="0"/>
+              <a:pPr/>
               <a:t>‹nº›</a:t>
             </a:fld>
             <a:endParaRPr lang="pt-BR"/>
@@ -2879,7 +2902,7 @@
     </p:spTree>
     <p:extLst>
       <p:ext uri="{BB962C8B-B14F-4D97-AF65-F5344CB8AC3E}">
-        <p14:creationId xmlns:p14="http://schemas.microsoft.com/office/powerpoint/2010/main" val="2912975385"/>
+        <p14:creationId xmlns:p14="http://schemas.microsoft.com/office/powerpoint/2010/main" xmlns="" val="2912975385"/>
       </p:ext>
     </p:extLst>
   </p:cSld>
@@ -2911,7 +2934,7 @@
           <p:cNvPr id="2" name="Título 1">
             <a:extLst>
               <a:ext uri="{FF2B5EF4-FFF2-40B4-BE49-F238E27FC236}">
-                <a16:creationId xmlns:a16="http://schemas.microsoft.com/office/drawing/2014/main" id="{BD5F082C-B754-F22F-6061-ECAFE5F8D934}"/>
+                <a16:creationId xmlns:a16="http://schemas.microsoft.com/office/drawing/2014/main" xmlns="" id="{BD5F082C-B754-F22F-6061-ECAFE5F8D934}"/>
               </a:ext>
             </a:extLst>
           </p:cNvPr>
@@ -2948,7 +2971,7 @@
           <p:cNvPr id="3" name="Espaço Reservado para Imagem 2">
             <a:extLst>
               <a:ext uri="{FF2B5EF4-FFF2-40B4-BE49-F238E27FC236}">
-                <a16:creationId xmlns:a16="http://schemas.microsoft.com/office/drawing/2014/main" id="{F5FE1425-01D0-3C87-C163-000C19D1DC35}"/>
+                <a16:creationId xmlns:a16="http://schemas.microsoft.com/office/drawing/2014/main" xmlns="" id="{F5FE1425-01D0-3C87-C163-000C19D1DC35}"/>
               </a:ext>
             </a:extLst>
           </p:cNvPr>
@@ -3015,7 +3038,7 @@
           <p:cNvPr id="4" name="Espaço Reservado para Texto 3">
             <a:extLst>
               <a:ext uri="{FF2B5EF4-FFF2-40B4-BE49-F238E27FC236}">
-                <a16:creationId xmlns:a16="http://schemas.microsoft.com/office/drawing/2014/main" id="{9209414B-6464-EF90-8B30-BDEA7306C26F}"/>
+                <a16:creationId xmlns:a16="http://schemas.microsoft.com/office/drawing/2014/main" xmlns="" id="{9209414B-6464-EF90-8B30-BDEA7306C26F}"/>
               </a:ext>
             </a:extLst>
           </p:cNvPr>
@@ -3086,7 +3109,7 @@
           <p:cNvPr id="5" name="Espaço Reservado para Data 4">
             <a:extLst>
               <a:ext uri="{FF2B5EF4-FFF2-40B4-BE49-F238E27FC236}">
-                <a16:creationId xmlns:a16="http://schemas.microsoft.com/office/drawing/2014/main" id="{4D6A3B19-02F1-82C9-2767-FCC0C4442F06}"/>
+                <a16:creationId xmlns:a16="http://schemas.microsoft.com/office/drawing/2014/main" xmlns="" id="{4D6A3B19-02F1-82C9-2767-FCC0C4442F06}"/>
               </a:ext>
             </a:extLst>
           </p:cNvPr>
@@ -3104,7 +3127,8 @@
           <a:p>
             <a:fld id="{C2FDB46F-F830-473B-9701-194C22094723}" type="datetimeFigureOut">
               <a:rPr lang="pt-BR" smtClean="0"/>
-              <a:t>09/08/2024</a:t>
+              <a:pPr/>
+              <a:t>24/12/2024</a:t>
             </a:fld>
             <a:endParaRPr lang="pt-BR"/>
           </a:p>
@@ -3115,7 +3139,7 @@
           <p:cNvPr id="6" name="Espaço Reservado para Rodapé 5">
             <a:extLst>
               <a:ext uri="{FF2B5EF4-FFF2-40B4-BE49-F238E27FC236}">
-                <a16:creationId xmlns:a16="http://schemas.microsoft.com/office/drawing/2014/main" id="{32BFA6DD-7795-D94F-F31F-2B0C46FD1CD5}"/>
+                <a16:creationId xmlns:a16="http://schemas.microsoft.com/office/drawing/2014/main" xmlns="" id="{32BFA6DD-7795-D94F-F31F-2B0C46FD1CD5}"/>
               </a:ext>
             </a:extLst>
           </p:cNvPr>
@@ -3140,7 +3164,7 @@
           <p:cNvPr id="7" name="Espaço Reservado para Número de Slide 6">
             <a:extLst>
               <a:ext uri="{FF2B5EF4-FFF2-40B4-BE49-F238E27FC236}">
-                <a16:creationId xmlns:a16="http://schemas.microsoft.com/office/drawing/2014/main" id="{6E981D2B-31A7-F08B-6248-7EBC69558F10}"/>
+                <a16:creationId xmlns:a16="http://schemas.microsoft.com/office/drawing/2014/main" xmlns="" id="{6E981D2B-31A7-F08B-6248-7EBC69558F10}"/>
               </a:ext>
             </a:extLst>
           </p:cNvPr>
@@ -3158,6 +3182,7 @@
           <a:p>
             <a:fld id="{657B0FD7-E630-4241-9447-F9BE32CA663E}" type="slidenum">
               <a:rPr lang="pt-BR" smtClean="0"/>
+              <a:pPr/>
               <a:t>‹nº›</a:t>
             </a:fld>
             <a:endParaRPr lang="pt-BR"/>
@@ -3167,7 +3192,7 @@
     </p:spTree>
     <p:extLst>
       <p:ext uri="{BB962C8B-B14F-4D97-AF65-F5344CB8AC3E}">
-        <p14:creationId xmlns:p14="http://schemas.microsoft.com/office/powerpoint/2010/main" val="2782259678"/>
+        <p14:creationId xmlns:p14="http://schemas.microsoft.com/office/powerpoint/2010/main" xmlns="" val="2782259678"/>
       </p:ext>
     </p:extLst>
   </p:cSld>
@@ -3204,7 +3229,7 @@
           <p:cNvPr id="2" name="Espaço Reservado para Título 1">
             <a:extLst>
               <a:ext uri="{FF2B5EF4-FFF2-40B4-BE49-F238E27FC236}">
-                <a16:creationId xmlns:a16="http://schemas.microsoft.com/office/drawing/2014/main" id="{C7359DB0-6CF7-BFF9-82EB-A1722568276C}"/>
+                <a16:creationId xmlns:a16="http://schemas.microsoft.com/office/drawing/2014/main" xmlns="" id="{C7359DB0-6CF7-BFF9-82EB-A1722568276C}"/>
               </a:ext>
             </a:extLst>
           </p:cNvPr>
@@ -3242,7 +3267,7 @@
           <p:cNvPr id="3" name="Espaço Reservado para Texto 2">
             <a:extLst>
               <a:ext uri="{FF2B5EF4-FFF2-40B4-BE49-F238E27FC236}">
-                <a16:creationId xmlns:a16="http://schemas.microsoft.com/office/drawing/2014/main" id="{50991311-77A7-46BB-4BE9-A0EAF2CE7321}"/>
+                <a16:creationId xmlns:a16="http://schemas.microsoft.com/office/drawing/2014/main" xmlns="" id="{50991311-77A7-46BB-4BE9-A0EAF2CE7321}"/>
               </a:ext>
             </a:extLst>
           </p:cNvPr>
@@ -3309,7 +3334,7 @@
           <p:cNvPr id="4" name="Espaço Reservado para Data 3">
             <a:extLst>
               <a:ext uri="{FF2B5EF4-FFF2-40B4-BE49-F238E27FC236}">
-                <a16:creationId xmlns:a16="http://schemas.microsoft.com/office/drawing/2014/main" id="{0351B115-D935-44F7-C9EC-DACAF930B3A9}"/>
+                <a16:creationId xmlns:a16="http://schemas.microsoft.com/office/drawing/2014/main" xmlns="" id="{0351B115-D935-44F7-C9EC-DACAF930B3A9}"/>
               </a:ext>
             </a:extLst>
           </p:cNvPr>
@@ -3345,7 +3370,8 @@
           <a:p>
             <a:fld id="{C2FDB46F-F830-473B-9701-194C22094723}" type="datetimeFigureOut">
               <a:rPr lang="pt-BR" smtClean="0"/>
-              <a:t>09/08/2024</a:t>
+              <a:pPr/>
+              <a:t>24/12/2024</a:t>
             </a:fld>
             <a:endParaRPr lang="pt-BR"/>
           </a:p>
@@ -3356,7 +3382,7 @@
           <p:cNvPr id="5" name="Espaço Reservado para Rodapé 4">
             <a:extLst>
               <a:ext uri="{FF2B5EF4-FFF2-40B4-BE49-F238E27FC236}">
-                <a16:creationId xmlns:a16="http://schemas.microsoft.com/office/drawing/2014/main" id="{0A7392E3-E11B-20C1-C0A3-D8B8B1198451}"/>
+                <a16:creationId xmlns:a16="http://schemas.microsoft.com/office/drawing/2014/main" xmlns="" id="{0A7392E3-E11B-20C1-C0A3-D8B8B1198451}"/>
               </a:ext>
             </a:extLst>
           </p:cNvPr>
@@ -3399,7 +3425,7 @@
           <p:cNvPr id="6" name="Espaço Reservado para Número de Slide 5">
             <a:extLst>
               <a:ext uri="{FF2B5EF4-FFF2-40B4-BE49-F238E27FC236}">
-                <a16:creationId xmlns:a16="http://schemas.microsoft.com/office/drawing/2014/main" id="{E3851DBB-FD1A-7A7C-B342-489B53EEBC36}"/>
+                <a16:creationId xmlns:a16="http://schemas.microsoft.com/office/drawing/2014/main" xmlns="" id="{E3851DBB-FD1A-7A7C-B342-489B53EEBC36}"/>
               </a:ext>
             </a:extLst>
           </p:cNvPr>
@@ -3435,6 +3461,7 @@
           <a:p>
             <a:fld id="{657B0FD7-E630-4241-9447-F9BE32CA663E}" type="slidenum">
               <a:rPr lang="pt-BR" smtClean="0"/>
+              <a:pPr/>
               <a:t>‹nº›</a:t>
             </a:fld>
             <a:endParaRPr lang="pt-BR"/>
@@ -3444,7 +3471,7 @@
     </p:spTree>
     <p:extLst>
       <p:ext uri="{BB962C8B-B14F-4D97-AF65-F5344CB8AC3E}">
-        <p14:creationId xmlns:p14="http://schemas.microsoft.com/office/powerpoint/2010/main" val="1719581763"/>
+        <p14:creationId xmlns:p14="http://schemas.microsoft.com/office/powerpoint/2010/main" xmlns="" val="1719581763"/>
       </p:ext>
     </p:extLst>
   </p:cSld>
@@ -3767,7 +3794,7 @@
           <p:cNvPr id="4" name="Retângulo 3">
             <a:extLst>
               <a:ext uri="{FF2B5EF4-FFF2-40B4-BE49-F238E27FC236}">
-                <a16:creationId xmlns:a16="http://schemas.microsoft.com/office/drawing/2014/main" id="{AFD05444-B165-4A75-11E9-0E992CDC0406}"/>
+                <a16:creationId xmlns:a16="http://schemas.microsoft.com/office/drawing/2014/main" xmlns="" id="{AFD05444-B165-4A75-11E9-0E992CDC0406}"/>
               </a:ext>
             </a:extLst>
           </p:cNvPr>
@@ -3776,8 +3803,8 @@
         </p:nvSpPr>
         <p:spPr>
           <a:xfrm>
-            <a:off x="1038171" y="2421773"/>
-            <a:ext cx="2161051" cy="4278572"/>
+            <a:off x="1038171" y="1843848"/>
+            <a:ext cx="2161051" cy="4493452"/>
           </a:xfrm>
           <a:prstGeom prst="rect">
             <a:avLst/>
@@ -3819,7 +3846,7 @@
           <p:cNvPr id="5" name="Retângulo 4">
             <a:extLst>
               <a:ext uri="{FF2B5EF4-FFF2-40B4-BE49-F238E27FC236}">
-                <a16:creationId xmlns:a16="http://schemas.microsoft.com/office/drawing/2014/main" id="{9B99B2DF-2CC4-347D-0910-8830491E91B3}"/>
+                <a16:creationId xmlns:a16="http://schemas.microsoft.com/office/drawing/2014/main" xmlns="" id="{9B99B2DF-2CC4-347D-0910-8830491E91B3}"/>
               </a:ext>
             </a:extLst>
           </p:cNvPr>
@@ -3828,8 +3855,8 @@
         </p:nvSpPr>
         <p:spPr>
           <a:xfrm>
-            <a:off x="4097288" y="2355427"/>
-            <a:ext cx="2384322" cy="1884221"/>
+            <a:off x="4097288" y="1844634"/>
+            <a:ext cx="1816624" cy="1817089"/>
           </a:xfrm>
           <a:prstGeom prst="rect">
             <a:avLst/>
@@ -3871,7 +3898,7 @@
           <p:cNvPr id="6" name="Retângulo 5">
             <a:extLst>
               <a:ext uri="{FF2B5EF4-FFF2-40B4-BE49-F238E27FC236}">
-                <a16:creationId xmlns:a16="http://schemas.microsoft.com/office/drawing/2014/main" id="{FC554D95-20FE-3CCC-F407-D31669DC48A9}"/>
+                <a16:creationId xmlns:a16="http://schemas.microsoft.com/office/drawing/2014/main" xmlns="" id="{FC554D95-20FE-3CCC-F407-D31669DC48A9}"/>
               </a:ext>
             </a:extLst>
           </p:cNvPr>
@@ -3880,7 +3907,7 @@
         </p:nvSpPr>
         <p:spPr>
           <a:xfrm>
-            <a:off x="7536427" y="2377532"/>
+            <a:off x="7003202" y="1597732"/>
             <a:ext cx="2384322" cy="1637071"/>
           </a:xfrm>
           <a:prstGeom prst="rect">
@@ -3923,7 +3950,7 @@
           <p:cNvPr id="7" name="Seta: da Esquerda para a Direita 6">
             <a:extLst>
               <a:ext uri="{FF2B5EF4-FFF2-40B4-BE49-F238E27FC236}">
-                <a16:creationId xmlns:a16="http://schemas.microsoft.com/office/drawing/2014/main" id="{E81CC717-9BAE-6DCB-4602-6AFA59233F14}"/>
+                <a16:creationId xmlns:a16="http://schemas.microsoft.com/office/drawing/2014/main" xmlns="" id="{E81CC717-9BAE-6DCB-4602-6AFA59233F14}"/>
               </a:ext>
             </a:extLst>
           </p:cNvPr>
@@ -3932,7 +3959,7 @@
         </p:nvSpPr>
         <p:spPr>
           <a:xfrm>
-            <a:off x="2901720" y="3155711"/>
+            <a:off x="2901720" y="2577786"/>
             <a:ext cx="1177235" cy="320236"/>
           </a:xfrm>
           <a:prstGeom prst="leftRightArrow">
@@ -3971,7 +3998,7 @@
           <p:cNvPr id="8" name="CaixaDeTexto 7">
             <a:extLst>
               <a:ext uri="{FF2B5EF4-FFF2-40B4-BE49-F238E27FC236}">
-                <a16:creationId xmlns:a16="http://schemas.microsoft.com/office/drawing/2014/main" id="{326DA4C4-BC94-350B-3422-3FF0F2E13017}"/>
+                <a16:creationId xmlns:a16="http://schemas.microsoft.com/office/drawing/2014/main" xmlns="" id="{326DA4C4-BC94-350B-3422-3FF0F2E13017}"/>
               </a:ext>
             </a:extLst>
           </p:cNvPr>
@@ -3980,7 +4007,7 @@
         </p:nvSpPr>
         <p:spPr>
           <a:xfrm>
-            <a:off x="3191512" y="2492299"/>
+            <a:off x="3191512" y="1914374"/>
             <a:ext cx="884903" cy="707886"/>
           </a:xfrm>
           <a:prstGeom prst="rect">
@@ -4012,7 +4039,7 @@
           <p:cNvPr id="9" name="CaixaDeTexto 8">
             <a:extLst>
               <a:ext uri="{FF2B5EF4-FFF2-40B4-BE49-F238E27FC236}">
-                <a16:creationId xmlns:a16="http://schemas.microsoft.com/office/drawing/2014/main" id="{A89EFD06-C5A8-AF9C-B7D5-C46CC3DF96A6}"/>
+                <a16:creationId xmlns:a16="http://schemas.microsoft.com/office/drawing/2014/main" xmlns="" id="{A89EFD06-C5A8-AF9C-B7D5-C46CC3DF96A6}"/>
               </a:ext>
             </a:extLst>
           </p:cNvPr>
@@ -4021,8 +4048,8 @@
         </p:nvSpPr>
         <p:spPr>
           <a:xfrm>
-            <a:off x="1129520" y="2042948"/>
-            <a:ext cx="1681316" cy="400110"/>
+            <a:off x="1383520" y="1350723"/>
+            <a:ext cx="1499380" cy="400110"/>
           </a:xfrm>
           <a:prstGeom prst="rect">
             <a:avLst/>
@@ -4036,9 +4063,10 @@
           <a:lstStyle/>
           <a:p>
             <a:r>
-              <a:rPr lang="pt-BR" sz="2000" b="1" dirty="0"/>
-              <a:t>Computador</a:t>
-            </a:r>
+              <a:rPr lang="pt-BR" sz="2000" b="1" dirty="0" err="1" smtClean="0"/>
+              <a:t>Computer</a:t>
+            </a:r>
+            <a:endParaRPr lang="pt-BR" sz="2000" b="1" dirty="0"/>
           </a:p>
         </p:txBody>
       </p:sp>
@@ -4047,7 +4075,7 @@
           <p:cNvPr id="10" name="CaixaDeTexto 9">
             <a:extLst>
               <a:ext uri="{FF2B5EF4-FFF2-40B4-BE49-F238E27FC236}">
-                <a16:creationId xmlns:a16="http://schemas.microsoft.com/office/drawing/2014/main" id="{E4B1C0A7-24FE-A972-FCBF-5DFF6B633E84}"/>
+                <a16:creationId xmlns:a16="http://schemas.microsoft.com/office/drawing/2014/main" xmlns="" id="{E4B1C0A7-24FE-A972-FCBF-5DFF6B633E84}"/>
               </a:ext>
             </a:extLst>
           </p:cNvPr>
@@ -4056,7 +4084,7 @@
         </p:nvSpPr>
         <p:spPr>
           <a:xfrm>
-            <a:off x="4592989" y="1949012"/>
+            <a:off x="4631089" y="1371087"/>
             <a:ext cx="1170039" cy="400110"/>
           </a:xfrm>
           <a:prstGeom prst="rect">
@@ -4082,7 +4110,7 @@
           <p:cNvPr id="11" name="Elipse 10">
             <a:extLst>
               <a:ext uri="{FF2B5EF4-FFF2-40B4-BE49-F238E27FC236}">
-                <a16:creationId xmlns:a16="http://schemas.microsoft.com/office/drawing/2014/main" id="{E56BC292-0549-A640-2A8E-284F332BA8A4}"/>
+                <a16:creationId xmlns:a16="http://schemas.microsoft.com/office/drawing/2014/main" xmlns="" id="{E56BC292-0549-A640-2A8E-284F332BA8A4}"/>
               </a:ext>
             </a:extLst>
           </p:cNvPr>
@@ -4091,7 +4119,7 @@
         </p:nvSpPr>
         <p:spPr>
           <a:xfrm>
-            <a:off x="6081252" y="3041212"/>
+            <a:off x="5606239" y="2297035"/>
             <a:ext cx="235974" cy="221226"/>
           </a:xfrm>
           <a:prstGeom prst="ellipse">
@@ -4134,7 +4162,7 @@
           <p:cNvPr id="12" name="Elipse 11">
             <a:extLst>
               <a:ext uri="{FF2B5EF4-FFF2-40B4-BE49-F238E27FC236}">
-                <a16:creationId xmlns:a16="http://schemas.microsoft.com/office/drawing/2014/main" id="{9328618F-F992-DC0E-780E-324636798C34}"/>
+                <a16:creationId xmlns:a16="http://schemas.microsoft.com/office/drawing/2014/main" xmlns="" id="{9328618F-F992-DC0E-780E-324636798C34}"/>
               </a:ext>
             </a:extLst>
           </p:cNvPr>
@@ -4143,7 +4171,7 @@
         </p:nvSpPr>
         <p:spPr>
           <a:xfrm>
-            <a:off x="6081252" y="3544558"/>
+            <a:off x="5618114" y="2836008"/>
             <a:ext cx="235974" cy="221226"/>
           </a:xfrm>
           <a:prstGeom prst="ellipse">
@@ -4186,7 +4214,7 @@
           <p:cNvPr id="13" name="Elipse 12">
             <a:extLst>
               <a:ext uri="{FF2B5EF4-FFF2-40B4-BE49-F238E27FC236}">
-                <a16:creationId xmlns:a16="http://schemas.microsoft.com/office/drawing/2014/main" id="{DB48A5FC-58F4-3918-B31E-CB346F457BBE}"/>
+                <a16:creationId xmlns:a16="http://schemas.microsoft.com/office/drawing/2014/main" xmlns="" id="{DB48A5FC-58F4-3918-B31E-CB346F457BBE}"/>
               </a:ext>
             </a:extLst>
           </p:cNvPr>
@@ -4195,7 +4223,7 @@
         </p:nvSpPr>
         <p:spPr>
           <a:xfrm>
-            <a:off x="7737991" y="3079923"/>
+            <a:off x="7103166" y="2300123"/>
             <a:ext cx="235974" cy="221226"/>
           </a:xfrm>
           <a:prstGeom prst="ellipse">
@@ -4238,7 +4266,7 @@
           <p:cNvPr id="14" name="Elipse 13">
             <a:extLst>
               <a:ext uri="{FF2B5EF4-FFF2-40B4-BE49-F238E27FC236}">
-                <a16:creationId xmlns:a16="http://schemas.microsoft.com/office/drawing/2014/main" id="{94758299-F83C-41BE-544D-0388881D9FE9}"/>
+                <a16:creationId xmlns:a16="http://schemas.microsoft.com/office/drawing/2014/main" xmlns="" id="{94758299-F83C-41BE-544D-0388881D9FE9}"/>
               </a:ext>
             </a:extLst>
           </p:cNvPr>
@@ -4247,7 +4275,7 @@
         </p:nvSpPr>
         <p:spPr>
           <a:xfrm>
-            <a:off x="7740447" y="3590587"/>
+            <a:off x="7118322" y="2810787"/>
             <a:ext cx="235974" cy="221226"/>
           </a:xfrm>
           <a:prstGeom prst="ellipse">
@@ -4290,7 +4318,7 @@
           <p:cNvPr id="15" name="Elipse 14">
             <a:extLst>
               <a:ext uri="{FF2B5EF4-FFF2-40B4-BE49-F238E27FC236}">
-                <a16:creationId xmlns:a16="http://schemas.microsoft.com/office/drawing/2014/main" id="{3F6A92D2-C739-D4F7-8A9D-7C6FAECA572B}"/>
+                <a16:creationId xmlns:a16="http://schemas.microsoft.com/office/drawing/2014/main" xmlns="" id="{3F6A92D2-C739-D4F7-8A9D-7C6FAECA572B}"/>
               </a:ext>
             </a:extLst>
           </p:cNvPr>
@@ -4299,7 +4327,7 @@
         </p:nvSpPr>
         <p:spPr>
           <a:xfrm>
-            <a:off x="7737991" y="2598757"/>
+            <a:off x="7090466" y="1806257"/>
             <a:ext cx="235974" cy="221226"/>
           </a:xfrm>
           <a:prstGeom prst="ellipse">
@@ -4342,7 +4370,7 @@
           <p:cNvPr id="16" name="CaixaDeTexto 15">
             <a:extLst>
               <a:ext uri="{FF2B5EF4-FFF2-40B4-BE49-F238E27FC236}">
-                <a16:creationId xmlns:a16="http://schemas.microsoft.com/office/drawing/2014/main" id="{1F5E03BA-F7D4-DDCF-37E8-E3563F767D14}"/>
+                <a16:creationId xmlns:a16="http://schemas.microsoft.com/office/drawing/2014/main" xmlns="" id="{1F5E03BA-F7D4-DDCF-37E8-E3563F767D14}"/>
               </a:ext>
             </a:extLst>
           </p:cNvPr>
@@ -4351,7 +4379,7 @@
         </p:nvSpPr>
         <p:spPr>
           <a:xfrm>
-            <a:off x="8062247" y="1945708"/>
+            <a:off x="7744922" y="1153208"/>
             <a:ext cx="1474839" cy="400110"/>
           </a:xfrm>
           <a:prstGeom prst="rect">
@@ -4366,9 +4394,10 @@
           <a:lstStyle/>
           <a:p>
             <a:r>
-              <a:rPr lang="pt-BR" sz="2000" b="1" dirty="0"/>
-              <a:t>QSE/QSD</a:t>
-            </a:r>
+              <a:rPr lang="pt-BR" sz="2000" b="1" dirty="0" smtClean="0"/>
+              <a:t>QSD</a:t>
+            </a:r>
+            <a:endParaRPr lang="pt-BR" sz="2000" b="1" dirty="0"/>
           </a:p>
         </p:txBody>
       </p:sp>
@@ -4377,7 +4406,7 @@
           <p:cNvPr id="17" name="CaixaDeTexto 16">
             <a:extLst>
               <a:ext uri="{FF2B5EF4-FFF2-40B4-BE49-F238E27FC236}">
-                <a16:creationId xmlns:a16="http://schemas.microsoft.com/office/drawing/2014/main" id="{C52FAFB3-AADD-D94F-BE01-17BE82079EAA}"/>
+                <a16:creationId xmlns:a16="http://schemas.microsoft.com/office/drawing/2014/main" xmlns="" id="{C52FAFB3-AADD-D94F-BE01-17BE82079EAA}"/>
               </a:ext>
             </a:extLst>
           </p:cNvPr>
@@ -4386,7 +4415,7 @@
         </p:nvSpPr>
         <p:spPr>
           <a:xfrm>
-            <a:off x="1270981" y="2829335"/>
+            <a:off x="1270981" y="2251410"/>
             <a:ext cx="1471044" cy="1631216"/>
           </a:xfrm>
           <a:prstGeom prst="rect">
@@ -4408,25 +4437,30 @@
           <a:p>
             <a:r>
               <a:rPr lang="pt-BR" sz="2000" b="1" dirty="0"/>
-              <a:t>        +</a:t>
-            </a:r>
+              <a:t>    </a:t>
+            </a:r>
+            <a:r>
+              <a:rPr lang="pt-BR" sz="2000" b="1" dirty="0" smtClean="0"/>
+              <a:t> +</a:t>
+            </a:r>
+          </a:p>
+          <a:p>
+            <a:r>
+              <a:rPr lang="pt-BR" sz="2000" b="1" dirty="0" err="1" smtClean="0"/>
+              <a:t>Omni-Rig</a:t>
+            </a:r>
+            <a:endParaRPr lang="pt-BR" sz="2000" b="1" dirty="0"/>
           </a:p>
           <a:p>
             <a:r>
               <a:rPr lang="pt-BR" sz="2000" b="1" dirty="0"/>
-              <a:t>Omni-</a:t>
-            </a:r>
-            <a:r>
-              <a:rPr lang="pt-BR" sz="2000" b="1" dirty="0" err="1"/>
-              <a:t>Rig</a:t>
+              <a:t>      </a:t>
+            </a:r>
+            <a:r>
+              <a:rPr lang="pt-BR" sz="2000" b="1" dirty="0" err="1" smtClean="0"/>
+              <a:t>or</a:t>
             </a:r>
             <a:endParaRPr lang="pt-BR" sz="2000" b="1" dirty="0"/>
-          </a:p>
-          <a:p>
-            <a:r>
-              <a:rPr lang="pt-BR" sz="2000" b="1" dirty="0"/>
-              <a:t>      ou</a:t>
-            </a:r>
           </a:p>
           <a:p>
             <a:r>
@@ -4441,7 +4475,7 @@
           <p:cNvPr id="18" name="CaixaDeTexto 17">
             <a:extLst>
               <a:ext uri="{FF2B5EF4-FFF2-40B4-BE49-F238E27FC236}">
-                <a16:creationId xmlns:a16="http://schemas.microsoft.com/office/drawing/2014/main" id="{342AD33B-5506-D380-AC01-792F4E7B5E81}"/>
+                <a16:creationId xmlns:a16="http://schemas.microsoft.com/office/drawing/2014/main" xmlns="" id="{342AD33B-5506-D380-AC01-792F4E7B5E81}"/>
               </a:ext>
             </a:extLst>
           </p:cNvPr>
@@ -4450,7 +4484,7 @@
         </p:nvSpPr>
         <p:spPr>
           <a:xfrm>
-            <a:off x="5641708" y="2982220"/>
+            <a:off x="5142944" y="2214293"/>
             <a:ext cx="439544" cy="400110"/>
           </a:xfrm>
           <a:prstGeom prst="rect">
@@ -4476,7 +4510,7 @@
           <p:cNvPr id="19" name="CaixaDeTexto 18">
             <a:extLst>
               <a:ext uri="{FF2B5EF4-FFF2-40B4-BE49-F238E27FC236}">
-                <a16:creationId xmlns:a16="http://schemas.microsoft.com/office/drawing/2014/main" id="{ABB31AC0-1AA9-0D1F-621F-32C569023A82}"/>
+                <a16:creationId xmlns:a16="http://schemas.microsoft.com/office/drawing/2014/main" xmlns="" id="{ABB31AC0-1AA9-0D1F-621F-32C569023A82}"/>
               </a:ext>
             </a:extLst>
           </p:cNvPr>
@@ -4485,7 +4519,7 @@
         </p:nvSpPr>
         <p:spPr>
           <a:xfrm>
-            <a:off x="5512769" y="3441322"/>
+            <a:off x="5097133" y="2720895"/>
             <a:ext cx="575799" cy="400110"/>
           </a:xfrm>
           <a:prstGeom prst="rect">
@@ -4511,7 +4545,7 @@
           <p:cNvPr id="20" name="Seta: para a Direita 19">
             <a:extLst>
               <a:ext uri="{FF2B5EF4-FFF2-40B4-BE49-F238E27FC236}">
-                <a16:creationId xmlns:a16="http://schemas.microsoft.com/office/drawing/2014/main" id="{A6C8175D-DA74-98A7-2FF7-2AADD28711FE}"/>
+                <a16:creationId xmlns:a16="http://schemas.microsoft.com/office/drawing/2014/main" xmlns="" id="{A6C8175D-DA74-98A7-2FF7-2AADD28711FE}"/>
               </a:ext>
             </a:extLst>
           </p:cNvPr>
@@ -4520,8 +4554,8 @@
         </p:nvSpPr>
         <p:spPr>
           <a:xfrm>
-            <a:off x="6483924" y="2947319"/>
-            <a:ext cx="1030382" cy="406854"/>
+            <a:off x="6426200" y="2215008"/>
+            <a:ext cx="541016" cy="401192"/>
           </a:xfrm>
           <a:prstGeom prst="rightArrow">
             <a:avLst/>
@@ -4559,7 +4593,7 @@
           <p:cNvPr id="21" name="Seta: para a Direita 20">
             <a:extLst>
               <a:ext uri="{FF2B5EF4-FFF2-40B4-BE49-F238E27FC236}">
-                <a16:creationId xmlns:a16="http://schemas.microsoft.com/office/drawing/2014/main" id="{ACEFE10B-F9A6-370E-3AA8-81ED9EA0FE65}"/>
+                <a16:creationId xmlns:a16="http://schemas.microsoft.com/office/drawing/2014/main" xmlns="" id="{ACEFE10B-F9A6-370E-3AA8-81ED9EA0FE65}"/>
               </a:ext>
             </a:extLst>
           </p:cNvPr>
@@ -4568,8 +4602,8 @@
         </p:nvSpPr>
         <p:spPr>
           <a:xfrm>
-            <a:off x="6508950" y="3516473"/>
-            <a:ext cx="1009265" cy="423212"/>
+            <a:off x="6375400" y="2714561"/>
+            <a:ext cx="622300" cy="409639"/>
           </a:xfrm>
           <a:prstGeom prst="rightArrow">
             <a:avLst/>
@@ -4604,10 +4638,61 @@
       </p:sp>
       <p:sp>
         <p:nvSpPr>
-          <p:cNvPr id="22" name="Retângulo 21">
-            <a:extLst>
-              <a:ext uri="{FF2B5EF4-FFF2-40B4-BE49-F238E27FC236}">
-                <a16:creationId xmlns:a16="http://schemas.microsoft.com/office/drawing/2014/main" id="{935D9806-1F87-4A1E-B672-24074E2863FF}"/>
+          <p:cNvPr id="23" name="CaixaDeTexto 22">
+            <a:extLst>
+              <a:ext uri="{FF2B5EF4-FFF2-40B4-BE49-F238E27FC236}">
+                <a16:creationId xmlns:a16="http://schemas.microsoft.com/office/drawing/2014/main" xmlns="" id="{607014D1-3D91-BD30-B3AE-D099C95002AE}"/>
+              </a:ext>
+            </a:extLst>
+          </p:cNvPr>
+          <p:cNvSpPr txBox="1"/>
+          <p:nvPr/>
+        </p:nvSpPr>
+        <p:spPr>
+          <a:xfrm>
+            <a:off x="10375899" y="747388"/>
+            <a:ext cx="1596912" cy="707886"/>
+          </a:xfrm>
+          <a:prstGeom prst="rect">
+            <a:avLst/>
+          </a:prstGeom>
+          <a:noFill/>
+        </p:spPr>
+        <p:txBody>
+          <a:bodyPr wrap="none" rtlCol="0">
+            <a:spAutoFit/>
+          </a:bodyPr>
+          <a:lstStyle/>
+          <a:p>
+            <a:r>
+              <a:rPr lang="pt-BR" sz="2000" b="1" dirty="0" err="1" smtClean="0"/>
+              <a:t>External</a:t>
+            </a:r>
+            <a:endParaRPr lang="pt-BR" sz="2000" b="1" dirty="0" smtClean="0"/>
+          </a:p>
+          <a:p>
+            <a:r>
+              <a:rPr lang="pt-BR" sz="2000" b="1" dirty="0" err="1" smtClean="0"/>
+              <a:t>Sound</a:t>
+            </a:r>
+            <a:r>
+              <a:rPr lang="pt-BR" sz="2000" b="1" dirty="0" smtClean="0"/>
+              <a:t> </a:t>
+            </a:r>
+            <a:r>
+              <a:rPr lang="pt-BR" sz="2000" b="1" dirty="0" err="1" smtClean="0"/>
+              <a:t>card</a:t>
+            </a:r>
+            <a:endParaRPr lang="pt-BR" sz="2000" b="1" dirty="0"/>
+          </a:p>
+        </p:txBody>
+      </p:sp>
+      <p:sp>
+        <p:nvSpPr>
+          <p:cNvPr id="24" name="Seta: da Esquerda para a Direita 23">
+            <a:extLst>
+              <a:ext uri="{FF2B5EF4-FFF2-40B4-BE49-F238E27FC236}">
+                <a16:creationId xmlns:a16="http://schemas.microsoft.com/office/drawing/2014/main" xmlns="" id="{D623AB96-0004-9789-2392-077F923A52D5}"/>
               </a:ext>
             </a:extLst>
           </p:cNvPr>
@@ -4616,18 +4701,14 @@
         </p:nvSpPr>
         <p:spPr>
           <a:xfrm>
-            <a:off x="7556034" y="4940512"/>
-            <a:ext cx="2384322" cy="1637071"/>
-          </a:xfrm>
-          <a:prstGeom prst="rect">
+            <a:off x="2901720" y="5690857"/>
+            <a:ext cx="7448780" cy="346862"/>
+          </a:xfrm>
+          <a:prstGeom prst="leftRightArrow">
             <a:avLst/>
           </a:prstGeom>
           <a:noFill/>
-          <a:ln w="25400">
-            <a:solidFill>
-              <a:schemeClr val="tx1"/>
-            </a:solidFill>
-          </a:ln>
+          <a:ln w="25400"/>
         </p:spPr>
         <p:style>
           <a:lnRef idx="2">
@@ -4656,10 +4737,10 @@
       </p:sp>
       <p:sp>
         <p:nvSpPr>
-          <p:cNvPr id="23" name="CaixaDeTexto 22">
-            <a:extLst>
-              <a:ext uri="{FF2B5EF4-FFF2-40B4-BE49-F238E27FC236}">
-                <a16:creationId xmlns:a16="http://schemas.microsoft.com/office/drawing/2014/main" id="{607014D1-3D91-BD30-B3AE-D099C95002AE}"/>
+          <p:cNvPr id="25" name="CaixaDeTexto 24">
+            <a:extLst>
+              <a:ext uri="{FF2B5EF4-FFF2-40B4-BE49-F238E27FC236}">
+                <a16:creationId xmlns:a16="http://schemas.microsoft.com/office/drawing/2014/main" xmlns="" id="{D5AF4867-FAB2-B8D2-F591-F5C3016709F0}"/>
               </a:ext>
             </a:extLst>
           </p:cNvPr>
@@ -4668,8 +4749,8 @@
         </p:nvSpPr>
         <p:spPr>
           <a:xfrm>
-            <a:off x="7962899" y="4589213"/>
-            <a:ext cx="1910588" cy="400110"/>
+            <a:off x="5722764" y="5950006"/>
+            <a:ext cx="1402948" cy="400110"/>
           </a:xfrm>
           <a:prstGeom prst="rect">
             <a:avLst/>
@@ -4684,17 +4765,17 @@
           <a:p>
             <a:r>
               <a:rPr lang="pt-BR" sz="2000" b="1" dirty="0"/>
-              <a:t>Placa de Áudio</a:t>
-            </a:r>
-          </a:p>
-        </p:txBody>
-      </p:sp>
-      <p:sp>
-        <p:nvSpPr>
-          <p:cNvPr id="24" name="Seta: da Esquerda para a Direita 23">
-            <a:extLst>
-              <a:ext uri="{FF2B5EF4-FFF2-40B4-BE49-F238E27FC236}">
-                <a16:creationId xmlns:a16="http://schemas.microsoft.com/office/drawing/2014/main" id="{D623AB96-0004-9789-2392-077F923A52D5}"/>
+              <a:t>USB Áudio</a:t>
+            </a:r>
+          </a:p>
+        </p:txBody>
+      </p:sp>
+      <p:sp>
+        <p:nvSpPr>
+          <p:cNvPr id="26" name="Elipse 25">
+            <a:extLst>
+              <a:ext uri="{FF2B5EF4-FFF2-40B4-BE49-F238E27FC236}">
+                <a16:creationId xmlns:a16="http://schemas.microsoft.com/office/drawing/2014/main" xmlns="" id="{0FCBA766-4A3C-29E6-977C-8162A3074AAD}"/>
               </a:ext>
             </a:extLst>
           </p:cNvPr>
@@ -4703,14 +4784,18 @@
         </p:nvSpPr>
         <p:spPr>
           <a:xfrm>
-            <a:off x="2901720" y="5608382"/>
-            <a:ext cx="4654313" cy="346862"/>
-          </a:xfrm>
-          <a:prstGeom prst="leftRightArrow">
+            <a:off x="10481634" y="1791510"/>
+            <a:ext cx="235974" cy="221226"/>
+          </a:xfrm>
+          <a:prstGeom prst="ellipse">
             <a:avLst/>
           </a:prstGeom>
           <a:noFill/>
-          <a:ln w="25400"/>
+          <a:ln>
+            <a:solidFill>
+              <a:schemeClr val="tx1"/>
+            </a:solidFill>
+          </a:ln>
         </p:spPr>
         <p:style>
           <a:lnRef idx="2">
@@ -4739,45 +4824,10 @@
       </p:sp>
       <p:sp>
         <p:nvSpPr>
-          <p:cNvPr id="25" name="CaixaDeTexto 24">
-            <a:extLst>
-              <a:ext uri="{FF2B5EF4-FFF2-40B4-BE49-F238E27FC236}">
-                <a16:creationId xmlns:a16="http://schemas.microsoft.com/office/drawing/2014/main" id="{D5AF4867-FAB2-B8D2-F591-F5C3016709F0}"/>
-              </a:ext>
-            </a:extLst>
-          </p:cNvPr>
-          <p:cNvSpPr txBox="1"/>
-          <p:nvPr/>
-        </p:nvSpPr>
-        <p:spPr>
-          <a:xfrm>
-            <a:off x="4465464" y="5257931"/>
-            <a:ext cx="1402948" cy="400110"/>
-          </a:xfrm>
-          <a:prstGeom prst="rect">
-            <a:avLst/>
-          </a:prstGeom>
-          <a:noFill/>
-        </p:spPr>
-        <p:txBody>
-          <a:bodyPr wrap="none" rtlCol="0">
-            <a:spAutoFit/>
-          </a:bodyPr>
-          <a:lstStyle/>
-          <a:p>
-            <a:r>
-              <a:rPr lang="pt-BR" sz="2000" b="1" dirty="0"/>
-              <a:t>USB Áudio</a:t>
-            </a:r>
-          </a:p>
-        </p:txBody>
-      </p:sp>
-      <p:sp>
-        <p:nvSpPr>
-          <p:cNvPr id="26" name="Elipse 25">
-            <a:extLst>
-              <a:ext uri="{FF2B5EF4-FFF2-40B4-BE49-F238E27FC236}">
-                <a16:creationId xmlns:a16="http://schemas.microsoft.com/office/drawing/2014/main" id="{0FCBA766-4A3C-29E6-977C-8162A3074AAD}"/>
+          <p:cNvPr id="27" name="Elipse 26">
+            <a:extLst>
+              <a:ext uri="{FF2B5EF4-FFF2-40B4-BE49-F238E27FC236}">
+                <a16:creationId xmlns:a16="http://schemas.microsoft.com/office/drawing/2014/main" xmlns="" id="{075457F7-7103-90B2-4503-55D46B1578B3}"/>
               </a:ext>
             </a:extLst>
           </p:cNvPr>
@@ -4786,7 +4836,7 @@
         </p:nvSpPr>
         <p:spPr>
           <a:xfrm>
-            <a:off x="9558658" y="5083276"/>
+            <a:off x="10496809" y="2804436"/>
             <a:ext cx="235974" cy="221226"/>
           </a:xfrm>
           <a:prstGeom prst="ellipse">
@@ -4826,10 +4876,10 @@
       </p:sp>
       <p:sp>
         <p:nvSpPr>
-          <p:cNvPr id="27" name="Elipse 26">
-            <a:extLst>
-              <a:ext uri="{FF2B5EF4-FFF2-40B4-BE49-F238E27FC236}">
-                <a16:creationId xmlns:a16="http://schemas.microsoft.com/office/drawing/2014/main" id="{075457F7-7103-90B2-4503-55D46B1578B3}"/>
+          <p:cNvPr id="28" name="Elipse 27">
+            <a:extLst>
+              <a:ext uri="{FF2B5EF4-FFF2-40B4-BE49-F238E27FC236}">
+                <a16:creationId xmlns:a16="http://schemas.microsoft.com/office/drawing/2014/main" xmlns="" id="{BBE680FF-CA0B-C3AB-2E37-04B33505E5A3}"/>
               </a:ext>
             </a:extLst>
           </p:cNvPr>
@@ -4838,7 +4888,7 @@
         </p:nvSpPr>
         <p:spPr>
           <a:xfrm>
-            <a:off x="9558658" y="5435472"/>
+            <a:off x="10485059" y="4069177"/>
             <a:ext cx="235974" cy="221226"/>
           </a:xfrm>
           <a:prstGeom prst="ellipse">
@@ -4878,10 +4928,10 @@
       </p:sp>
       <p:sp>
         <p:nvSpPr>
-          <p:cNvPr id="28" name="Elipse 27">
-            <a:extLst>
-              <a:ext uri="{FF2B5EF4-FFF2-40B4-BE49-F238E27FC236}">
-                <a16:creationId xmlns:a16="http://schemas.microsoft.com/office/drawing/2014/main" id="{BBE680FF-CA0B-C3AB-2E37-04B33505E5A3}"/>
+          <p:cNvPr id="29" name="Elipse 28">
+            <a:extLst>
+              <a:ext uri="{FF2B5EF4-FFF2-40B4-BE49-F238E27FC236}">
+                <a16:creationId xmlns:a16="http://schemas.microsoft.com/office/drawing/2014/main" xmlns="" id="{E51FD0E9-ECBB-0C63-5C53-00357AAAF1D9}"/>
               </a:ext>
             </a:extLst>
           </p:cNvPr>
@@ -4890,7 +4940,7 @@
         </p:nvSpPr>
         <p:spPr>
           <a:xfrm>
-            <a:off x="9557959" y="5828202"/>
+            <a:off x="10535859" y="5105525"/>
             <a:ext cx="235974" cy="221226"/>
           </a:xfrm>
           <a:prstGeom prst="ellipse">
@@ -4930,10 +4980,150 @@
       </p:sp>
       <p:sp>
         <p:nvSpPr>
-          <p:cNvPr id="29" name="Elipse 28">
-            <a:extLst>
-              <a:ext uri="{FF2B5EF4-FFF2-40B4-BE49-F238E27FC236}">
-                <a16:creationId xmlns:a16="http://schemas.microsoft.com/office/drawing/2014/main" id="{E51FD0E9-ECBB-0C63-5C53-00357AAAF1D9}"/>
+          <p:cNvPr id="30" name="CaixaDeTexto 29">
+            <a:extLst>
+              <a:ext uri="{FF2B5EF4-FFF2-40B4-BE49-F238E27FC236}">
+                <a16:creationId xmlns:a16="http://schemas.microsoft.com/office/drawing/2014/main" xmlns="" id="{2ECDC66F-11B9-F343-1ACF-A7E24A25055D}"/>
+              </a:ext>
+            </a:extLst>
+          </p:cNvPr>
+          <p:cNvSpPr txBox="1"/>
+          <p:nvPr/>
+        </p:nvSpPr>
+        <p:spPr>
+          <a:xfrm>
+            <a:off x="10783175" y="1712294"/>
+            <a:ext cx="779381" cy="400110"/>
+          </a:xfrm>
+          <a:prstGeom prst="rect">
+            <a:avLst/>
+          </a:prstGeom>
+          <a:noFill/>
+        </p:spPr>
+        <p:txBody>
+          <a:bodyPr wrap="none" rtlCol="0">
+            <a:spAutoFit/>
+          </a:bodyPr>
+          <a:lstStyle/>
+          <a:p>
+            <a:r>
+              <a:rPr lang="pt-BR" sz="2000" b="1" dirty="0"/>
+              <a:t>RX (I)</a:t>
+            </a:r>
+          </a:p>
+        </p:txBody>
+      </p:sp>
+      <p:sp>
+        <p:nvSpPr>
+          <p:cNvPr id="31" name="CaixaDeTexto 30">
+            <a:extLst>
+              <a:ext uri="{FF2B5EF4-FFF2-40B4-BE49-F238E27FC236}">
+                <a16:creationId xmlns:a16="http://schemas.microsoft.com/office/drawing/2014/main" xmlns="" id="{0A640CA7-9F72-26B5-04B2-1AE12EC251C3}"/>
+              </a:ext>
+            </a:extLst>
+          </p:cNvPr>
+          <p:cNvSpPr txBox="1"/>
+          <p:nvPr/>
+        </p:nvSpPr>
+        <p:spPr>
+          <a:xfrm>
+            <a:off x="10810390" y="2720036"/>
+            <a:ext cx="893193" cy="400110"/>
+          </a:xfrm>
+          <a:prstGeom prst="rect">
+            <a:avLst/>
+          </a:prstGeom>
+          <a:noFill/>
+        </p:spPr>
+        <p:txBody>
+          <a:bodyPr wrap="none" rtlCol="0">
+            <a:spAutoFit/>
+          </a:bodyPr>
+          <a:lstStyle/>
+          <a:p>
+            <a:r>
+              <a:rPr lang="pt-BR" sz="2000" b="1" dirty="0"/>
+              <a:t>RX (Q)</a:t>
+            </a:r>
+          </a:p>
+        </p:txBody>
+      </p:sp>
+      <p:sp>
+        <p:nvSpPr>
+          <p:cNvPr id="32" name="CaixaDeTexto 31">
+            <a:extLst>
+              <a:ext uri="{FF2B5EF4-FFF2-40B4-BE49-F238E27FC236}">
+                <a16:creationId xmlns:a16="http://schemas.microsoft.com/office/drawing/2014/main" xmlns="" id="{CFD29719-2B6A-0E35-77B3-5E21E6CA7E40}"/>
+              </a:ext>
+            </a:extLst>
+          </p:cNvPr>
+          <p:cNvSpPr txBox="1"/>
+          <p:nvPr/>
+        </p:nvSpPr>
+        <p:spPr>
+          <a:xfrm>
+            <a:off x="10806176" y="3984246"/>
+            <a:ext cx="747320" cy="400110"/>
+          </a:xfrm>
+          <a:prstGeom prst="rect">
+            <a:avLst/>
+          </a:prstGeom>
+          <a:noFill/>
+        </p:spPr>
+        <p:txBody>
+          <a:bodyPr wrap="none" rtlCol="0">
+            <a:spAutoFit/>
+          </a:bodyPr>
+          <a:lstStyle/>
+          <a:p>
+            <a:r>
+              <a:rPr lang="pt-BR" sz="2000" b="1" dirty="0"/>
+              <a:t>TX (I)</a:t>
+            </a:r>
+          </a:p>
+        </p:txBody>
+      </p:sp>
+      <p:sp>
+        <p:nvSpPr>
+          <p:cNvPr id="33" name="CaixaDeTexto 32">
+            <a:extLst>
+              <a:ext uri="{FF2B5EF4-FFF2-40B4-BE49-F238E27FC236}">
+                <a16:creationId xmlns:a16="http://schemas.microsoft.com/office/drawing/2014/main" xmlns="" id="{027E1D0C-6BEC-4387-0A91-E0CA7E1C0FAD}"/>
+              </a:ext>
+            </a:extLst>
+          </p:cNvPr>
+          <p:cNvSpPr txBox="1"/>
+          <p:nvPr/>
+        </p:nvSpPr>
+        <p:spPr>
+          <a:xfrm>
+            <a:off x="10861737" y="5003383"/>
+            <a:ext cx="861133" cy="400110"/>
+          </a:xfrm>
+          <a:prstGeom prst="rect">
+            <a:avLst/>
+          </a:prstGeom>
+          <a:noFill/>
+        </p:spPr>
+        <p:txBody>
+          <a:bodyPr wrap="none" rtlCol="0">
+            <a:spAutoFit/>
+          </a:bodyPr>
+          <a:lstStyle/>
+          <a:p>
+            <a:r>
+              <a:rPr lang="pt-BR" sz="2000" b="1" dirty="0"/>
+              <a:t>TX (Q)</a:t>
+            </a:r>
+          </a:p>
+        </p:txBody>
+      </p:sp>
+      <p:sp>
+        <p:nvSpPr>
+          <p:cNvPr id="42" name="Elipse 41">
+            <a:extLst>
+              <a:ext uri="{FF2B5EF4-FFF2-40B4-BE49-F238E27FC236}">
+                <a16:creationId xmlns:a16="http://schemas.microsoft.com/office/drawing/2014/main" xmlns="" id="{DDF816FE-F327-4BED-ABAB-0ADD644C6680}"/>
               </a:ext>
             </a:extLst>
           </p:cNvPr>
@@ -4942,7 +5132,7 @@
         </p:nvSpPr>
         <p:spPr>
           <a:xfrm>
-            <a:off x="9557959" y="6216850"/>
+            <a:off x="9089264" y="1738867"/>
             <a:ext cx="235974" cy="221226"/>
           </a:xfrm>
           <a:prstGeom prst="ellipse">
@@ -4982,150 +5172,10 @@
       </p:sp>
       <p:sp>
         <p:nvSpPr>
-          <p:cNvPr id="30" name="CaixaDeTexto 29">
-            <a:extLst>
-              <a:ext uri="{FF2B5EF4-FFF2-40B4-BE49-F238E27FC236}">
-                <a16:creationId xmlns:a16="http://schemas.microsoft.com/office/drawing/2014/main" id="{2ECDC66F-11B9-F343-1ACF-A7E24A25055D}"/>
-              </a:ext>
-            </a:extLst>
-          </p:cNvPr>
-          <p:cNvSpPr txBox="1"/>
-          <p:nvPr/>
-        </p:nvSpPr>
-        <p:spPr>
-          <a:xfrm>
-            <a:off x="8799666" y="4993834"/>
-            <a:ext cx="779381" cy="400110"/>
-          </a:xfrm>
-          <a:prstGeom prst="rect">
-            <a:avLst/>
-          </a:prstGeom>
-          <a:noFill/>
-        </p:spPr>
-        <p:txBody>
-          <a:bodyPr wrap="none" rtlCol="0">
-            <a:spAutoFit/>
-          </a:bodyPr>
-          <a:lstStyle/>
-          <a:p>
-            <a:r>
-              <a:rPr lang="pt-BR" sz="2000" b="1" dirty="0"/>
-              <a:t>RX (I)</a:t>
-            </a:r>
-          </a:p>
-        </p:txBody>
-      </p:sp>
-      <p:sp>
-        <p:nvSpPr>
-          <p:cNvPr id="31" name="CaixaDeTexto 30">
-            <a:extLst>
-              <a:ext uri="{FF2B5EF4-FFF2-40B4-BE49-F238E27FC236}">
-                <a16:creationId xmlns:a16="http://schemas.microsoft.com/office/drawing/2014/main" id="{0A640CA7-9F72-26B5-04B2-1AE12EC251C3}"/>
-              </a:ext>
-            </a:extLst>
-          </p:cNvPr>
-          <p:cNvSpPr txBox="1"/>
-          <p:nvPr/>
-        </p:nvSpPr>
-        <p:spPr>
-          <a:xfrm>
-            <a:off x="8735507" y="5323199"/>
-            <a:ext cx="893193" cy="400110"/>
-          </a:xfrm>
-          <a:prstGeom prst="rect">
-            <a:avLst/>
-          </a:prstGeom>
-          <a:noFill/>
-        </p:spPr>
-        <p:txBody>
-          <a:bodyPr wrap="none" rtlCol="0">
-            <a:spAutoFit/>
-          </a:bodyPr>
-          <a:lstStyle/>
-          <a:p>
-            <a:r>
-              <a:rPr lang="pt-BR" sz="2000" b="1" dirty="0"/>
-              <a:t>RX (Q)</a:t>
-            </a:r>
-          </a:p>
-        </p:txBody>
-      </p:sp>
-      <p:sp>
-        <p:nvSpPr>
-          <p:cNvPr id="32" name="CaixaDeTexto 31">
-            <a:extLst>
-              <a:ext uri="{FF2B5EF4-FFF2-40B4-BE49-F238E27FC236}">
-                <a16:creationId xmlns:a16="http://schemas.microsoft.com/office/drawing/2014/main" id="{CFD29719-2B6A-0E35-77B3-5E21E6CA7E40}"/>
-              </a:ext>
-            </a:extLst>
-          </p:cNvPr>
-          <p:cNvSpPr txBox="1"/>
-          <p:nvPr/>
-        </p:nvSpPr>
-        <p:spPr>
-          <a:xfrm>
-            <a:off x="8875776" y="5743271"/>
-            <a:ext cx="747320" cy="400110"/>
-          </a:xfrm>
-          <a:prstGeom prst="rect">
-            <a:avLst/>
-          </a:prstGeom>
-          <a:noFill/>
-        </p:spPr>
-        <p:txBody>
-          <a:bodyPr wrap="none" rtlCol="0">
-            <a:spAutoFit/>
-          </a:bodyPr>
-          <a:lstStyle/>
-          <a:p>
-            <a:r>
-              <a:rPr lang="pt-BR" sz="2000" b="1" dirty="0"/>
-              <a:t>TX (I)</a:t>
-            </a:r>
-          </a:p>
-        </p:txBody>
-      </p:sp>
-      <p:sp>
-        <p:nvSpPr>
-          <p:cNvPr id="33" name="CaixaDeTexto 32">
-            <a:extLst>
-              <a:ext uri="{FF2B5EF4-FFF2-40B4-BE49-F238E27FC236}">
-                <a16:creationId xmlns:a16="http://schemas.microsoft.com/office/drawing/2014/main" id="{027E1D0C-6BEC-4387-0A91-E0CA7E1C0FAD}"/>
-              </a:ext>
-            </a:extLst>
-          </p:cNvPr>
-          <p:cNvSpPr txBox="1"/>
-          <p:nvPr/>
-        </p:nvSpPr>
-        <p:spPr>
-          <a:xfrm>
-            <a:off x="8766237" y="6127408"/>
-            <a:ext cx="861133" cy="400110"/>
-          </a:xfrm>
-          <a:prstGeom prst="rect">
-            <a:avLst/>
-          </a:prstGeom>
-          <a:noFill/>
-        </p:spPr>
-        <p:txBody>
-          <a:bodyPr wrap="none" rtlCol="0">
-            <a:spAutoFit/>
-          </a:bodyPr>
-          <a:lstStyle/>
-          <a:p>
-            <a:r>
-              <a:rPr lang="pt-BR" sz="2000" b="1" dirty="0"/>
-              <a:t>TX (Q)</a:t>
-            </a:r>
-          </a:p>
-        </p:txBody>
-      </p:sp>
-      <p:sp>
-        <p:nvSpPr>
-          <p:cNvPr id="42" name="Elipse 41">
-            <a:extLst>
-              <a:ext uri="{FF2B5EF4-FFF2-40B4-BE49-F238E27FC236}">
-                <a16:creationId xmlns:a16="http://schemas.microsoft.com/office/drawing/2014/main" id="{DDF816FE-F327-4BED-ABAB-0ADD644C6680}"/>
+          <p:cNvPr id="43" name="Elipse 42">
+            <a:extLst>
+              <a:ext uri="{FF2B5EF4-FFF2-40B4-BE49-F238E27FC236}">
+                <a16:creationId xmlns:a16="http://schemas.microsoft.com/office/drawing/2014/main" xmlns="" id="{54687A0B-0E56-E09E-6AFB-A237D19B4687}"/>
               </a:ext>
             </a:extLst>
           </p:cNvPr>
@@ -5134,7 +5184,7 @@
         </p:nvSpPr>
         <p:spPr>
           <a:xfrm>
-            <a:off x="9622489" y="2518667"/>
+            <a:off x="9063039" y="2805726"/>
             <a:ext cx="235974" cy="221226"/>
           </a:xfrm>
           <a:prstGeom prst="ellipse">
@@ -5174,166 +5224,10 @@
       </p:sp>
       <p:sp>
         <p:nvSpPr>
-          <p:cNvPr id="43" name="Elipse 42">
-            <a:extLst>
-              <a:ext uri="{FF2B5EF4-FFF2-40B4-BE49-F238E27FC236}">
-                <a16:creationId xmlns:a16="http://schemas.microsoft.com/office/drawing/2014/main" id="{54687A0B-0E56-E09E-6AFB-A237D19B4687}"/>
-              </a:ext>
-            </a:extLst>
-          </p:cNvPr>
-          <p:cNvSpPr/>
-          <p:nvPr/>
-        </p:nvSpPr>
-        <p:spPr>
-          <a:xfrm>
-            <a:off x="9622489" y="2870863"/>
-            <a:ext cx="235974" cy="221226"/>
-          </a:xfrm>
-          <a:prstGeom prst="ellipse">
-            <a:avLst/>
-          </a:prstGeom>
-          <a:noFill/>
-          <a:ln>
-            <a:solidFill>
-              <a:schemeClr val="tx1"/>
-            </a:solidFill>
-          </a:ln>
-        </p:spPr>
-        <p:style>
-          <a:lnRef idx="2">
-            <a:schemeClr val="accent1">
-              <a:shade val="15000"/>
-            </a:schemeClr>
-          </a:lnRef>
-          <a:fillRef idx="1">
-            <a:schemeClr val="accent1"/>
-          </a:fillRef>
-          <a:effectRef idx="0">
-            <a:schemeClr val="accent1"/>
-          </a:effectRef>
-          <a:fontRef idx="minor">
-            <a:schemeClr val="lt1"/>
-          </a:fontRef>
-        </p:style>
-        <p:txBody>
-          <a:bodyPr rtlCol="0" anchor="ctr"/>
-          <a:lstStyle/>
-          <a:p>
-            <a:pPr algn="ctr"/>
-            <a:endParaRPr lang="pt-BR"/>
-          </a:p>
-        </p:txBody>
-      </p:sp>
-      <p:sp>
-        <p:nvSpPr>
-          <p:cNvPr id="44" name="Elipse 43">
-            <a:extLst>
-              <a:ext uri="{FF2B5EF4-FFF2-40B4-BE49-F238E27FC236}">
-                <a16:creationId xmlns:a16="http://schemas.microsoft.com/office/drawing/2014/main" id="{60F8A34D-04D5-D913-F52D-9D24D46E7C2A}"/>
-              </a:ext>
-            </a:extLst>
-          </p:cNvPr>
-          <p:cNvSpPr/>
-          <p:nvPr/>
-        </p:nvSpPr>
-        <p:spPr>
-          <a:xfrm>
-            <a:off x="9621790" y="3263593"/>
-            <a:ext cx="235974" cy="221226"/>
-          </a:xfrm>
-          <a:prstGeom prst="ellipse">
-            <a:avLst/>
-          </a:prstGeom>
-          <a:noFill/>
-          <a:ln>
-            <a:solidFill>
-              <a:schemeClr val="tx1"/>
-            </a:solidFill>
-          </a:ln>
-        </p:spPr>
-        <p:style>
-          <a:lnRef idx="2">
-            <a:schemeClr val="accent1">
-              <a:shade val="15000"/>
-            </a:schemeClr>
-          </a:lnRef>
-          <a:fillRef idx="1">
-            <a:schemeClr val="accent1"/>
-          </a:fillRef>
-          <a:effectRef idx="0">
-            <a:schemeClr val="accent1"/>
-          </a:effectRef>
-          <a:fontRef idx="minor">
-            <a:schemeClr val="lt1"/>
-          </a:fontRef>
-        </p:style>
-        <p:txBody>
-          <a:bodyPr rtlCol="0" anchor="ctr"/>
-          <a:lstStyle/>
-          <a:p>
-            <a:pPr algn="ctr"/>
-            <a:endParaRPr lang="pt-BR"/>
-          </a:p>
-        </p:txBody>
-      </p:sp>
-      <p:sp>
-        <p:nvSpPr>
-          <p:cNvPr id="45" name="Elipse 44">
-            <a:extLst>
-              <a:ext uri="{FF2B5EF4-FFF2-40B4-BE49-F238E27FC236}">
-                <a16:creationId xmlns:a16="http://schemas.microsoft.com/office/drawing/2014/main" id="{B556C2F6-2CE1-99ED-E431-BEC4ACC680DB}"/>
-              </a:ext>
-            </a:extLst>
-          </p:cNvPr>
-          <p:cNvSpPr/>
-          <p:nvPr/>
-        </p:nvSpPr>
-        <p:spPr>
-          <a:xfrm>
-            <a:off x="9621790" y="3652241"/>
-            <a:ext cx="235974" cy="221226"/>
-          </a:xfrm>
-          <a:prstGeom prst="ellipse">
-            <a:avLst/>
-          </a:prstGeom>
-          <a:noFill/>
-          <a:ln>
-            <a:solidFill>
-              <a:schemeClr val="tx1"/>
-            </a:solidFill>
-          </a:ln>
-        </p:spPr>
-        <p:style>
-          <a:lnRef idx="2">
-            <a:schemeClr val="accent1">
-              <a:shade val="15000"/>
-            </a:schemeClr>
-          </a:lnRef>
-          <a:fillRef idx="1">
-            <a:schemeClr val="accent1"/>
-          </a:fillRef>
-          <a:effectRef idx="0">
-            <a:schemeClr val="accent1"/>
-          </a:effectRef>
-          <a:fontRef idx="minor">
-            <a:schemeClr val="lt1"/>
-          </a:fontRef>
-        </p:style>
-        <p:txBody>
-          <a:bodyPr rtlCol="0" anchor="ctr"/>
-          <a:lstStyle/>
-          <a:p>
-            <a:pPr algn="ctr"/>
-            <a:endParaRPr lang="pt-BR"/>
-          </a:p>
-        </p:txBody>
-      </p:sp>
-      <p:sp>
-        <p:nvSpPr>
           <p:cNvPr id="46" name="CaixaDeTexto 45">
             <a:extLst>
               <a:ext uri="{FF2B5EF4-FFF2-40B4-BE49-F238E27FC236}">
-                <a16:creationId xmlns:a16="http://schemas.microsoft.com/office/drawing/2014/main" id="{E58ABD62-728D-400C-7F8F-16407E1BDEFE}"/>
+                <a16:creationId xmlns:a16="http://schemas.microsoft.com/office/drawing/2014/main" xmlns="" id="{E58ABD62-728D-400C-7F8F-16407E1BDEFE}"/>
               </a:ext>
             </a:extLst>
           </p:cNvPr>
@@ -5342,7 +5236,7 @@
         </p:nvSpPr>
         <p:spPr>
           <a:xfrm>
-            <a:off x="8905892" y="2429225"/>
+            <a:off x="8372667" y="1649425"/>
             <a:ext cx="726481" cy="400110"/>
           </a:xfrm>
           <a:prstGeom prst="rect">
@@ -5368,7 +5262,7 @@
           <p:cNvPr id="47" name="CaixaDeTexto 46">
             <a:extLst>
               <a:ext uri="{FF2B5EF4-FFF2-40B4-BE49-F238E27FC236}">
-                <a16:creationId xmlns:a16="http://schemas.microsoft.com/office/drawing/2014/main" id="{36C2A0E8-C9BC-6B87-52D8-8780B2203D03}"/>
+                <a16:creationId xmlns:a16="http://schemas.microsoft.com/office/drawing/2014/main" xmlns="" id="{36C2A0E8-C9BC-6B87-52D8-8780B2203D03}"/>
               </a:ext>
             </a:extLst>
           </p:cNvPr>
@@ -5377,7 +5271,7 @@
         </p:nvSpPr>
         <p:spPr>
           <a:xfrm>
-            <a:off x="8842223" y="2774230"/>
+            <a:off x="8120147" y="2712393"/>
             <a:ext cx="840295" cy="400110"/>
           </a:xfrm>
           <a:prstGeom prst="rect">
@@ -5400,10 +5294,10 @@
       </p:sp>
       <p:sp>
         <p:nvSpPr>
-          <p:cNvPr id="48" name="CaixaDeTexto 47">
-            <a:extLst>
-              <a:ext uri="{FF2B5EF4-FFF2-40B4-BE49-F238E27FC236}">
-                <a16:creationId xmlns:a16="http://schemas.microsoft.com/office/drawing/2014/main" id="{5F32A93C-725B-97AD-237E-9043A2F198FB}"/>
+          <p:cNvPr id="60" name="CaixaDeTexto 59">
+            <a:extLst>
+              <a:ext uri="{FF2B5EF4-FFF2-40B4-BE49-F238E27FC236}">
+                <a16:creationId xmlns:a16="http://schemas.microsoft.com/office/drawing/2014/main" xmlns="" id="{2D678683-9958-033E-DDB1-6B5951D6A1D1}"/>
               </a:ext>
             </a:extLst>
           </p:cNvPr>
@@ -5412,8 +5306,8 @@
         </p:nvSpPr>
         <p:spPr>
           <a:xfrm>
-            <a:off x="8954163" y="3148137"/>
-            <a:ext cx="694421" cy="400110"/>
+            <a:off x="7460347" y="2245710"/>
+            <a:ext cx="439544" cy="400110"/>
           </a:xfrm>
           <a:prstGeom prst="rect">
             <a:avLst/>
@@ -5428,17 +5322,17 @@
           <a:p>
             <a:r>
               <a:rPr lang="pt-BR" sz="2000" b="1" dirty="0"/>
-              <a:t>TX(I)</a:t>
-            </a:r>
-          </a:p>
-        </p:txBody>
-      </p:sp>
-      <p:sp>
-        <p:nvSpPr>
-          <p:cNvPr id="49" name="CaixaDeTexto 48">
-            <a:extLst>
-              <a:ext uri="{FF2B5EF4-FFF2-40B4-BE49-F238E27FC236}">
-                <a16:creationId xmlns:a16="http://schemas.microsoft.com/office/drawing/2014/main" id="{2C4D0AA5-BE4C-D6C5-F2AC-E4E7A636BD57}"/>
+              <a:t>0º</a:t>
+            </a:r>
+          </a:p>
+        </p:txBody>
+      </p:sp>
+      <p:sp>
+        <p:nvSpPr>
+          <p:cNvPr id="61" name="CaixaDeTexto 60">
+            <a:extLst>
+              <a:ext uri="{FF2B5EF4-FFF2-40B4-BE49-F238E27FC236}">
+                <a16:creationId xmlns:a16="http://schemas.microsoft.com/office/drawing/2014/main" xmlns="" id="{BDD3728C-B459-9E15-1403-477384A7810F}"/>
               </a:ext>
             </a:extLst>
           </p:cNvPr>
@@ -5447,8 +5341,8 @@
         </p:nvSpPr>
         <p:spPr>
           <a:xfrm>
-            <a:off x="8890160" y="3531502"/>
-            <a:ext cx="808235" cy="400110"/>
+            <a:off x="7420773" y="2705019"/>
+            <a:ext cx="575799" cy="400110"/>
           </a:xfrm>
           <a:prstGeom prst="rect">
             <a:avLst/>
@@ -5463,76 +5357,6 @@
           <a:p>
             <a:r>
               <a:rPr lang="pt-BR" sz="2000" b="1" dirty="0"/>
-              <a:t>TX(Q)</a:t>
-            </a:r>
-          </a:p>
-        </p:txBody>
-      </p:sp>
-      <p:sp>
-        <p:nvSpPr>
-          <p:cNvPr id="60" name="CaixaDeTexto 59">
-            <a:extLst>
-              <a:ext uri="{FF2B5EF4-FFF2-40B4-BE49-F238E27FC236}">
-                <a16:creationId xmlns:a16="http://schemas.microsoft.com/office/drawing/2014/main" id="{2D678683-9958-033E-DDB1-6B5951D6A1D1}"/>
-              </a:ext>
-            </a:extLst>
-          </p:cNvPr>
-          <p:cNvSpPr txBox="1"/>
-          <p:nvPr/>
-        </p:nvSpPr>
-        <p:spPr>
-          <a:xfrm>
-            <a:off x="7993572" y="3025510"/>
-            <a:ext cx="439544" cy="400110"/>
-          </a:xfrm>
-          <a:prstGeom prst="rect">
-            <a:avLst/>
-          </a:prstGeom>
-          <a:noFill/>
-        </p:spPr>
-        <p:txBody>
-          <a:bodyPr wrap="none" rtlCol="0">
-            <a:spAutoFit/>
-          </a:bodyPr>
-          <a:lstStyle/>
-          <a:p>
-            <a:r>
-              <a:rPr lang="pt-BR" sz="2000" b="1" dirty="0"/>
-              <a:t>0º</a:t>
-            </a:r>
-          </a:p>
-        </p:txBody>
-      </p:sp>
-      <p:sp>
-        <p:nvSpPr>
-          <p:cNvPr id="61" name="CaixaDeTexto 60">
-            <a:extLst>
-              <a:ext uri="{FF2B5EF4-FFF2-40B4-BE49-F238E27FC236}">
-                <a16:creationId xmlns:a16="http://schemas.microsoft.com/office/drawing/2014/main" id="{BDD3728C-B459-9E15-1403-477384A7810F}"/>
-              </a:ext>
-            </a:extLst>
-          </p:cNvPr>
-          <p:cNvSpPr txBox="1"/>
-          <p:nvPr/>
-        </p:nvSpPr>
-        <p:spPr>
-          <a:xfrm>
-            <a:off x="7953998" y="3484819"/>
-            <a:ext cx="575799" cy="400110"/>
-          </a:xfrm>
-          <a:prstGeom prst="rect">
-            <a:avLst/>
-          </a:prstGeom>
-          <a:noFill/>
-        </p:spPr>
-        <p:txBody>
-          <a:bodyPr wrap="none" rtlCol="0">
-            <a:spAutoFit/>
-          </a:bodyPr>
-          <a:lstStyle/>
-          <a:p>
-            <a:r>
-              <a:rPr lang="pt-BR" sz="2000" b="1" dirty="0"/>
               <a:t>90º</a:t>
             </a:r>
           </a:p>
@@ -5543,7 +5367,7 @@
           <p:cNvPr id="73" name="Conector reto 72">
             <a:extLst>
               <a:ext uri="{FF2B5EF4-FFF2-40B4-BE49-F238E27FC236}">
-                <a16:creationId xmlns:a16="http://schemas.microsoft.com/office/drawing/2014/main" id="{640AF185-58CA-FFA2-77DE-096A154FBB1B}"/>
+                <a16:creationId xmlns:a16="http://schemas.microsoft.com/office/drawing/2014/main" xmlns="" id="{640AF185-58CA-FFA2-77DE-096A154FBB1B}"/>
               </a:ext>
             </a:extLst>
           </p:cNvPr>
@@ -5551,52 +5375,9 @@
           <p:nvPr/>
         </p:nvCxnSpPr>
         <p:spPr>
-          <a:xfrm>
-            <a:off x="8090999" y="387723"/>
-            <a:ext cx="336251" cy="269143"/>
-          </a:xfrm>
-          <a:prstGeom prst="line">
-            <a:avLst/>
-          </a:prstGeom>
-          <a:ln w="38100">
-            <a:solidFill>
-              <a:schemeClr val="tx1"/>
-            </a:solidFill>
-          </a:ln>
-        </p:spPr>
-        <p:style>
-          <a:lnRef idx="2">
-            <a:schemeClr val="accent1"/>
-          </a:lnRef>
-          <a:fillRef idx="0">
-            <a:schemeClr val="accent1"/>
-          </a:fillRef>
-          <a:effectRef idx="1">
-            <a:schemeClr val="accent1"/>
-          </a:effectRef>
-          <a:fontRef idx="minor">
-            <a:schemeClr val="tx1"/>
-          </a:fontRef>
-        </p:style>
-      </p:cxnSp>
-      <p:cxnSp>
-        <p:nvCxnSpPr>
-          <p:cNvPr id="75" name="Conector reto 74">
-            <a:extLst>
-              <a:ext uri="{FF2B5EF4-FFF2-40B4-BE49-F238E27FC236}">
-                <a16:creationId xmlns:a16="http://schemas.microsoft.com/office/drawing/2014/main" id="{8D07F1B6-6C91-A4DC-542E-412F5D5BC056}"/>
-              </a:ext>
-            </a:extLst>
-          </p:cNvPr>
-          <p:cNvCxnSpPr>
-            <a:cxnSpLocks/>
-          </p:cNvCxnSpPr>
-          <p:nvPr/>
-        </p:nvCxnSpPr>
-        <p:spPr>
-          <a:xfrm flipV="1">
-            <a:off x="8428332" y="387722"/>
-            <a:ext cx="295472" cy="269143"/>
+          <a:xfrm rot="16200000" flipH="1">
+            <a:off x="6260727" y="716269"/>
+            <a:ext cx="419833" cy="316689"/>
           </a:xfrm>
           <a:prstGeom prst="line">
             <a:avLst/>
@@ -5627,7 +5408,7 @@
           <p:cNvPr id="79" name="Conector reto 78">
             <a:extLst>
               <a:ext uri="{FF2B5EF4-FFF2-40B4-BE49-F238E27FC236}">
-                <a16:creationId xmlns:a16="http://schemas.microsoft.com/office/drawing/2014/main" id="{A8E09D53-DF6A-4093-F7E8-B58B09DF94CA}"/>
+                <a16:creationId xmlns:a16="http://schemas.microsoft.com/office/drawing/2014/main" xmlns="" id="{A8E09D53-DF6A-4093-F7E8-B58B09DF94CA}"/>
               </a:ext>
             </a:extLst>
           </p:cNvPr>
@@ -5636,7 +5417,7 @@
         </p:nvCxnSpPr>
         <p:spPr>
           <a:xfrm>
-            <a:off x="8081166" y="386920"/>
+            <a:off x="6327866" y="663895"/>
             <a:ext cx="631723" cy="0"/>
           </a:xfrm>
           <a:prstGeom prst="line">
@@ -5665,10 +5446,10 @@
       </p:cxnSp>
       <p:sp>
         <p:nvSpPr>
-          <p:cNvPr id="80" name="CaixaDeTexto 79">
-            <a:extLst>
-              <a:ext uri="{FF2B5EF4-FFF2-40B4-BE49-F238E27FC236}">
-                <a16:creationId xmlns:a16="http://schemas.microsoft.com/office/drawing/2014/main" id="{E34886EC-2EFA-644F-2F76-945E13B816AE}"/>
+          <p:cNvPr id="94" name="CaixaDeTexto 93">
+            <a:extLst>
+              <a:ext uri="{FF2B5EF4-FFF2-40B4-BE49-F238E27FC236}">
+                <a16:creationId xmlns:a16="http://schemas.microsoft.com/office/drawing/2014/main" xmlns="" id="{47937699-4C9D-7A70-D0CE-DE69E92C68E7}"/>
               </a:ext>
             </a:extLst>
           </p:cNvPr>
@@ -5677,8 +5458,8 @@
         </p:nvSpPr>
         <p:spPr>
           <a:xfrm>
-            <a:off x="4736839" y="3207208"/>
-            <a:ext cx="623007" cy="400110"/>
+            <a:off x="9431707" y="2193150"/>
+            <a:ext cx="800219" cy="400110"/>
           </a:xfrm>
           <a:prstGeom prst="rect">
             <a:avLst/>
@@ -5686,24 +5467,103 @@
           <a:noFill/>
         </p:spPr>
         <p:txBody>
-          <a:bodyPr wrap="square" rtlCol="0">
+          <a:bodyPr wrap="none" rtlCol="0">
             <a:spAutoFit/>
           </a:bodyPr>
           <a:lstStyle/>
           <a:p>
             <a:r>
               <a:rPr lang="pt-BR" sz="2000" b="1" dirty="0"/>
-              <a:t>  LO  </a:t>
-            </a:r>
-          </a:p>
-        </p:txBody>
-      </p:sp>
-      <p:sp>
-        <p:nvSpPr>
-          <p:cNvPr id="93" name="Seta: Curva para a Esquerda 92">
-            <a:extLst>
-              <a:ext uri="{FF2B5EF4-FFF2-40B4-BE49-F238E27FC236}">
-                <a16:creationId xmlns:a16="http://schemas.microsoft.com/office/drawing/2014/main" id="{8266AAFA-F10D-ADFC-7E3C-D0BA8497C840}"/>
+              <a:t>Input</a:t>
+            </a:r>
+          </a:p>
+        </p:txBody>
+      </p:sp>
+      <p:cxnSp>
+        <p:nvCxnSpPr>
+          <p:cNvPr id="50" name="Conector reto 49">
+            <a:extLst>
+              <a:ext uri="{FF2B5EF4-FFF2-40B4-BE49-F238E27FC236}">
+                <a16:creationId xmlns:a16="http://schemas.microsoft.com/office/drawing/2014/main" xmlns="" id="{811D5894-47D2-9A9D-7580-F119056FAA8C}"/>
+              </a:ext>
+            </a:extLst>
+          </p:cNvPr>
+          <p:cNvCxnSpPr>
+            <a:cxnSpLocks/>
+          </p:cNvCxnSpPr>
+          <p:nvPr/>
+        </p:nvCxnSpPr>
+        <p:spPr>
+          <a:xfrm rot="5400000">
+            <a:off x="6562727" y="720726"/>
+            <a:ext cx="450851" cy="292103"/>
+          </a:xfrm>
+          <a:prstGeom prst="line">
+            <a:avLst/>
+          </a:prstGeom>
+          <a:ln w="38100">
+            <a:solidFill>
+              <a:schemeClr val="tx1"/>
+            </a:solidFill>
+          </a:ln>
+        </p:spPr>
+        <p:style>
+          <a:lnRef idx="2">
+            <a:schemeClr val="accent1"/>
+          </a:lnRef>
+          <a:fillRef idx="0">
+            <a:schemeClr val="accent1"/>
+          </a:fillRef>
+          <a:effectRef idx="1">
+            <a:schemeClr val="accent1"/>
+          </a:effectRef>
+          <a:fontRef idx="minor">
+            <a:schemeClr val="tx1"/>
+          </a:fontRef>
+        </p:style>
+      </p:cxnSp>
+      <p:sp>
+        <p:nvSpPr>
+          <p:cNvPr id="59" name="CaixaDeTexto 58">
+            <a:extLst>
+              <a:ext uri="{FF2B5EF4-FFF2-40B4-BE49-F238E27FC236}">
+                <a16:creationId xmlns:a16="http://schemas.microsoft.com/office/drawing/2014/main" xmlns="" id="{651D24C1-5718-B609-6640-D055989DB7D8}"/>
+              </a:ext>
+            </a:extLst>
+          </p:cNvPr>
+          <p:cNvSpPr txBox="1"/>
+          <p:nvPr/>
+        </p:nvSpPr>
+        <p:spPr>
+          <a:xfrm>
+            <a:off x="6335047" y="325356"/>
+            <a:ext cx="633507" cy="369332"/>
+          </a:xfrm>
+          <a:prstGeom prst="rect">
+            <a:avLst/>
+          </a:prstGeom>
+          <a:noFill/>
+        </p:spPr>
+        <p:txBody>
+          <a:bodyPr wrap="none" rtlCol="0">
+            <a:spAutoFit/>
+          </a:bodyPr>
+          <a:lstStyle/>
+          <a:p>
+            <a:r>
+              <a:rPr lang="pt-BR" b="1" dirty="0" smtClean="0"/>
+              <a:t>Ant.</a:t>
+            </a:r>
+            <a:endParaRPr lang="pt-BR" b="1" dirty="0"/>
+          </a:p>
+        </p:txBody>
+      </p:sp>
+      <p:sp>
+        <p:nvSpPr>
+          <p:cNvPr id="63" name="Retângulo 62">
+            <a:extLst>
+              <a:ext uri="{FF2B5EF4-FFF2-40B4-BE49-F238E27FC236}">
+                <a16:creationId xmlns:a16="http://schemas.microsoft.com/office/drawing/2014/main" xmlns="" id="{DDDFDD75-C103-76C1-F579-BA7299EDCC04}"/>
               </a:ext>
             </a:extLst>
           </p:cNvPr>
@@ -5712,18 +5572,18 @@
         </p:nvSpPr>
         <p:spPr>
           <a:xfrm>
-            <a:off x="9940356" y="3026738"/>
-            <a:ext cx="1917291" cy="3190112"/>
-          </a:xfrm>
-          <a:prstGeom prst="curvedLeftArrow">
-            <a:avLst>
-              <a:gd name="adj1" fmla="val 18795"/>
-              <a:gd name="adj2" fmla="val 51312"/>
-              <a:gd name="adj3" fmla="val 32692"/>
-            </a:avLst>
+            <a:off x="1242550" y="2180534"/>
+            <a:ext cx="1348250" cy="1689408"/>
+          </a:xfrm>
+          <a:prstGeom prst="rect">
+            <a:avLst/>
           </a:prstGeom>
           <a:noFill/>
-          <a:ln w="25400"/>
+          <a:ln w="25400">
+            <a:solidFill>
+              <a:schemeClr val="tx1"/>
+            </a:solidFill>
+          </a:ln>
         </p:spPr>
         <p:style>
           <a:lnRef idx="2">
@@ -5746,20 +5606,16 @@
           <a:lstStyle/>
           <a:p>
             <a:pPr algn="ctr"/>
-            <a:endParaRPr lang="pt-BR">
-              <a:solidFill>
-                <a:schemeClr val="tx1"/>
-              </a:solidFill>
-            </a:endParaRPr>
-          </a:p>
-        </p:txBody>
-      </p:sp>
-      <p:sp>
-        <p:nvSpPr>
-          <p:cNvPr id="94" name="CaixaDeTexto 93">
-            <a:extLst>
-              <a:ext uri="{FF2B5EF4-FFF2-40B4-BE49-F238E27FC236}">
-                <a16:creationId xmlns:a16="http://schemas.microsoft.com/office/drawing/2014/main" id="{47937699-4C9D-7A70-D0CE-DE69E92C68E7}"/>
+            <a:endParaRPr lang="pt-BR"/>
+          </a:p>
+        </p:txBody>
+      </p:sp>
+      <p:sp>
+        <p:nvSpPr>
+          <p:cNvPr id="64" name="CaixaDeTexto 63">
+            <a:extLst>
+              <a:ext uri="{FF2B5EF4-FFF2-40B4-BE49-F238E27FC236}">
+                <a16:creationId xmlns:a16="http://schemas.microsoft.com/office/drawing/2014/main" xmlns="" id="{F6CF7F29-2B13-8A49-E419-263DFFE14826}"/>
               </a:ext>
             </a:extLst>
           </p:cNvPr>
@@ -5768,8 +5624,8 @@
         </p:nvSpPr>
         <p:spPr>
           <a:xfrm>
-            <a:off x="7958507" y="5145975"/>
-            <a:ext cx="800219" cy="400110"/>
+            <a:off x="7351840" y="1748528"/>
+            <a:ext cx="612668" cy="400110"/>
           </a:xfrm>
           <a:prstGeom prst="rect">
             <a:avLst/>
@@ -5783,116 +5639,107 @@
           <a:lstStyle/>
           <a:p>
             <a:r>
-              <a:rPr lang="pt-BR" sz="2000" b="1" dirty="0"/>
-              <a:t>Input</a:t>
-            </a:r>
-          </a:p>
-        </p:txBody>
-      </p:sp>
-      <p:sp>
-        <p:nvSpPr>
-          <p:cNvPr id="95" name="CaixaDeTexto 94">
-            <a:extLst>
-              <a:ext uri="{FF2B5EF4-FFF2-40B4-BE49-F238E27FC236}">
-                <a16:creationId xmlns:a16="http://schemas.microsoft.com/office/drawing/2014/main" id="{3187AFF7-5D07-C3B9-272B-6ACC3720DE90}"/>
-              </a:ext>
-            </a:extLst>
-          </p:cNvPr>
-          <p:cNvSpPr txBox="1"/>
-          <p:nvPr/>
-        </p:nvSpPr>
-        <p:spPr>
-          <a:xfrm>
-            <a:off x="7886864" y="5968085"/>
-            <a:ext cx="1005403" cy="400110"/>
+              <a:rPr lang="pt-BR" sz="2000" b="1" dirty="0" err="1" smtClean="0"/>
+              <a:t>Ant</a:t>
+            </a:r>
+            <a:endParaRPr lang="pt-BR" sz="2000" b="1" dirty="0"/>
+          </a:p>
+        </p:txBody>
+      </p:sp>
+      <p:pic>
+        <p:nvPicPr>
+          <p:cNvPr id="67" name="Imagem 66" descr="Ícone&#10;&#10;Descrição gerada automaticamente">
+            <a:extLst>
+              <a:ext uri="{FF2B5EF4-FFF2-40B4-BE49-F238E27FC236}">
+                <a16:creationId xmlns:a16="http://schemas.microsoft.com/office/drawing/2014/main" xmlns="" id="{25DC76B7-0ACA-4371-9074-CD45E0763F72}"/>
+              </a:ext>
+            </a:extLst>
+          </p:cNvPr>
+          <p:cNvPicPr>
+            <a:picLocks noChangeAspect="1"/>
+          </p:cNvPicPr>
+          <p:nvPr/>
+        </p:nvPicPr>
+        <p:blipFill>
+          <a:blip r:embed="rId3">
+            <a:extLst>
+              <a:ext uri="{28A0092B-C50C-407E-A947-70E740481C1C}">
+                <a14:useLocalDpi xmlns:a14="http://schemas.microsoft.com/office/drawing/2010/main" xmlns="" val="0"/>
+              </a:ext>
+            </a:extLst>
+          </a:blip>
+          <a:stretch>
+            <a:fillRect/>
+          </a:stretch>
+        </p:blipFill>
+        <p:spPr>
+          <a:xfrm>
+            <a:off x="0" y="4338365"/>
+            <a:ext cx="784413" cy="784413"/>
           </a:xfrm>
           <a:prstGeom prst="rect">
             <a:avLst/>
           </a:prstGeom>
+        </p:spPr>
+      </p:pic>
+      <p:pic>
+        <p:nvPicPr>
+          <p:cNvPr id="69" name="Imagem 68" descr="Forma&#10;&#10;Descrição gerada automaticamente com confiança baixa">
+            <a:extLst>
+              <a:ext uri="{FF2B5EF4-FFF2-40B4-BE49-F238E27FC236}">
+                <a16:creationId xmlns:a16="http://schemas.microsoft.com/office/drawing/2014/main" xmlns="" id="{5CA770ED-F297-349B-059C-E1E85AFD25BC}"/>
+              </a:ext>
+            </a:extLst>
+          </p:cNvPr>
+          <p:cNvPicPr>
+            <a:picLocks noChangeAspect="1"/>
+          </p:cNvPicPr>
+          <p:nvPr/>
+        </p:nvPicPr>
+        <p:blipFill>
+          <a:blip r:embed="rId4" cstate="print">
+            <a:extLst>
+              <a:ext uri="{28A0092B-C50C-407E-A947-70E740481C1C}">
+                <a14:useLocalDpi xmlns:a14="http://schemas.microsoft.com/office/drawing/2010/main" xmlns="" val="0"/>
+              </a:ext>
+            </a:extLst>
+          </a:blip>
+          <a:stretch>
+            <a:fillRect/>
+          </a:stretch>
+        </p:blipFill>
+        <p:spPr>
+          <a:xfrm flipH="1">
+            <a:off x="203200" y="5229398"/>
+            <a:ext cx="419923" cy="419923"/>
+          </a:xfrm>
+          <a:prstGeom prst="rect">
+            <a:avLst/>
+          </a:prstGeom>
+        </p:spPr>
+      </p:pic>
+      <p:sp>
+        <p:nvSpPr>
+          <p:cNvPr id="70" name="Retângulo 69">
+            <a:extLst>
+              <a:ext uri="{FF2B5EF4-FFF2-40B4-BE49-F238E27FC236}">
+                <a16:creationId xmlns:a16="http://schemas.microsoft.com/office/drawing/2014/main" xmlns="" id="{4CAC67C5-43C3-E969-2F17-754F163BF215}"/>
+              </a:ext>
+            </a:extLst>
+          </p:cNvPr>
+          <p:cNvSpPr/>
+          <p:nvPr/>
+        </p:nvSpPr>
+        <p:spPr>
+          <a:xfrm>
+            <a:off x="1408663" y="4400535"/>
+            <a:ext cx="1094750" cy="1499205"/>
+          </a:xfrm>
+          <a:prstGeom prst="rect">
+            <a:avLst/>
+          </a:prstGeom>
           <a:noFill/>
-        </p:spPr>
-        <p:txBody>
-          <a:bodyPr wrap="none" rtlCol="0">
-            <a:spAutoFit/>
-          </a:bodyPr>
-          <a:lstStyle/>
-          <a:p>
-            <a:r>
-              <a:rPr lang="pt-BR" sz="2000" b="1" dirty="0"/>
-              <a:t>Output</a:t>
-            </a:r>
-          </a:p>
-        </p:txBody>
-      </p:sp>
-      <p:sp>
-        <p:nvSpPr>
-          <p:cNvPr id="96" name="CaixaDeTexto 95">
-            <a:extLst>
-              <a:ext uri="{FF2B5EF4-FFF2-40B4-BE49-F238E27FC236}">
-                <a16:creationId xmlns:a16="http://schemas.microsoft.com/office/drawing/2014/main" id="{DBBC86B9-52E7-9BAB-0817-308C61C89879}"/>
-              </a:ext>
-            </a:extLst>
-          </p:cNvPr>
-          <p:cNvSpPr txBox="1"/>
-          <p:nvPr/>
-        </p:nvSpPr>
-        <p:spPr>
-          <a:xfrm>
-            <a:off x="10472365" y="3882037"/>
-            <a:ext cx="938077" cy="1015663"/>
-          </a:xfrm>
-          <a:prstGeom prst="rect">
-            <a:avLst/>
-          </a:prstGeom>
-          <a:noFill/>
-        </p:spPr>
-        <p:txBody>
-          <a:bodyPr wrap="none" rtlCol="0">
-            <a:spAutoFit/>
-          </a:bodyPr>
-          <a:lstStyle/>
-          <a:p>
-            <a:r>
-              <a:rPr lang="pt-BR" sz="2000" b="1" dirty="0"/>
-              <a:t>Cabos</a:t>
-            </a:r>
-          </a:p>
-          <a:p>
-            <a:r>
-              <a:rPr lang="pt-BR" sz="2000" b="1" dirty="0"/>
-              <a:t>    de</a:t>
-            </a:r>
-          </a:p>
-          <a:p>
-            <a:r>
-              <a:rPr lang="pt-BR" sz="2000" b="1" dirty="0"/>
-              <a:t>Áudio</a:t>
-            </a:r>
-          </a:p>
-        </p:txBody>
-      </p:sp>
-      <p:sp>
-        <p:nvSpPr>
-          <p:cNvPr id="2" name="Elipse 1">
-            <a:extLst>
-              <a:ext uri="{FF2B5EF4-FFF2-40B4-BE49-F238E27FC236}">
-                <a16:creationId xmlns:a16="http://schemas.microsoft.com/office/drawing/2014/main" id="{7B2D4B83-3837-AF08-7870-ABBD13D27757}"/>
-              </a:ext>
-            </a:extLst>
-          </p:cNvPr>
-          <p:cNvSpPr/>
-          <p:nvPr/>
-        </p:nvSpPr>
-        <p:spPr>
-          <a:xfrm>
-            <a:off x="4811682" y="3785780"/>
-            <a:ext cx="235974" cy="221226"/>
-          </a:xfrm>
-          <a:prstGeom prst="ellipse">
-            <a:avLst/>
-          </a:prstGeom>
-          <a:noFill/>
-          <a:ln>
+          <a:ln w="25400">
             <a:solidFill>
               <a:schemeClr val="tx1"/>
             </a:solidFill>
@@ -5925,10 +5772,60 @@
       </p:sp>
       <p:sp>
         <p:nvSpPr>
-          <p:cNvPr id="3" name="Elipse 2">
-            <a:extLst>
-              <a:ext uri="{FF2B5EF4-FFF2-40B4-BE49-F238E27FC236}">
-                <a16:creationId xmlns:a16="http://schemas.microsoft.com/office/drawing/2014/main" id="{E7CC26B0-784B-769C-1678-3FB53F242763}"/>
+          <p:cNvPr id="72" name="CaixaDeTexto 71">
+            <a:extLst>
+              <a:ext uri="{FF2B5EF4-FFF2-40B4-BE49-F238E27FC236}">
+                <a16:creationId xmlns:a16="http://schemas.microsoft.com/office/drawing/2014/main" xmlns="" id="{332C26F0-DB31-9CB7-D7E0-D81BB1A3495B}"/>
+              </a:ext>
+            </a:extLst>
+          </p:cNvPr>
+          <p:cNvSpPr txBox="1"/>
+          <p:nvPr/>
+        </p:nvSpPr>
+        <p:spPr>
+          <a:xfrm>
+            <a:off x="1406809" y="4563786"/>
+            <a:ext cx="1109599" cy="1015663"/>
+          </a:xfrm>
+          <a:prstGeom prst="rect">
+            <a:avLst/>
+          </a:prstGeom>
+          <a:noFill/>
+        </p:spPr>
+        <p:txBody>
+          <a:bodyPr wrap="none" rtlCol="0">
+            <a:spAutoFit/>
+          </a:bodyPr>
+          <a:lstStyle/>
+          <a:p>
+            <a:r>
+              <a:rPr lang="pt-BR" sz="2000" b="1" dirty="0" err="1" smtClean="0"/>
+              <a:t>internal</a:t>
+            </a:r>
+            <a:endParaRPr lang="pt-BR" sz="2000" b="1" dirty="0" smtClean="0"/>
+          </a:p>
+          <a:p>
+            <a:r>
+              <a:rPr lang="pt-BR" sz="2000" b="1" dirty="0" err="1" smtClean="0"/>
+              <a:t>Sound</a:t>
+            </a:r>
+            <a:endParaRPr lang="pt-BR" sz="2000" b="1" dirty="0" smtClean="0"/>
+          </a:p>
+          <a:p>
+            <a:r>
+              <a:rPr lang="pt-BR" sz="2000" b="1" dirty="0" err="1" smtClean="0"/>
+              <a:t>Card</a:t>
+            </a:r>
+            <a:endParaRPr lang="pt-BR" sz="2000" b="1" dirty="0"/>
+          </a:p>
+        </p:txBody>
+      </p:sp>
+      <p:sp>
+        <p:nvSpPr>
+          <p:cNvPr id="74" name="Seta: para a Direita 73">
+            <a:extLst>
+              <a:ext uri="{FF2B5EF4-FFF2-40B4-BE49-F238E27FC236}">
+                <a16:creationId xmlns:a16="http://schemas.microsoft.com/office/drawing/2014/main" xmlns="" id="{9A1E5A66-1525-426A-923B-BA5D1DD809CE}"/>
               </a:ext>
             </a:extLst>
           </p:cNvPr>
@@ -5937,18 +5834,14 @@
         </p:nvSpPr>
         <p:spPr>
           <a:xfrm>
-            <a:off x="8643476" y="3718459"/>
-            <a:ext cx="235974" cy="221226"/>
-          </a:xfrm>
-          <a:prstGeom prst="ellipse">
+            <a:off x="653848" y="4536251"/>
+            <a:ext cx="730803" cy="393418"/>
+          </a:xfrm>
+          <a:prstGeom prst="rightArrow">
             <a:avLst/>
           </a:prstGeom>
           <a:noFill/>
-          <a:ln>
-            <a:solidFill>
-              <a:schemeClr val="tx1"/>
-            </a:solidFill>
-          </a:ln>
+          <a:ln w="25400"/>
         </p:spPr>
         <p:style>
           <a:lnRef idx="2">
@@ -5977,10 +5870,10 @@
       </p:sp>
       <p:sp>
         <p:nvSpPr>
-          <p:cNvPr id="34" name="Seta: Curva para Cima 33">
-            <a:extLst>
-              <a:ext uri="{FF2B5EF4-FFF2-40B4-BE49-F238E27FC236}">
-                <a16:creationId xmlns:a16="http://schemas.microsoft.com/office/drawing/2014/main" id="{C7538073-542B-5C56-A78B-D199D439A817}"/>
+          <p:cNvPr id="76" name="Seta: para a Direita 75">
+            <a:extLst>
+              <a:ext uri="{FF2B5EF4-FFF2-40B4-BE49-F238E27FC236}">
+                <a16:creationId xmlns:a16="http://schemas.microsoft.com/office/drawing/2014/main" xmlns="" id="{FE6433E0-0E00-37C4-D651-BC01E2122CE4}"/>
               </a:ext>
             </a:extLst>
           </p:cNvPr>
@@ -5988,11 +5881,11 @@
           <p:nvPr/>
         </p:nvSpPr>
         <p:spPr>
-          <a:xfrm>
-            <a:off x="4865158" y="4005081"/>
-            <a:ext cx="4043231" cy="725797"/>
-          </a:xfrm>
-          <a:prstGeom prst="curvedUpArrow">
+          <a:xfrm rot="10800000">
+            <a:off x="614286" y="5238796"/>
+            <a:ext cx="775013" cy="393418"/>
+          </a:xfrm>
+          <a:prstGeom prst="rightArrow">
             <a:avLst/>
           </a:prstGeom>
           <a:noFill/>
@@ -6019,75 +5912,34 @@
           <a:lstStyle/>
           <a:p>
             <a:pPr algn="ctr"/>
-            <a:endParaRPr lang="pt-BR">
-              <a:solidFill>
-                <a:schemeClr val="tx1"/>
-              </a:solidFill>
-            </a:endParaRPr>
-          </a:p>
-        </p:txBody>
-      </p:sp>
-      <p:sp>
-        <p:nvSpPr>
-          <p:cNvPr id="35" name="CaixaDeTexto 34">
-            <a:extLst>
-              <a:ext uri="{FF2B5EF4-FFF2-40B4-BE49-F238E27FC236}">
-                <a16:creationId xmlns:a16="http://schemas.microsoft.com/office/drawing/2014/main" id="{55F39991-E07A-4002-CCA2-239D0CD6DB6B}"/>
-              </a:ext>
-            </a:extLst>
-          </p:cNvPr>
-          <p:cNvSpPr txBox="1"/>
-          <p:nvPr/>
-        </p:nvSpPr>
-        <p:spPr>
-          <a:xfrm>
-            <a:off x="6682811" y="4332414"/>
-            <a:ext cx="883575" cy="400110"/>
+            <a:endParaRPr lang="pt-BR"/>
+          </a:p>
+        </p:txBody>
+      </p:sp>
+      <p:sp>
+        <p:nvSpPr>
+          <p:cNvPr id="86" name="Retângulo 85">
+            <a:extLst>
+              <a:ext uri="{FF2B5EF4-FFF2-40B4-BE49-F238E27FC236}">
+                <a16:creationId xmlns:a16="http://schemas.microsoft.com/office/drawing/2014/main" xmlns="" id="{A19DDC4F-9EDA-0B92-7BC8-FABE106E482D}"/>
+              </a:ext>
+            </a:extLst>
+          </p:cNvPr>
+          <p:cNvSpPr/>
+          <p:nvPr/>
+        </p:nvSpPr>
+        <p:spPr>
+          <a:xfrm>
+            <a:off x="2818071" y="2482937"/>
+            <a:ext cx="45719" cy="3435263"/>
           </a:xfrm>
           <a:prstGeom prst="rect">
             <a:avLst/>
           </a:prstGeom>
-          <a:noFill/>
-        </p:spPr>
-        <p:txBody>
-          <a:bodyPr wrap="none" rtlCol="0">
-            <a:spAutoFit/>
-          </a:bodyPr>
-          <a:lstStyle/>
-          <a:p>
-            <a:r>
-              <a:rPr lang="pt-BR" sz="2000" b="1" dirty="0"/>
-              <a:t>RX/TX</a:t>
-            </a:r>
-          </a:p>
-        </p:txBody>
-      </p:sp>
-      <p:sp>
-        <p:nvSpPr>
-          <p:cNvPr id="36" name="Elipse 35">
-            <a:extLst>
-              <a:ext uri="{FF2B5EF4-FFF2-40B4-BE49-F238E27FC236}">
-                <a16:creationId xmlns:a16="http://schemas.microsoft.com/office/drawing/2014/main" id="{844FD479-CE48-56BC-5327-C9C0C759FE5A}"/>
-              </a:ext>
-            </a:extLst>
-          </p:cNvPr>
-          <p:cNvSpPr/>
-          <p:nvPr/>
-        </p:nvSpPr>
-        <p:spPr>
-          <a:xfrm>
-            <a:off x="5394782" y="2443680"/>
-            <a:ext cx="235974" cy="221226"/>
-          </a:xfrm>
-          <a:prstGeom prst="ellipse">
-            <a:avLst/>
-          </a:prstGeom>
-          <a:noFill/>
-          <a:ln>
-            <a:solidFill>
-              <a:schemeClr val="tx1"/>
-            </a:solidFill>
-          </a:ln>
+          <a:solidFill>
+            <a:schemeClr val="tx1"/>
+          </a:solidFill>
+          <a:ln w="25400"/>
         </p:spPr>
         <p:style>
           <a:lnRef idx="2">
@@ -6116,10 +5968,10 @@
       </p:sp>
       <p:sp>
         <p:nvSpPr>
-          <p:cNvPr id="37" name="Retângulo 36">
-            <a:extLst>
-              <a:ext uri="{FF2B5EF4-FFF2-40B4-BE49-F238E27FC236}">
-                <a16:creationId xmlns:a16="http://schemas.microsoft.com/office/drawing/2014/main" id="{AB2606B9-D374-A0EF-F63D-A0279E24D214}"/>
+          <p:cNvPr id="87" name="Seta: da Esquerda para a Direita 86">
+            <a:extLst>
+              <a:ext uri="{FF2B5EF4-FFF2-40B4-BE49-F238E27FC236}">
+                <a16:creationId xmlns:a16="http://schemas.microsoft.com/office/drawing/2014/main" xmlns="" id="{B820F3DF-EDBE-3779-8D09-D9CEF9473068}"/>
               </a:ext>
             </a:extLst>
           </p:cNvPr>
@@ -6128,18 +5980,14 @@
         </p:nvSpPr>
         <p:spPr>
           <a:xfrm>
-            <a:off x="5136181" y="678436"/>
-            <a:ext cx="2506977" cy="719046"/>
-          </a:xfrm>
-          <a:prstGeom prst="rect">
+            <a:off x="2206992" y="3304112"/>
+            <a:ext cx="603843" cy="312322"/>
+          </a:xfrm>
+          <a:prstGeom prst="leftRightArrow">
             <a:avLst/>
           </a:prstGeom>
           <a:noFill/>
-          <a:ln w="25400">
-            <a:solidFill>
-              <a:schemeClr val="tx1"/>
-            </a:solidFill>
-          </a:ln>
+          <a:ln w="25400"/>
         </p:spPr>
         <p:style>
           <a:lnRef idx="2">
@@ -6166,106 +6014,28 @@
           </a:p>
         </p:txBody>
       </p:sp>
-      <p:cxnSp>
-        <p:nvCxnSpPr>
-          <p:cNvPr id="39" name="Conector reto 38">
-            <a:extLst>
-              <a:ext uri="{FF2B5EF4-FFF2-40B4-BE49-F238E27FC236}">
-                <a16:creationId xmlns:a16="http://schemas.microsoft.com/office/drawing/2014/main" id="{E84F19A4-8161-0618-2F9B-9B0A0DC73244}"/>
-              </a:ext>
-            </a:extLst>
-          </p:cNvPr>
-          <p:cNvCxnSpPr>
-            <a:cxnSpLocks/>
-          </p:cNvCxnSpPr>
-          <p:nvPr/>
-        </p:nvCxnSpPr>
-        <p:spPr>
-          <a:xfrm>
-            <a:off x="7657162" y="976564"/>
-            <a:ext cx="770088" cy="0"/>
-          </a:xfrm>
-          <a:prstGeom prst="line">
-            <a:avLst/>
-          </a:prstGeom>
-          <a:ln w="38100">
-            <a:solidFill>
-              <a:schemeClr val="tx1"/>
-            </a:solidFill>
-          </a:ln>
-        </p:spPr>
-        <p:style>
-          <a:lnRef idx="2">
-            <a:schemeClr val="accent1"/>
-          </a:lnRef>
-          <a:fillRef idx="0">
-            <a:schemeClr val="accent1"/>
-          </a:fillRef>
-          <a:effectRef idx="1">
-            <a:schemeClr val="accent1"/>
-          </a:effectRef>
-          <a:fontRef idx="minor">
-            <a:schemeClr val="tx1"/>
-          </a:fontRef>
-        </p:style>
-      </p:cxnSp>
-      <p:sp>
-        <p:nvSpPr>
-          <p:cNvPr id="40" name="CaixaDeTexto 39">
-            <a:extLst>
-              <a:ext uri="{FF2B5EF4-FFF2-40B4-BE49-F238E27FC236}">
-                <a16:creationId xmlns:a16="http://schemas.microsoft.com/office/drawing/2014/main" id="{D3F0921D-01A3-ED13-4F34-012813A170A2}"/>
-              </a:ext>
-            </a:extLst>
-          </p:cNvPr>
-          <p:cNvSpPr txBox="1"/>
-          <p:nvPr/>
-        </p:nvSpPr>
-        <p:spPr>
-          <a:xfrm>
-            <a:off x="5852707" y="324453"/>
-            <a:ext cx="929037" cy="400110"/>
-          </a:xfrm>
-          <a:prstGeom prst="rect">
+      <p:sp>
+        <p:nvSpPr>
+          <p:cNvPr id="88" name="Seta: de Cima para Baixo 87">
+            <a:extLst>
+              <a:ext uri="{FF2B5EF4-FFF2-40B4-BE49-F238E27FC236}">
+                <a16:creationId xmlns:a16="http://schemas.microsoft.com/office/drawing/2014/main" xmlns="" id="{D467B800-D0B6-44B5-CD3B-BAE0275619A7}"/>
+              </a:ext>
+            </a:extLst>
+          </p:cNvPr>
+          <p:cNvSpPr/>
+          <p:nvPr/>
+        </p:nvSpPr>
+        <p:spPr>
+          <a:xfrm>
+            <a:off x="1750821" y="3903759"/>
+            <a:ext cx="314461" cy="495111"/>
+          </a:xfrm>
+          <a:prstGeom prst="upDownArrow">
             <a:avLst/>
           </a:prstGeom>
           <a:noFill/>
-        </p:spPr>
-        <p:txBody>
-          <a:bodyPr wrap="none" rtlCol="0">
-            <a:spAutoFit/>
-          </a:bodyPr>
-          <a:lstStyle/>
-          <a:p>
-            <a:r>
-              <a:rPr lang="pt-BR" sz="2000" b="1" dirty="0"/>
-              <a:t>Filtros</a:t>
-            </a:r>
-          </a:p>
-        </p:txBody>
-      </p:sp>
-      <p:sp>
-        <p:nvSpPr>
-          <p:cNvPr id="41" name="Elipse 40">
-            <a:extLst>
-              <a:ext uri="{FF2B5EF4-FFF2-40B4-BE49-F238E27FC236}">
-                <a16:creationId xmlns:a16="http://schemas.microsoft.com/office/drawing/2014/main" id="{753C618C-3CFB-EDF1-7AFE-43DA72189DE7}"/>
-              </a:ext>
-            </a:extLst>
-          </p:cNvPr>
-          <p:cNvSpPr/>
-          <p:nvPr/>
-        </p:nvSpPr>
-        <p:spPr>
-          <a:xfrm>
-            <a:off x="5386124" y="1125886"/>
-            <a:ext cx="235974" cy="221226"/>
-          </a:xfrm>
-          <a:prstGeom prst="ellipse">
-            <a:avLst/>
-          </a:prstGeom>
-          <a:noFill/>
-          <a:ln>
+          <a:ln w="25400">
             <a:solidFill>
               <a:schemeClr val="tx1"/>
             </a:solidFill>
@@ -6296,55 +6066,47 @@
           </a:p>
         </p:txBody>
       </p:sp>
-      <p:cxnSp>
-        <p:nvCxnSpPr>
-          <p:cNvPr id="50" name="Conector reto 49">
-            <a:extLst>
-              <a:ext uri="{FF2B5EF4-FFF2-40B4-BE49-F238E27FC236}">
-                <a16:creationId xmlns:a16="http://schemas.microsoft.com/office/drawing/2014/main" id="{811D5894-47D2-9A9D-7580-F119056FAA8C}"/>
-              </a:ext>
-            </a:extLst>
-          </p:cNvPr>
-          <p:cNvCxnSpPr>
-            <a:cxnSpLocks/>
-          </p:cNvCxnSpPr>
-          <p:nvPr/>
-        </p:nvCxnSpPr>
-        <p:spPr>
-          <a:xfrm>
-            <a:off x="8427250" y="676084"/>
-            <a:ext cx="0" cy="300480"/>
-          </a:xfrm>
-          <a:prstGeom prst="line">
-            <a:avLst/>
-          </a:prstGeom>
-          <a:ln w="38100">
-            <a:solidFill>
-              <a:schemeClr val="tx1"/>
-            </a:solidFill>
-          </a:ln>
-        </p:spPr>
-        <p:style>
-          <a:lnRef idx="2">
-            <a:schemeClr val="accent1"/>
-          </a:lnRef>
-          <a:fillRef idx="0">
-            <a:schemeClr val="accent1"/>
-          </a:fillRef>
-          <a:effectRef idx="1">
-            <a:schemeClr val="accent1"/>
-          </a:effectRef>
-          <a:fontRef idx="minor">
-            <a:schemeClr val="tx1"/>
-          </a:fontRef>
-        </p:style>
-      </p:cxnSp>
-      <p:sp>
-        <p:nvSpPr>
-          <p:cNvPr id="54" name="Seta: para Cima 53">
-            <a:extLst>
-              <a:ext uri="{FF2B5EF4-FFF2-40B4-BE49-F238E27FC236}">
-                <a16:creationId xmlns:a16="http://schemas.microsoft.com/office/drawing/2014/main" id="{298536F9-CB5F-57E3-C85A-73665E6D0037}"/>
+      <p:sp>
+        <p:nvSpPr>
+          <p:cNvPr id="89" name="CaixaDeTexto 88">
+            <a:extLst>
+              <a:ext uri="{FF2B5EF4-FFF2-40B4-BE49-F238E27FC236}">
+                <a16:creationId xmlns:a16="http://schemas.microsoft.com/office/drawing/2014/main" xmlns="" id="{96785FFE-D475-3FFD-6F34-8D4544CC49A5}"/>
+              </a:ext>
+            </a:extLst>
+          </p:cNvPr>
+          <p:cNvSpPr txBox="1"/>
+          <p:nvPr/>
+        </p:nvSpPr>
+        <p:spPr>
+          <a:xfrm>
+            <a:off x="4345968" y="2488261"/>
+            <a:ext cx="633507" cy="369332"/>
+          </a:xfrm>
+          <a:prstGeom prst="rect">
+            <a:avLst/>
+          </a:prstGeom>
+          <a:noFill/>
+        </p:spPr>
+        <p:txBody>
+          <a:bodyPr wrap="none" rtlCol="0">
+            <a:spAutoFit/>
+          </a:bodyPr>
+          <a:lstStyle/>
+          <a:p>
+            <a:r>
+              <a:rPr lang="pt-BR" b="1" dirty="0"/>
+              <a:t>CTL</a:t>
+            </a:r>
+          </a:p>
+        </p:txBody>
+      </p:sp>
+      <p:sp>
+        <p:nvSpPr>
+          <p:cNvPr id="90" name="Elipse 89">
+            <a:extLst>
+              <a:ext uri="{FF2B5EF4-FFF2-40B4-BE49-F238E27FC236}">
+                <a16:creationId xmlns:a16="http://schemas.microsoft.com/office/drawing/2014/main" xmlns="" id="{B1B5B6AB-BD70-BD39-40E8-820E9D044425}"/>
               </a:ext>
             </a:extLst>
           </p:cNvPr>
@@ -6353,14 +6115,14 @@
         </p:nvSpPr>
         <p:spPr>
           <a:xfrm>
-            <a:off x="5344792" y="1410152"/>
-            <a:ext cx="308838" cy="945276"/>
-          </a:xfrm>
-          <a:prstGeom prst="upArrow">
+            <a:off x="4152405" y="2596984"/>
+            <a:ext cx="235974" cy="221226"/>
+          </a:xfrm>
+          <a:prstGeom prst="ellipse">
             <a:avLst/>
           </a:prstGeom>
           <a:noFill/>
-          <a:ln w="25400">
+          <a:ln>
             <a:solidFill>
               <a:schemeClr val="tx1"/>
             </a:solidFill>
@@ -6393,10 +6155,10 @@
       </p:sp>
       <p:sp>
         <p:nvSpPr>
-          <p:cNvPr id="55" name="CaixaDeTexto 54">
-            <a:extLst>
-              <a:ext uri="{FF2B5EF4-FFF2-40B4-BE49-F238E27FC236}">
-                <a16:creationId xmlns:a16="http://schemas.microsoft.com/office/drawing/2014/main" id="{D7DE5883-278D-6DEF-08D0-82A5E21E6168}"/>
+          <p:cNvPr id="53" name="CaixaDeTexto 52">
+            <a:extLst>
+              <a:ext uri="{FF2B5EF4-FFF2-40B4-BE49-F238E27FC236}">
+                <a16:creationId xmlns:a16="http://schemas.microsoft.com/office/drawing/2014/main" xmlns="" id="{98E70995-2C2F-6839-1F9F-A4EE30C9C79B}"/>
               </a:ext>
             </a:extLst>
           </p:cNvPr>
@@ -6405,43 +6167,8 @@
         </p:nvSpPr>
         <p:spPr>
           <a:xfrm>
-            <a:off x="4388379" y="2630988"/>
-            <a:ext cx="2181756" cy="369332"/>
-          </a:xfrm>
-          <a:prstGeom prst="rect">
-            <a:avLst/>
-          </a:prstGeom>
-          <a:noFill/>
-        </p:spPr>
-        <p:txBody>
-          <a:bodyPr wrap="square" rtlCol="0">
-            <a:spAutoFit/>
-          </a:bodyPr>
-          <a:lstStyle/>
-          <a:p>
-            <a:r>
-              <a:rPr lang="pt-BR" b="1" dirty="0"/>
-              <a:t>Seleção de filtros</a:t>
-            </a:r>
-          </a:p>
-        </p:txBody>
-      </p:sp>
-      <p:sp>
-        <p:nvSpPr>
-          <p:cNvPr id="59" name="CaixaDeTexto 58">
-            <a:extLst>
-              <a:ext uri="{FF2B5EF4-FFF2-40B4-BE49-F238E27FC236}">
-                <a16:creationId xmlns:a16="http://schemas.microsoft.com/office/drawing/2014/main" id="{651D24C1-5718-B609-6640-D055989DB7D8}"/>
-              </a:ext>
-            </a:extLst>
-          </p:cNvPr>
-          <p:cNvSpPr txBox="1"/>
-          <p:nvPr/>
-        </p:nvSpPr>
-        <p:spPr>
-          <a:xfrm>
-            <a:off x="7835667" y="990160"/>
-            <a:ext cx="1015343" cy="400110"/>
+            <a:off x="4910864" y="3196815"/>
+            <a:ext cx="620683" cy="369332"/>
           </a:xfrm>
           <a:prstGeom prst="rect">
             <a:avLst/>
@@ -6455,18 +6182,18 @@
           <a:lstStyle/>
           <a:p>
             <a:r>
-              <a:rPr lang="pt-BR" sz="2000" b="1" dirty="0"/>
-              <a:t>Antena</a:t>
-            </a:r>
-          </a:p>
-        </p:txBody>
-      </p:sp>
-      <p:sp>
-        <p:nvSpPr>
-          <p:cNvPr id="63" name="Retângulo 62">
-            <a:extLst>
-              <a:ext uri="{FF2B5EF4-FFF2-40B4-BE49-F238E27FC236}">
-                <a16:creationId xmlns:a16="http://schemas.microsoft.com/office/drawing/2014/main" id="{DDDFDD75-C103-76C1-F579-BA7299EDCC04}"/>
+              <a:rPr lang="pt-BR" b="1" dirty="0"/>
+              <a:t>PTT</a:t>
+            </a:r>
+          </a:p>
+        </p:txBody>
+      </p:sp>
+      <p:sp>
+        <p:nvSpPr>
+          <p:cNvPr id="82" name="Elipse 81">
+            <a:extLst>
+              <a:ext uri="{FF2B5EF4-FFF2-40B4-BE49-F238E27FC236}">
+                <a16:creationId xmlns:a16="http://schemas.microsoft.com/office/drawing/2014/main" xmlns="" id="{9328618F-F992-DC0E-780E-324636798C34}"/>
               </a:ext>
             </a:extLst>
           </p:cNvPr>
@@ -6475,14 +6202,14 @@
         </p:nvSpPr>
         <p:spPr>
           <a:xfrm>
-            <a:off x="1242550" y="2758459"/>
-            <a:ext cx="1294912" cy="1689408"/>
-          </a:xfrm>
-          <a:prstGeom prst="rect">
+            <a:off x="5608383" y="3261543"/>
+            <a:ext cx="235974" cy="221226"/>
+          </a:xfrm>
+          <a:prstGeom prst="ellipse">
             <a:avLst/>
           </a:prstGeom>
           <a:noFill/>
-          <a:ln w="25400">
+          <a:ln>
             <a:solidFill>
               <a:schemeClr val="tx1"/>
             </a:solidFill>
@@ -6515,117 +6242,10 @@
       </p:sp>
       <p:sp>
         <p:nvSpPr>
-          <p:cNvPr id="64" name="CaixaDeTexto 63">
-            <a:extLst>
-              <a:ext uri="{FF2B5EF4-FFF2-40B4-BE49-F238E27FC236}">
-                <a16:creationId xmlns:a16="http://schemas.microsoft.com/office/drawing/2014/main" id="{F6CF7F29-2B13-8A49-E419-263DFFE14826}"/>
-              </a:ext>
-            </a:extLst>
-          </p:cNvPr>
-          <p:cNvSpPr txBox="1"/>
-          <p:nvPr/>
-        </p:nvSpPr>
-        <p:spPr>
-          <a:xfrm>
-            <a:off x="7973965" y="2490228"/>
-            <a:ext cx="898066" cy="400110"/>
-          </a:xfrm>
-          <a:prstGeom prst="rect">
-            <a:avLst/>
-          </a:prstGeom>
-          <a:noFill/>
-        </p:spPr>
-        <p:txBody>
-          <a:bodyPr wrap="none" rtlCol="0">
-            <a:spAutoFit/>
-          </a:bodyPr>
-          <a:lstStyle/>
-          <a:p>
-            <a:r>
-              <a:rPr lang="pt-BR" sz="2000" b="1" dirty="0"/>
-              <a:t>RF I/O</a:t>
-            </a:r>
-          </a:p>
-        </p:txBody>
-      </p:sp>
-      <p:pic>
-        <p:nvPicPr>
-          <p:cNvPr id="67" name="Imagem 66" descr="Ícone&#10;&#10;Descrição gerada automaticamente">
-            <a:extLst>
-              <a:ext uri="{FF2B5EF4-FFF2-40B4-BE49-F238E27FC236}">
-                <a16:creationId xmlns:a16="http://schemas.microsoft.com/office/drawing/2014/main" id="{25DC76B7-0ACA-4371-9074-CD45E0763F72}"/>
-              </a:ext>
-            </a:extLst>
-          </p:cNvPr>
-          <p:cNvPicPr>
-            <a:picLocks noChangeAspect="1"/>
-          </p:cNvPicPr>
-          <p:nvPr/>
-        </p:nvPicPr>
-        <p:blipFill>
-          <a:blip r:embed="rId3">
-            <a:extLst>
-              <a:ext uri="{28A0092B-C50C-407E-A947-70E740481C1C}">
-                <a14:useLocalDpi xmlns:a14="http://schemas.microsoft.com/office/drawing/2010/main" val="0"/>
-              </a:ext>
-            </a:extLst>
-          </a:blip>
-          <a:stretch>
-            <a:fillRect/>
-          </a:stretch>
-        </p:blipFill>
-        <p:spPr>
-          <a:xfrm>
-            <a:off x="63032" y="4897165"/>
-            <a:ext cx="784413" cy="784413"/>
-          </a:xfrm>
-          <a:prstGeom prst="rect">
-            <a:avLst/>
-          </a:prstGeom>
-        </p:spPr>
-      </p:pic>
-      <p:pic>
-        <p:nvPicPr>
-          <p:cNvPr id="69" name="Imagem 68" descr="Forma&#10;&#10;Descrição gerada automaticamente com confiança baixa">
-            <a:extLst>
-              <a:ext uri="{FF2B5EF4-FFF2-40B4-BE49-F238E27FC236}">
-                <a16:creationId xmlns:a16="http://schemas.microsoft.com/office/drawing/2014/main" id="{5CA770ED-F297-349B-059C-E1E85AFD25BC}"/>
-              </a:ext>
-            </a:extLst>
-          </p:cNvPr>
-          <p:cNvPicPr>
-            <a:picLocks noChangeAspect="1"/>
-          </p:cNvPicPr>
-          <p:nvPr/>
-        </p:nvPicPr>
-        <p:blipFill>
-          <a:blip r:embed="rId4">
-            <a:extLst>
-              <a:ext uri="{28A0092B-C50C-407E-A947-70E740481C1C}">
-                <a14:useLocalDpi xmlns:a14="http://schemas.microsoft.com/office/drawing/2010/main" val="0"/>
-              </a:ext>
-            </a:extLst>
-          </a:blip>
-          <a:stretch>
-            <a:fillRect/>
-          </a:stretch>
-        </p:blipFill>
-        <p:spPr>
-          <a:xfrm flipH="1">
-            <a:off x="238536" y="5794623"/>
-            <a:ext cx="419923" cy="419923"/>
-          </a:xfrm>
-          <a:prstGeom prst="rect">
-            <a:avLst/>
-          </a:prstGeom>
-        </p:spPr>
-      </p:pic>
-      <p:sp>
-        <p:nvSpPr>
-          <p:cNvPr id="70" name="Retângulo 69">
-            <a:extLst>
-              <a:ext uri="{FF2B5EF4-FFF2-40B4-BE49-F238E27FC236}">
-                <a16:creationId xmlns:a16="http://schemas.microsoft.com/office/drawing/2014/main" id="{4CAC67C5-43C3-E969-2F17-754F163BF215}"/>
+          <p:cNvPr id="84" name="Retângulo 83">
+            <a:extLst>
+              <a:ext uri="{FF2B5EF4-FFF2-40B4-BE49-F238E27FC236}">
+                <a16:creationId xmlns:a16="http://schemas.microsoft.com/office/drawing/2014/main" xmlns="" id="{FC554D95-20FE-3CCC-F407-D31669DC48A9}"/>
               </a:ext>
             </a:extLst>
           </p:cNvPr>
@@ -6634,8 +6254,8 @@
         </p:nvSpPr>
         <p:spPr>
           <a:xfrm>
-            <a:off x="1408663" y="4978460"/>
-            <a:ext cx="1094750" cy="1499205"/>
+            <a:off x="10388600" y="1604654"/>
+            <a:ext cx="1512949" cy="4808846"/>
           </a:xfrm>
           <a:prstGeom prst="rect">
             <a:avLst/>
@@ -6674,63 +6294,10 @@
       </p:sp>
       <p:sp>
         <p:nvSpPr>
-          <p:cNvPr id="72" name="CaixaDeTexto 71">
-            <a:extLst>
-              <a:ext uri="{FF2B5EF4-FFF2-40B4-BE49-F238E27FC236}">
-                <a16:creationId xmlns:a16="http://schemas.microsoft.com/office/drawing/2014/main" id="{332C26F0-DB31-9CB7-D7E0-D81BB1A3495B}"/>
-              </a:ext>
-            </a:extLst>
-          </p:cNvPr>
-          <p:cNvSpPr txBox="1"/>
-          <p:nvPr/>
-        </p:nvSpPr>
-        <p:spPr>
-          <a:xfrm>
-            <a:off x="1483009" y="5065511"/>
-            <a:ext cx="1026563" cy="1323439"/>
-          </a:xfrm>
-          <a:prstGeom prst="rect">
-            <a:avLst/>
-          </a:prstGeom>
-          <a:noFill/>
-        </p:spPr>
-        <p:txBody>
-          <a:bodyPr wrap="none" rtlCol="0">
-            <a:spAutoFit/>
-          </a:bodyPr>
-          <a:lstStyle/>
-          <a:p>
-            <a:r>
-              <a:rPr lang="pt-BR" sz="2000" b="1" dirty="0"/>
-              <a:t>Placa</a:t>
-            </a:r>
-          </a:p>
-          <a:p>
-            <a:r>
-              <a:rPr lang="pt-BR" sz="2000" b="1" dirty="0"/>
-              <a:t>   de</a:t>
-            </a:r>
-          </a:p>
-          <a:p>
-            <a:r>
-              <a:rPr lang="pt-BR" sz="2000" b="1" dirty="0"/>
-              <a:t>Áudio</a:t>
-            </a:r>
-          </a:p>
-          <a:p>
-            <a:r>
-              <a:rPr lang="pt-BR" sz="2000" b="1" dirty="0"/>
-              <a:t>Interna</a:t>
-            </a:r>
-          </a:p>
-        </p:txBody>
-      </p:sp>
-      <p:sp>
-        <p:nvSpPr>
-          <p:cNvPr id="74" name="Seta: para a Direita 73">
-            <a:extLst>
-              <a:ext uri="{FF2B5EF4-FFF2-40B4-BE49-F238E27FC236}">
-                <a16:creationId xmlns:a16="http://schemas.microsoft.com/office/drawing/2014/main" id="{9A1E5A66-1525-426A-923B-BA5D1DD809CE}"/>
+          <p:cNvPr id="99" name="Seta: para a Direita 20">
+            <a:extLst>
+              <a:ext uri="{FF2B5EF4-FFF2-40B4-BE49-F238E27FC236}">
+                <a16:creationId xmlns:a16="http://schemas.microsoft.com/office/drawing/2014/main" xmlns="" id="{ACEFE10B-F9A6-370E-3AA8-81ED9EA0FE65}"/>
               </a:ext>
             </a:extLst>
           </p:cNvPr>
@@ -6739,8 +6306,8 @@
         </p:nvSpPr>
         <p:spPr>
           <a:xfrm>
-            <a:off x="653848" y="5114176"/>
-            <a:ext cx="730803" cy="393418"/>
+            <a:off x="9392508" y="1685861"/>
+            <a:ext cx="983392" cy="423212"/>
           </a:xfrm>
           <a:prstGeom prst="rightArrow">
             <a:avLst/>
@@ -6775,10 +6342,10 @@
       </p:sp>
       <p:sp>
         <p:nvSpPr>
-          <p:cNvPr id="76" name="Seta: para a Direita 75">
-            <a:extLst>
-              <a:ext uri="{FF2B5EF4-FFF2-40B4-BE49-F238E27FC236}">
-                <a16:creationId xmlns:a16="http://schemas.microsoft.com/office/drawing/2014/main" id="{FE6433E0-0E00-37C4-D651-BC01E2122CE4}"/>
+          <p:cNvPr id="100" name="Seta: para a Direita 20">
+            <a:extLst>
+              <a:ext uri="{FF2B5EF4-FFF2-40B4-BE49-F238E27FC236}">
+                <a16:creationId xmlns:a16="http://schemas.microsoft.com/office/drawing/2014/main" xmlns="" id="{ACEFE10B-F9A6-370E-3AA8-81ED9EA0FE65}"/>
               </a:ext>
             </a:extLst>
           </p:cNvPr>
@@ -6786,9 +6353,9 @@
           <p:nvPr/>
         </p:nvSpPr>
         <p:spPr>
-          <a:xfrm rot="10800000">
-            <a:off x="614286" y="5816721"/>
-            <a:ext cx="775013" cy="393418"/>
+          <a:xfrm>
+            <a:off x="9405208" y="2689161"/>
+            <a:ext cx="983392" cy="423212"/>
           </a:xfrm>
           <a:prstGeom prst="rightArrow">
             <a:avLst/>
@@ -6823,10 +6390,10 @@
       </p:sp>
       <p:sp>
         <p:nvSpPr>
-          <p:cNvPr id="86" name="Retângulo 85">
-            <a:extLst>
-              <a:ext uri="{FF2B5EF4-FFF2-40B4-BE49-F238E27FC236}">
-                <a16:creationId xmlns:a16="http://schemas.microsoft.com/office/drawing/2014/main" id="{A19DDC4F-9EDA-0B92-7BC8-FABE106E482D}"/>
+          <p:cNvPr id="101" name="Retângulo 100">
+            <a:extLst>
+              <a:ext uri="{FF2B5EF4-FFF2-40B4-BE49-F238E27FC236}">
+                <a16:creationId xmlns:a16="http://schemas.microsoft.com/office/drawing/2014/main" xmlns="" id="{FC554D95-20FE-3CCC-F407-D31669DC48A9}"/>
               </a:ext>
             </a:extLst>
           </p:cNvPr>
@@ -6835,16 +6402,18 @@
         </p:nvSpPr>
         <p:spPr>
           <a:xfrm>
-            <a:off x="2792671" y="3060862"/>
-            <a:ext cx="78936" cy="2877953"/>
+            <a:off x="6965102" y="3822700"/>
+            <a:ext cx="2356698" cy="1647303"/>
           </a:xfrm>
           <a:prstGeom prst="rect">
             <a:avLst/>
           </a:prstGeom>
-          <a:solidFill>
-            <a:schemeClr val="tx1"/>
-          </a:solidFill>
-          <a:ln w="25400"/>
+          <a:noFill/>
+          <a:ln w="25400">
+            <a:solidFill>
+              <a:schemeClr val="tx1"/>
+            </a:solidFill>
+          </a:ln>
         </p:spPr>
         <p:style>
           <a:lnRef idx="2">
@@ -6873,10 +6442,40 @@
       </p:sp>
       <p:sp>
         <p:nvSpPr>
-          <p:cNvPr id="87" name="Seta: da Esquerda para a Direita 86">
-            <a:extLst>
-              <a:ext uri="{FF2B5EF4-FFF2-40B4-BE49-F238E27FC236}">
-                <a16:creationId xmlns:a16="http://schemas.microsoft.com/office/drawing/2014/main" id="{B820F3DF-EDBE-3779-8D09-D9CEF9473068}"/>
+          <p:cNvPr id="103" name="CaixaDeTexto 102"/>
+          <p:cNvSpPr txBox="1"/>
+          <p:nvPr/>
+        </p:nvSpPr>
+        <p:spPr>
+          <a:xfrm>
+            <a:off x="7899400" y="3416300"/>
+            <a:ext cx="671979" cy="369332"/>
+          </a:xfrm>
+          <a:prstGeom prst="rect">
+            <a:avLst/>
+          </a:prstGeom>
+          <a:noFill/>
+        </p:spPr>
+        <p:txBody>
+          <a:bodyPr wrap="none" rtlCol="0">
+            <a:spAutoFit/>
+          </a:bodyPr>
+          <a:lstStyle/>
+          <a:p>
+            <a:r>
+              <a:rPr lang="pt-BR" b="1" dirty="0" smtClean="0"/>
+              <a:t>QSE</a:t>
+            </a:r>
+            <a:endParaRPr lang="pt-BR" b="1" dirty="0"/>
+          </a:p>
+        </p:txBody>
+      </p:sp>
+      <p:sp>
+        <p:nvSpPr>
+          <p:cNvPr id="104" name="Elipse 103">
+            <a:extLst>
+              <a:ext uri="{FF2B5EF4-FFF2-40B4-BE49-F238E27FC236}">
+                <a16:creationId xmlns:a16="http://schemas.microsoft.com/office/drawing/2014/main" xmlns="" id="{3F6A92D2-C739-D4F7-8A9D-7C6FAECA572B}"/>
               </a:ext>
             </a:extLst>
           </p:cNvPr>
@@ -6885,14 +6484,18 @@
         </p:nvSpPr>
         <p:spPr>
           <a:xfrm>
-            <a:off x="2206992" y="3882037"/>
-            <a:ext cx="603843" cy="312322"/>
-          </a:xfrm>
-          <a:prstGeom prst="leftRightArrow">
+            <a:off x="7014266" y="4016057"/>
+            <a:ext cx="235974" cy="221226"/>
+          </a:xfrm>
+          <a:prstGeom prst="ellipse">
             <a:avLst/>
           </a:prstGeom>
           <a:noFill/>
-          <a:ln w="25400"/>
+          <a:ln>
+            <a:solidFill>
+              <a:schemeClr val="tx1"/>
+            </a:solidFill>
+          </a:ln>
         </p:spPr>
         <p:style>
           <a:lnRef idx="2">
@@ -6921,10 +6524,40 @@
       </p:sp>
       <p:sp>
         <p:nvSpPr>
-          <p:cNvPr id="88" name="Seta: de Cima para Baixo 87">
-            <a:extLst>
-              <a:ext uri="{FF2B5EF4-FFF2-40B4-BE49-F238E27FC236}">
-                <a16:creationId xmlns:a16="http://schemas.microsoft.com/office/drawing/2014/main" id="{D467B800-D0B6-44B5-CD3B-BAE0275619A7}"/>
+          <p:cNvPr id="105" name="CaixaDeTexto 104"/>
+          <p:cNvSpPr txBox="1"/>
+          <p:nvPr/>
+        </p:nvSpPr>
+        <p:spPr>
+          <a:xfrm>
+            <a:off x="7289800" y="3898900"/>
+            <a:ext cx="633507" cy="369332"/>
+          </a:xfrm>
+          <a:prstGeom prst="rect">
+            <a:avLst/>
+          </a:prstGeom>
+          <a:noFill/>
+        </p:spPr>
+        <p:txBody>
+          <a:bodyPr wrap="none" rtlCol="0">
+            <a:spAutoFit/>
+          </a:bodyPr>
+          <a:lstStyle/>
+          <a:p>
+            <a:r>
+              <a:rPr lang="pt-BR" b="1" dirty="0" smtClean="0"/>
+              <a:t>Ant.</a:t>
+            </a:r>
+            <a:endParaRPr lang="pt-BR" b="1" dirty="0"/>
+          </a:p>
+        </p:txBody>
+      </p:sp>
+      <p:sp>
+        <p:nvSpPr>
+          <p:cNvPr id="106" name="Elipse 105">
+            <a:extLst>
+              <a:ext uri="{FF2B5EF4-FFF2-40B4-BE49-F238E27FC236}">
+                <a16:creationId xmlns:a16="http://schemas.microsoft.com/office/drawing/2014/main" xmlns="" id="{BBE680FF-CA0B-C3AB-2E37-04B33505E5A3}"/>
               </a:ext>
             </a:extLst>
           </p:cNvPr>
@@ -6933,14 +6566,14 @@
         </p:nvSpPr>
         <p:spPr>
           <a:xfrm>
-            <a:off x="1750821" y="4481684"/>
-            <a:ext cx="314461" cy="495111"/>
-          </a:xfrm>
-          <a:prstGeom prst="upDownArrow">
+            <a:off x="9049959" y="3992977"/>
+            <a:ext cx="235974" cy="221226"/>
+          </a:xfrm>
+          <a:prstGeom prst="ellipse">
             <a:avLst/>
           </a:prstGeom>
           <a:noFill/>
-          <a:ln w="25400">
+          <a:ln>
             <a:solidFill>
               <a:schemeClr val="tx1"/>
             </a:solidFill>
@@ -6973,45 +6606,10 @@
       </p:sp>
       <p:sp>
         <p:nvSpPr>
-          <p:cNvPr id="89" name="CaixaDeTexto 88">
-            <a:extLst>
-              <a:ext uri="{FF2B5EF4-FFF2-40B4-BE49-F238E27FC236}">
-                <a16:creationId xmlns:a16="http://schemas.microsoft.com/office/drawing/2014/main" id="{96785FFE-D475-3FFD-6F34-8D4544CC49A5}"/>
-              </a:ext>
-            </a:extLst>
-          </p:cNvPr>
-          <p:cNvSpPr txBox="1"/>
-          <p:nvPr/>
-        </p:nvSpPr>
-        <p:spPr>
-          <a:xfrm>
-            <a:off x="3164868" y="3409086"/>
-            <a:ext cx="622863" cy="400110"/>
-          </a:xfrm>
-          <a:prstGeom prst="rect">
-            <a:avLst/>
-          </a:prstGeom>
-          <a:noFill/>
-        </p:spPr>
-        <p:txBody>
-          <a:bodyPr wrap="none" rtlCol="0">
-            <a:spAutoFit/>
-          </a:bodyPr>
-          <a:lstStyle/>
-          <a:p>
-            <a:r>
-              <a:rPr lang="pt-BR" sz="2000" b="1" dirty="0"/>
-              <a:t>CTL</a:t>
-            </a:r>
-          </a:p>
-        </p:txBody>
-      </p:sp>
-      <p:sp>
-        <p:nvSpPr>
-          <p:cNvPr id="90" name="Elipse 89">
-            <a:extLst>
-              <a:ext uri="{FF2B5EF4-FFF2-40B4-BE49-F238E27FC236}">
-                <a16:creationId xmlns:a16="http://schemas.microsoft.com/office/drawing/2014/main" id="{B1B5B6AB-BD70-BD39-40E8-820E9D044425}"/>
+          <p:cNvPr id="107" name="Elipse 106">
+            <a:extLst>
+              <a:ext uri="{FF2B5EF4-FFF2-40B4-BE49-F238E27FC236}">
+                <a16:creationId xmlns:a16="http://schemas.microsoft.com/office/drawing/2014/main" xmlns="" id="{DB48A5FC-58F4-3918-B31E-CB346F457BBE}"/>
               </a:ext>
             </a:extLst>
           </p:cNvPr>
@@ -7020,7 +6618,7 @@
         </p:nvSpPr>
         <p:spPr>
           <a:xfrm>
-            <a:off x="4152405" y="3174909"/>
+            <a:off x="7052366" y="4586123"/>
             <a:ext cx="235974" cy="221226"/>
           </a:xfrm>
           <a:prstGeom prst="ellipse">
@@ -7060,10 +6658,10 @@
       </p:sp>
       <p:sp>
         <p:nvSpPr>
-          <p:cNvPr id="38" name="Seta: Dobrada para Cima 37">
-            <a:extLst>
-              <a:ext uri="{FF2B5EF4-FFF2-40B4-BE49-F238E27FC236}">
-                <a16:creationId xmlns:a16="http://schemas.microsoft.com/office/drawing/2014/main" id="{655BFFB1-1C83-A9DA-37EC-341AC5D92ED8}"/>
+          <p:cNvPr id="108" name="Elipse 107">
+            <a:extLst>
+              <a:ext uri="{FF2B5EF4-FFF2-40B4-BE49-F238E27FC236}">
+                <a16:creationId xmlns:a16="http://schemas.microsoft.com/office/drawing/2014/main" xmlns="" id="{94758299-F83C-41BE-544D-0388881D9FE9}"/>
               </a:ext>
             </a:extLst>
           </p:cNvPr>
@@ -7071,19 +6669,15 @@
           <p:nvPr/>
         </p:nvSpPr>
         <p:spPr>
-          <a:xfrm flipH="1">
-            <a:off x="6903393" y="1453542"/>
-            <a:ext cx="599173" cy="1366442"/>
-          </a:xfrm>
-          <a:prstGeom prst="bentUpArrow">
-            <a:avLst>
-              <a:gd name="adj1" fmla="val 31012"/>
-              <a:gd name="adj2" fmla="val 25000"/>
-              <a:gd name="adj3" fmla="val 25000"/>
-            </a:avLst>
+          <a:xfrm>
+            <a:off x="7067522" y="5147587"/>
+            <a:ext cx="235974" cy="221226"/>
+          </a:xfrm>
+          <a:prstGeom prst="ellipse">
+            <a:avLst/>
           </a:prstGeom>
           <a:noFill/>
-          <a:ln w="25400">
+          <a:ln>
             <a:solidFill>
               <a:schemeClr val="tx1"/>
             </a:solidFill>
@@ -7116,10 +6710,10 @@
       </p:sp>
       <p:sp>
         <p:nvSpPr>
-          <p:cNvPr id="51" name="Elipse 50">
-            <a:extLst>
-              <a:ext uri="{FF2B5EF4-FFF2-40B4-BE49-F238E27FC236}">
-                <a16:creationId xmlns:a16="http://schemas.microsoft.com/office/drawing/2014/main" id="{58061C13-E63A-14FB-4605-A87CB16E34CA}"/>
+          <p:cNvPr id="109" name="Seta: para a Direita 20">
+            <a:extLst>
+              <a:ext uri="{FF2B5EF4-FFF2-40B4-BE49-F238E27FC236}">
+                <a16:creationId xmlns:a16="http://schemas.microsoft.com/office/drawing/2014/main" xmlns="" id="{ACEFE10B-F9A6-370E-3AA8-81ED9EA0FE65}"/>
               </a:ext>
             </a:extLst>
           </p:cNvPr>
@@ -7127,19 +6721,15 @@
           <p:nvPr/>
         </p:nvSpPr>
         <p:spPr>
-          <a:xfrm>
-            <a:off x="6904298" y="1119956"/>
-            <a:ext cx="235974" cy="221226"/>
-          </a:xfrm>
-          <a:prstGeom prst="ellipse">
+          <a:xfrm rot="10800000">
+            <a:off x="9347200" y="3933761"/>
+            <a:ext cx="1016000" cy="423212"/>
+          </a:xfrm>
+          <a:prstGeom prst="rightArrow">
             <a:avLst/>
           </a:prstGeom>
           <a:noFill/>
-          <a:ln>
-            <a:solidFill>
-              <a:schemeClr val="tx1"/>
-            </a:solidFill>
-          </a:ln>
+          <a:ln w="25400"/>
         </p:spPr>
         <p:style>
           <a:lnRef idx="2">
@@ -7168,10 +6758,10 @@
       </p:sp>
       <p:sp>
         <p:nvSpPr>
-          <p:cNvPr id="52" name="Chave Esquerda 51">
-            <a:extLst>
-              <a:ext uri="{FF2B5EF4-FFF2-40B4-BE49-F238E27FC236}">
-                <a16:creationId xmlns:a16="http://schemas.microsoft.com/office/drawing/2014/main" id="{40156C3D-02A6-6E76-5CBF-0877DC063389}"/>
+          <p:cNvPr id="110" name="Elipse 109">
+            <a:extLst>
+              <a:ext uri="{FF2B5EF4-FFF2-40B4-BE49-F238E27FC236}">
+                <a16:creationId xmlns:a16="http://schemas.microsoft.com/office/drawing/2014/main" xmlns="" id="{BBE680FF-CA0B-C3AB-2E37-04B33505E5A3}"/>
               </a:ext>
             </a:extLst>
           </p:cNvPr>
@@ -7180,13 +6770,171 @@
         </p:nvSpPr>
         <p:spPr>
           <a:xfrm>
-            <a:off x="5310996" y="3102205"/>
-            <a:ext cx="244949" cy="573704"/>
-          </a:xfrm>
-          <a:prstGeom prst="leftBrace">
-            <a:avLst/>
-          </a:prstGeom>
-          <a:ln w="25400">
+            <a:off x="9037259" y="5123277"/>
+            <a:ext cx="235974" cy="221226"/>
+          </a:xfrm>
+          <a:prstGeom prst="ellipse">
+            <a:avLst/>
+          </a:prstGeom>
+          <a:noFill/>
+          <a:ln>
+            <a:solidFill>
+              <a:schemeClr val="tx1"/>
+            </a:solidFill>
+          </a:ln>
+        </p:spPr>
+        <p:style>
+          <a:lnRef idx="2">
+            <a:schemeClr val="accent1">
+              <a:shade val="15000"/>
+            </a:schemeClr>
+          </a:lnRef>
+          <a:fillRef idx="1">
+            <a:schemeClr val="accent1"/>
+          </a:fillRef>
+          <a:effectRef idx="0">
+            <a:schemeClr val="accent1"/>
+          </a:effectRef>
+          <a:fontRef idx="minor">
+            <a:schemeClr val="lt1"/>
+          </a:fontRef>
+        </p:style>
+        <p:txBody>
+          <a:bodyPr rtlCol="0" anchor="ctr"/>
+          <a:lstStyle/>
+          <a:p>
+            <a:pPr algn="ctr"/>
+            <a:endParaRPr lang="pt-BR"/>
+          </a:p>
+        </p:txBody>
+      </p:sp>
+      <p:sp>
+        <p:nvSpPr>
+          <p:cNvPr id="111" name="Seta: para a Direita 20">
+            <a:extLst>
+              <a:ext uri="{FF2B5EF4-FFF2-40B4-BE49-F238E27FC236}">
+                <a16:creationId xmlns:a16="http://schemas.microsoft.com/office/drawing/2014/main" xmlns="" id="{ACEFE10B-F9A6-370E-3AA8-81ED9EA0FE65}"/>
+              </a:ext>
+            </a:extLst>
+          </p:cNvPr>
+          <p:cNvSpPr/>
+          <p:nvPr/>
+        </p:nvSpPr>
+        <p:spPr>
+          <a:xfrm rot="10800000">
+            <a:off x="9334500" y="4987861"/>
+            <a:ext cx="1028700" cy="423212"/>
+          </a:xfrm>
+          <a:prstGeom prst="rightArrow">
+            <a:avLst/>
+          </a:prstGeom>
+          <a:noFill/>
+          <a:ln w="25400"/>
+        </p:spPr>
+        <p:style>
+          <a:lnRef idx="2">
+            <a:schemeClr val="accent1">
+              <a:shade val="15000"/>
+            </a:schemeClr>
+          </a:lnRef>
+          <a:fillRef idx="1">
+            <a:schemeClr val="accent1"/>
+          </a:fillRef>
+          <a:effectRef idx="0">
+            <a:schemeClr val="accent1"/>
+          </a:effectRef>
+          <a:fontRef idx="minor">
+            <a:schemeClr val="lt1"/>
+          </a:fontRef>
+        </p:style>
+        <p:txBody>
+          <a:bodyPr rtlCol="0" anchor="ctr"/>
+          <a:lstStyle/>
+          <a:p>
+            <a:pPr algn="ctr"/>
+            <a:endParaRPr lang="pt-BR"/>
+          </a:p>
+        </p:txBody>
+      </p:sp>
+      <p:sp>
+        <p:nvSpPr>
+          <p:cNvPr id="112" name="CaixaDeTexto 111"/>
+          <p:cNvSpPr txBox="1"/>
+          <p:nvPr/>
+        </p:nvSpPr>
+        <p:spPr>
+          <a:xfrm>
+            <a:off x="8255000" y="3962400"/>
+            <a:ext cx="697627" cy="369332"/>
+          </a:xfrm>
+          <a:prstGeom prst="rect">
+            <a:avLst/>
+          </a:prstGeom>
+          <a:noFill/>
+        </p:spPr>
+        <p:txBody>
+          <a:bodyPr wrap="none" rtlCol="0">
+            <a:spAutoFit/>
+          </a:bodyPr>
+          <a:lstStyle/>
+          <a:p>
+            <a:r>
+              <a:rPr lang="pt-BR" b="1" dirty="0" smtClean="0"/>
+              <a:t>TX(I</a:t>
+            </a:r>
+            <a:r>
+              <a:rPr lang="pt-BR" dirty="0" smtClean="0"/>
+              <a:t>)</a:t>
+            </a:r>
+            <a:endParaRPr lang="pt-BR" dirty="0"/>
+          </a:p>
+        </p:txBody>
+      </p:sp>
+      <p:sp>
+        <p:nvSpPr>
+          <p:cNvPr id="113" name="CaixaDeTexto 112"/>
+          <p:cNvSpPr txBox="1"/>
+          <p:nvPr/>
+        </p:nvSpPr>
+        <p:spPr>
+          <a:xfrm>
+            <a:off x="8242300" y="4991100"/>
+            <a:ext cx="813043" cy="369332"/>
+          </a:xfrm>
+          <a:prstGeom prst="rect">
+            <a:avLst/>
+          </a:prstGeom>
+          <a:noFill/>
+        </p:spPr>
+        <p:txBody>
+          <a:bodyPr wrap="none" rtlCol="0">
+            <a:spAutoFit/>
+          </a:bodyPr>
+          <a:lstStyle/>
+          <a:p>
+            <a:r>
+              <a:rPr lang="pt-BR" b="1" dirty="0" smtClean="0"/>
+              <a:t>TX(Q)</a:t>
+            </a:r>
+            <a:endParaRPr lang="pt-BR" b="1" dirty="0"/>
+          </a:p>
+        </p:txBody>
+      </p:sp>
+      <p:cxnSp>
+        <p:nvCxnSpPr>
+          <p:cNvPr id="117" name="Conector reto 116"/>
+          <p:cNvCxnSpPr/>
+          <p:nvPr/>
+        </p:nvCxnSpPr>
+        <p:spPr>
+          <a:xfrm rot="16200000" flipH="1">
+            <a:off x="5118100" y="2616200"/>
+            <a:ext cx="3060700" cy="12700"/>
+          </a:xfrm>
+          <a:prstGeom prst="line">
+            <a:avLst/>
+          </a:prstGeom>
+          <a:ln w="38100">
             <a:solidFill>
               <a:schemeClr val="tx1"/>
             </a:solidFill>
@@ -7206,31 +6954,17 @@
             <a:schemeClr val="tx1"/>
           </a:fontRef>
         </p:style>
-        <p:txBody>
-          <a:bodyPr rtlCol="0" anchor="ctr"/>
-          <a:lstStyle/>
-          <a:p>
-            <a:pPr algn="ctr"/>
-            <a:endParaRPr lang="pt-BR"/>
-          </a:p>
-        </p:txBody>
-      </p:sp>
-      <p:sp>
-        <p:nvSpPr>
-          <p:cNvPr id="53" name="CaixaDeTexto 52">
-            <a:extLst>
-              <a:ext uri="{FF2B5EF4-FFF2-40B4-BE49-F238E27FC236}">
-                <a16:creationId xmlns:a16="http://schemas.microsoft.com/office/drawing/2014/main" id="{98E70995-2C2F-6839-1F9F-A4EE30C9C79B}"/>
-              </a:ext>
-            </a:extLst>
-          </p:cNvPr>
+      </p:cxnSp>
+      <p:sp>
+        <p:nvSpPr>
+          <p:cNvPr id="120" name="CaixaDeTexto 119"/>
           <p:cNvSpPr txBox="1"/>
           <p:nvPr/>
         </p:nvSpPr>
         <p:spPr>
           <a:xfrm>
-            <a:off x="4249475" y="3689142"/>
-            <a:ext cx="597471" cy="400110"/>
+            <a:off x="7327900" y="4508500"/>
+            <a:ext cx="397866" cy="369332"/>
           </a:xfrm>
           <a:prstGeom prst="rect">
             <a:avLst/>
@@ -7244,28 +6978,281 @@
           <a:lstStyle/>
           <a:p>
             <a:r>
-              <a:rPr lang="pt-BR" sz="2000" b="1" dirty="0"/>
-              <a:t>PTT</a:t>
-            </a:r>
-          </a:p>
-        </p:txBody>
-      </p:sp>
-      <p:sp>
-        <p:nvSpPr>
-          <p:cNvPr id="56" name="CaixaDeTexto 55">
-            <a:extLst>
-              <a:ext uri="{FF2B5EF4-FFF2-40B4-BE49-F238E27FC236}">
-                <a16:creationId xmlns:a16="http://schemas.microsoft.com/office/drawing/2014/main" id="{67A8BF5D-A77B-26EF-19CA-F82E8E041910}"/>
-              </a:ext>
-            </a:extLst>
-          </p:cNvPr>
+              <a:rPr lang="pt-BR" b="1" dirty="0" smtClean="0"/>
+              <a:t>0º</a:t>
+            </a:r>
+            <a:endParaRPr lang="pt-BR" b="1" dirty="0"/>
+          </a:p>
+        </p:txBody>
+      </p:sp>
+      <p:cxnSp>
+        <p:nvCxnSpPr>
+          <p:cNvPr id="122" name="Conector reto 121"/>
+          <p:cNvCxnSpPr/>
+          <p:nvPr/>
+        </p:nvCxnSpPr>
+        <p:spPr>
+          <a:xfrm>
+            <a:off x="6629400" y="4127500"/>
+            <a:ext cx="419424" cy="1185"/>
+          </a:xfrm>
+          <a:prstGeom prst="line">
+            <a:avLst/>
+          </a:prstGeom>
+          <a:ln w="38100">
+            <a:solidFill>
+              <a:schemeClr val="tx1"/>
+            </a:solidFill>
+          </a:ln>
+        </p:spPr>
+        <p:style>
+          <a:lnRef idx="2">
+            <a:schemeClr val="accent1"/>
+          </a:lnRef>
+          <a:fillRef idx="0">
+            <a:schemeClr val="accent1"/>
+          </a:fillRef>
+          <a:effectRef idx="1">
+            <a:schemeClr val="accent1"/>
+          </a:effectRef>
+          <a:fontRef idx="minor">
+            <a:schemeClr val="tx1"/>
+          </a:fontRef>
+        </p:style>
+      </p:cxnSp>
+      <p:cxnSp>
+        <p:nvCxnSpPr>
+          <p:cNvPr id="135" name="Conector reto 134"/>
+          <p:cNvCxnSpPr/>
+          <p:nvPr/>
+        </p:nvCxnSpPr>
+        <p:spPr>
+          <a:xfrm>
+            <a:off x="6629400" y="1905000"/>
+            <a:ext cx="419424" cy="1185"/>
+          </a:xfrm>
+          <a:prstGeom prst="line">
+            <a:avLst/>
+          </a:prstGeom>
+          <a:ln w="38100">
+            <a:solidFill>
+              <a:schemeClr val="tx1"/>
+            </a:solidFill>
+          </a:ln>
+        </p:spPr>
+        <p:style>
+          <a:lnRef idx="2">
+            <a:schemeClr val="accent1"/>
+          </a:lnRef>
+          <a:fillRef idx="0">
+            <a:schemeClr val="accent1"/>
+          </a:fillRef>
+          <a:effectRef idx="1">
+            <a:schemeClr val="accent1"/>
+          </a:effectRef>
+          <a:fontRef idx="minor">
+            <a:schemeClr val="tx1"/>
+          </a:fontRef>
+        </p:style>
+      </p:cxnSp>
+      <p:sp>
+        <p:nvSpPr>
+          <p:cNvPr id="137" name="Retângulo 136"/>
+          <p:cNvSpPr/>
+          <p:nvPr/>
+        </p:nvSpPr>
+        <p:spPr>
+          <a:xfrm>
+            <a:off x="6362700" y="2235200"/>
+            <a:ext cx="63500" cy="3175000"/>
+          </a:xfrm>
+          <a:prstGeom prst="rect">
+            <a:avLst/>
+          </a:prstGeom>
+          <a:solidFill>
+            <a:schemeClr val="tx1"/>
+          </a:solidFill>
+          <a:ln w="25400"/>
+        </p:spPr>
+        <p:style>
+          <a:lnRef idx="2">
+            <a:schemeClr val="accent1">
+              <a:shade val="50000"/>
+            </a:schemeClr>
+          </a:lnRef>
+          <a:fillRef idx="1">
+            <a:schemeClr val="accent1"/>
+          </a:fillRef>
+          <a:effectRef idx="0">
+            <a:schemeClr val="accent1"/>
+          </a:effectRef>
+          <a:fontRef idx="minor">
+            <a:schemeClr val="lt1"/>
+          </a:fontRef>
+        </p:style>
+        <p:txBody>
+          <a:bodyPr rtlCol="0" anchor="ctr"/>
+          <a:lstStyle/>
+          <a:p>
+            <a:pPr algn="ctr"/>
+            <a:endParaRPr lang="pt-BR"/>
+          </a:p>
+        </p:txBody>
+      </p:sp>
+      <p:sp>
+        <p:nvSpPr>
+          <p:cNvPr id="140" name="Seta: para a Direita 20">
+            <a:extLst>
+              <a:ext uri="{FF2B5EF4-FFF2-40B4-BE49-F238E27FC236}">
+                <a16:creationId xmlns:a16="http://schemas.microsoft.com/office/drawing/2014/main" xmlns="" id="{ACEFE10B-F9A6-370E-3AA8-81ED9EA0FE65}"/>
+              </a:ext>
+            </a:extLst>
+          </p:cNvPr>
+          <p:cNvSpPr/>
+          <p:nvPr/>
+        </p:nvSpPr>
+        <p:spPr>
+          <a:xfrm>
+            <a:off x="6413500" y="5067300"/>
+            <a:ext cx="533400" cy="419100"/>
+          </a:xfrm>
+          <a:prstGeom prst="rightArrow">
+            <a:avLst/>
+          </a:prstGeom>
+          <a:noFill/>
+          <a:ln w="25400"/>
+        </p:spPr>
+        <p:style>
+          <a:lnRef idx="2">
+            <a:schemeClr val="accent1">
+              <a:shade val="15000"/>
+            </a:schemeClr>
+          </a:lnRef>
+          <a:fillRef idx="1">
+            <a:schemeClr val="accent1"/>
+          </a:fillRef>
+          <a:effectRef idx="0">
+            <a:schemeClr val="accent1"/>
+          </a:effectRef>
+          <a:fontRef idx="minor">
+            <a:schemeClr val="lt1"/>
+          </a:fontRef>
+        </p:style>
+        <p:txBody>
+          <a:bodyPr rtlCol="0" anchor="ctr"/>
+          <a:lstStyle/>
+          <a:p>
+            <a:pPr algn="ctr"/>
+            <a:endParaRPr lang="pt-BR"/>
+          </a:p>
+        </p:txBody>
+      </p:sp>
+      <p:sp>
+        <p:nvSpPr>
+          <p:cNvPr id="141" name="Seta: para a Direita 19">
+            <a:extLst>
+              <a:ext uri="{FF2B5EF4-FFF2-40B4-BE49-F238E27FC236}">
+                <a16:creationId xmlns:a16="http://schemas.microsoft.com/office/drawing/2014/main" xmlns="" id="{A6C8175D-DA74-98A7-2FF7-2AADD28711FE}"/>
+              </a:ext>
+            </a:extLst>
+          </p:cNvPr>
+          <p:cNvSpPr/>
+          <p:nvPr/>
+        </p:nvSpPr>
+        <p:spPr>
+          <a:xfrm>
+            <a:off x="5905500" y="2235200"/>
+            <a:ext cx="457200" cy="412062"/>
+          </a:xfrm>
+          <a:prstGeom prst="rightArrow">
+            <a:avLst/>
+          </a:prstGeom>
+          <a:noFill/>
+          <a:ln w="25400"/>
+        </p:spPr>
+        <p:style>
+          <a:lnRef idx="2">
+            <a:schemeClr val="accent1">
+              <a:shade val="15000"/>
+            </a:schemeClr>
+          </a:lnRef>
+          <a:fillRef idx="1">
+            <a:schemeClr val="accent1"/>
+          </a:fillRef>
+          <a:effectRef idx="0">
+            <a:schemeClr val="accent1"/>
+          </a:effectRef>
+          <a:fontRef idx="minor">
+            <a:schemeClr val="lt1"/>
+          </a:fontRef>
+        </p:style>
+        <p:txBody>
+          <a:bodyPr rtlCol="0" anchor="ctr"/>
+          <a:lstStyle/>
+          <a:p>
+            <a:pPr algn="ctr"/>
+            <a:endParaRPr lang="pt-BR"/>
+          </a:p>
+        </p:txBody>
+      </p:sp>
+      <p:sp>
+        <p:nvSpPr>
+          <p:cNvPr id="142" name="Seta: para a Direita 19">
+            <a:extLst>
+              <a:ext uri="{FF2B5EF4-FFF2-40B4-BE49-F238E27FC236}">
+                <a16:creationId xmlns:a16="http://schemas.microsoft.com/office/drawing/2014/main" xmlns="" id="{A6C8175D-DA74-98A7-2FF7-2AADD28711FE}"/>
+              </a:ext>
+            </a:extLst>
+          </p:cNvPr>
+          <p:cNvSpPr/>
+          <p:nvPr/>
+        </p:nvSpPr>
+        <p:spPr>
+          <a:xfrm>
+            <a:off x="5943600" y="2748408"/>
+            <a:ext cx="419100" cy="406854"/>
+          </a:xfrm>
+          <a:prstGeom prst="rightArrow">
+            <a:avLst/>
+          </a:prstGeom>
+          <a:noFill/>
+          <a:ln w="25400"/>
+        </p:spPr>
+        <p:style>
+          <a:lnRef idx="2">
+            <a:schemeClr val="accent1">
+              <a:shade val="15000"/>
+            </a:schemeClr>
+          </a:lnRef>
+          <a:fillRef idx="1">
+            <a:schemeClr val="accent1"/>
+          </a:fillRef>
+          <a:effectRef idx="0">
+            <a:schemeClr val="accent1"/>
+          </a:effectRef>
+          <a:fontRef idx="minor">
+            <a:schemeClr val="lt1"/>
+          </a:fontRef>
+        </p:style>
+        <p:txBody>
+          <a:bodyPr rtlCol="0" anchor="ctr"/>
+          <a:lstStyle/>
+          <a:p>
+            <a:pPr algn="ctr"/>
+            <a:endParaRPr lang="pt-BR"/>
+          </a:p>
+        </p:txBody>
+      </p:sp>
+      <p:sp>
+        <p:nvSpPr>
+          <p:cNvPr id="143" name="CaixaDeTexto 142"/>
           <p:cNvSpPr txBox="1"/>
           <p:nvPr/>
         </p:nvSpPr>
         <p:spPr>
           <a:xfrm>
-            <a:off x="792852" y="222276"/>
-            <a:ext cx="3433569" cy="707886"/>
+            <a:off x="7353300" y="5016500"/>
+            <a:ext cx="526106" cy="369332"/>
           </a:xfrm>
           <a:prstGeom prst="rect">
             <a:avLst/>
@@ -7279,43 +7266,71 @@
           <a:lstStyle/>
           <a:p>
             <a:r>
-              <a:rPr lang="pt-BR" sz="2000" b="1" dirty="0"/>
-              <a:t>CTL</a:t>
-            </a:r>
-            <a:r>
-              <a:rPr lang="pt-BR" sz="2000" b="1" dirty="0">
-                <a:sym typeface="Wingdings" panose="05000000000000000000" pitchFamily="2" charset="2"/>
-              </a:rPr>
-              <a:t> VFO Recebe ou Envia </a:t>
-            </a:r>
-          </a:p>
-          <a:p>
-            <a:r>
-              <a:rPr lang="pt-BR" sz="2000" b="1" dirty="0">
-                <a:sym typeface="Wingdings" panose="05000000000000000000" pitchFamily="2" charset="2"/>
-              </a:rPr>
-              <a:t>controle para o HDSDR </a:t>
-            </a:r>
-            <a:endParaRPr lang="pt-BR" sz="2000" b="1" dirty="0"/>
-          </a:p>
-        </p:txBody>
-      </p:sp>
-      <p:sp>
-        <p:nvSpPr>
-          <p:cNvPr id="57" name="CaixaDeTexto 56">
-            <a:extLst>
-              <a:ext uri="{FF2B5EF4-FFF2-40B4-BE49-F238E27FC236}">
-                <a16:creationId xmlns:a16="http://schemas.microsoft.com/office/drawing/2014/main" id="{3AD5B98E-B142-9FE7-696F-1E53B96B77A0}"/>
-              </a:ext>
-            </a:extLst>
-          </p:cNvPr>
+              <a:rPr lang="pt-BR" b="1" dirty="0" smtClean="0"/>
+              <a:t>90º</a:t>
+            </a:r>
+            <a:endParaRPr lang="pt-BR" b="1" dirty="0"/>
+          </a:p>
+        </p:txBody>
+      </p:sp>
+      <p:sp>
+        <p:nvSpPr>
+          <p:cNvPr id="145" name="Seta: para a Direita 20">
+            <a:extLst>
+              <a:ext uri="{FF2B5EF4-FFF2-40B4-BE49-F238E27FC236}">
+                <a16:creationId xmlns:a16="http://schemas.microsoft.com/office/drawing/2014/main" xmlns="" id="{ACEFE10B-F9A6-370E-3AA8-81ED9EA0FE65}"/>
+              </a:ext>
+            </a:extLst>
+          </p:cNvPr>
+          <p:cNvSpPr/>
+          <p:nvPr/>
+        </p:nvSpPr>
+        <p:spPr>
+          <a:xfrm>
+            <a:off x="6438900" y="4517961"/>
+            <a:ext cx="533400" cy="409639"/>
+          </a:xfrm>
+          <a:prstGeom prst="rightArrow">
+            <a:avLst/>
+          </a:prstGeom>
+          <a:noFill/>
+          <a:ln w="25400"/>
+        </p:spPr>
+        <p:style>
+          <a:lnRef idx="2">
+            <a:schemeClr val="accent1">
+              <a:shade val="15000"/>
+            </a:schemeClr>
+          </a:lnRef>
+          <a:fillRef idx="1">
+            <a:schemeClr val="accent1"/>
+          </a:fillRef>
+          <a:effectRef idx="0">
+            <a:schemeClr val="accent1"/>
+          </a:effectRef>
+          <a:fontRef idx="minor">
+            <a:schemeClr val="lt1"/>
+          </a:fontRef>
+        </p:style>
+        <p:txBody>
+          <a:bodyPr rtlCol="0" anchor="ctr"/>
+          <a:lstStyle/>
+          <a:p>
+            <a:pPr algn="ctr"/>
+            <a:endParaRPr lang="pt-BR"/>
+          </a:p>
+        </p:txBody>
+      </p:sp>
+      <p:sp>
+        <p:nvSpPr>
+          <p:cNvPr id="146" name="CaixaDeTexto 145"/>
           <p:cNvSpPr txBox="1"/>
           <p:nvPr/>
         </p:nvSpPr>
         <p:spPr>
           <a:xfrm>
-            <a:off x="812528" y="1121040"/>
-            <a:ext cx="3797450" cy="707886"/>
+            <a:off x="9398000" y="4470400"/>
+            <a:ext cx="941283" cy="369332"/>
           </a:xfrm>
           <a:prstGeom prst="rect">
             <a:avLst/>
@@ -7329,31 +7344,99 @@
           <a:lstStyle/>
           <a:p>
             <a:r>
-              <a:rPr lang="pt-BR" sz="2000" b="1" dirty="0"/>
-              <a:t>LO</a:t>
-            </a:r>
-            <a:r>
-              <a:rPr lang="pt-BR" sz="2000" b="1" dirty="0">
-                <a:sym typeface="Wingdings" panose="05000000000000000000" pitchFamily="2" charset="2"/>
-              </a:rPr>
-              <a:t> Frequência para TX ou  RX</a:t>
-            </a:r>
-          </a:p>
-          <a:p>
-            <a:r>
-              <a:rPr lang="pt-BR" sz="2000" b="1" dirty="0">
-                <a:sym typeface="Wingdings" panose="05000000000000000000" pitchFamily="2" charset="2"/>
-              </a:rPr>
-              <a:t>em quadratura</a:t>
-            </a:r>
-            <a:endParaRPr lang="pt-BR" sz="2000" b="1" dirty="0"/>
+              <a:rPr lang="pt-BR" b="1" dirty="0" smtClean="0"/>
+              <a:t>Output</a:t>
+            </a:r>
+            <a:endParaRPr lang="pt-BR" b="1" dirty="0"/>
+          </a:p>
+        </p:txBody>
+      </p:sp>
+      <p:sp>
+        <p:nvSpPr>
+          <p:cNvPr id="147" name="Elipse 146">
+            <a:extLst>
+              <a:ext uri="{FF2B5EF4-FFF2-40B4-BE49-F238E27FC236}">
+                <a16:creationId xmlns:a16="http://schemas.microsoft.com/office/drawing/2014/main" xmlns="" id="{E51FD0E9-ECBB-0C63-5C53-00357AAAF1D9}"/>
+              </a:ext>
+            </a:extLst>
+          </p:cNvPr>
+          <p:cNvSpPr/>
+          <p:nvPr/>
+        </p:nvSpPr>
+        <p:spPr>
+          <a:xfrm>
+            <a:off x="10548559" y="5753225"/>
+            <a:ext cx="235974" cy="221226"/>
+          </a:xfrm>
+          <a:prstGeom prst="ellipse">
+            <a:avLst/>
+          </a:prstGeom>
+          <a:noFill/>
+          <a:ln>
+            <a:solidFill>
+              <a:schemeClr val="tx1"/>
+            </a:solidFill>
+          </a:ln>
+        </p:spPr>
+        <p:style>
+          <a:lnRef idx="2">
+            <a:schemeClr val="accent1">
+              <a:shade val="15000"/>
+            </a:schemeClr>
+          </a:lnRef>
+          <a:fillRef idx="1">
+            <a:schemeClr val="accent1"/>
+          </a:fillRef>
+          <a:effectRef idx="0">
+            <a:schemeClr val="accent1"/>
+          </a:effectRef>
+          <a:fontRef idx="minor">
+            <a:schemeClr val="lt1"/>
+          </a:fontRef>
+        </p:style>
+        <p:txBody>
+          <a:bodyPr rtlCol="0" anchor="ctr"/>
+          <a:lstStyle/>
+          <a:p>
+            <a:pPr algn="ctr"/>
+            <a:endParaRPr lang="pt-BR"/>
+          </a:p>
+        </p:txBody>
+      </p:sp>
+      <p:sp>
+        <p:nvSpPr>
+          <p:cNvPr id="148" name="CaixaDeTexto 147"/>
+          <p:cNvSpPr txBox="1"/>
+          <p:nvPr/>
+        </p:nvSpPr>
+        <p:spPr>
+          <a:xfrm>
+            <a:off x="10845800" y="5715000"/>
+            <a:ext cx="671979" cy="369332"/>
+          </a:xfrm>
+          <a:prstGeom prst="rect">
+            <a:avLst/>
+          </a:prstGeom>
+          <a:noFill/>
+        </p:spPr>
+        <p:txBody>
+          <a:bodyPr wrap="none" rtlCol="0">
+            <a:spAutoFit/>
+          </a:bodyPr>
+          <a:lstStyle/>
+          <a:p>
+            <a:r>
+              <a:rPr lang="pt-BR" b="1" dirty="0" smtClean="0"/>
+              <a:t>USB</a:t>
+            </a:r>
+            <a:endParaRPr lang="pt-BR" b="1" dirty="0"/>
           </a:p>
         </p:txBody>
       </p:sp>
     </p:spTree>
     <p:extLst>
       <p:ext uri="{BB962C8B-B14F-4D97-AF65-F5344CB8AC3E}">
-        <p14:creationId xmlns:p14="http://schemas.microsoft.com/office/powerpoint/2010/main" val="2486033752"/>
+        <p14:creationId xmlns:p14="http://schemas.microsoft.com/office/powerpoint/2010/main" xmlns="" val="2486033752"/>
       </p:ext>
     </p:extLst>
   </p:cSld>
@@ -7406,7 +7489,7 @@
     </a:clrScheme>
     <a:fontScheme name="Office">
       <a:majorFont>
-        <a:latin typeface="Aptos Display" panose="02110004020202020204"/>
+        <a:latin typeface="Aptos Display"/>
         <a:ea typeface=""/>
         <a:cs typeface=""/>
         <a:font script="Jpan" typeface="游ゴシック Light"/>
@@ -7458,7 +7541,7 @@
         <a:font script="Tfng" typeface="Ebrima"/>
       </a:majorFont>
       <a:minorFont>
-        <a:latin typeface="Aptos" panose="02110004020202020204"/>
+        <a:latin typeface="Aptos"/>
         <a:ea typeface=""/>
         <a:cs typeface=""/>
         <a:font script="Jpan" typeface="游ゴシック"/>
@@ -7672,7 +7755,7 @@
   <a:extraClrSchemeLst/>
   <a:extLst>
     <a:ext uri="{05A4C25C-085E-4340-85A3-A5531E510DB2}">
-      <thm15:themeFamily xmlns:thm15="http://schemas.microsoft.com/office/thememl/2012/main" name="Office Theme" id="{2E142A2C-CD16-42D6-873A-C26D2A0506FA}" vid="{1BDDFF52-6CD6-40A5-AB3C-68EB2F1E4D0A}"/>
+      <thm15:themeFamily xmlns:thm15="http://schemas.microsoft.com/office/thememl/2012/main" xmlns="" name="Office Theme" id="{2E142A2C-CD16-42D6-873A-C26D2A0506FA}" vid="{1BDDFF52-6CD6-40A5-AB3C-68EB2F1E4D0A}"/>
     </a:ext>
   </a:extLst>
 </a:theme>
@@ -7721,7 +7804,7 @@
     </a:clrScheme>
     <a:fontScheme name="Office">
       <a:majorFont>
-        <a:latin typeface="Aptos Display" panose="02110004020202020204"/>
+        <a:latin typeface="Aptos Display"/>
         <a:ea typeface=""/>
         <a:cs typeface=""/>
         <a:font script="Jpan" typeface="游ゴシック Light"/>
@@ -7773,7 +7856,7 @@
         <a:font script="Tfng" typeface="Ebrima"/>
       </a:majorFont>
       <a:minorFont>
-        <a:latin typeface="Aptos" panose="02110004020202020204"/>
+        <a:latin typeface="Aptos"/>
         <a:ea typeface=""/>
         <a:cs typeface=""/>
         <a:font script="Jpan" typeface="游ゴシック"/>
@@ -7987,7 +8070,7 @@
   <a:extraClrSchemeLst/>
   <a:extLst>
     <a:ext uri="{05A4C25C-085E-4340-85A3-A5531E510DB2}">
-      <thm15:themeFamily xmlns:thm15="http://schemas.microsoft.com/office/thememl/2012/main" name="Office Theme" id="{2E142A2C-CD16-42D6-873A-C26D2A0506FA}" vid="{1BDDFF52-6CD6-40A5-AB3C-68EB2F1E4D0A}"/>
+      <thm15:themeFamily xmlns:thm15="http://schemas.microsoft.com/office/thememl/2012/main" xmlns="" name="Office Theme" id="{2E142A2C-CD16-42D6-873A-C26D2A0506FA}" vid="{1BDDFF52-6CD6-40A5-AB3C-68EB2F1E4D0A}"/>
     </a:ext>
   </a:extLst>
 </a:theme>

--- a/Diagramas/diagrama2.pptx
+++ b/Diagramas/diagrama2.pptx
@@ -109,7 +109,7 @@
   </p:defaultTextStyle>
   <p:extLst>
     <p:ext uri="{EFAFB233-063F-42B5-8137-9DF3F51BA10A}">
-      <p15:sldGuideLst xmlns:p15="http://schemas.microsoft.com/office/powerpoint/2012/main" xmlns=""/>
+      <p15:sldGuideLst xmlns="" xmlns:p15="http://schemas.microsoft.com/office/powerpoint/2012/main"/>
     </p:ext>
   </p:extLst>
 </p:presentation>
@@ -198,7 +198,7 @@
             <a:fld id="{8584C277-B865-4BF4-927E-0729B9152B92}" type="datetimeFigureOut">
               <a:rPr lang="pt-BR" smtClean="0"/>
               <a:pPr/>
-              <a:t>24/12/2024</a:t>
+              <a:t>05/01/2025</a:t>
             </a:fld>
             <a:endParaRPr lang="pt-BR"/>
           </a:p>
@@ -366,7 +366,7 @@
     </p:spTree>
     <p:extLst>
       <p:ext uri="{BB962C8B-B14F-4D97-AF65-F5344CB8AC3E}">
-        <p14:creationId xmlns:p14="http://schemas.microsoft.com/office/powerpoint/2010/main" xmlns="" val="1733828657"/>
+        <p14:creationId xmlns="" xmlns:p14="http://schemas.microsoft.com/office/powerpoint/2010/main" val="1733828657"/>
       </p:ext>
     </p:extLst>
   </p:cSld>
@@ -541,7 +541,7 @@
     </p:spTree>
     <p:extLst>
       <p:ext uri="{BB962C8B-B14F-4D97-AF65-F5344CB8AC3E}">
-        <p14:creationId xmlns:p14="http://schemas.microsoft.com/office/powerpoint/2010/main" xmlns="" val="49612895"/>
+        <p14:creationId xmlns="" xmlns:p14="http://schemas.microsoft.com/office/powerpoint/2010/main" val="49612895"/>
       </p:ext>
     </p:extLst>
   </p:cSld>
@@ -573,7 +573,7 @@
           <p:cNvPr id="2" name="Título 1">
             <a:extLst>
               <a:ext uri="{FF2B5EF4-FFF2-40B4-BE49-F238E27FC236}">
-                <a16:creationId xmlns:a16="http://schemas.microsoft.com/office/drawing/2014/main" xmlns="" id="{2FBD7B5D-1A31-8E2A-6788-0D622A91C228}"/>
+                <a16:creationId xmlns="" xmlns:a16="http://schemas.microsoft.com/office/drawing/2014/main" id="{2FBD7B5D-1A31-8E2A-6788-0D622A91C228}"/>
               </a:ext>
             </a:extLst>
           </p:cNvPr>
@@ -610,7 +610,7 @@
           <p:cNvPr id="3" name="Subtítulo 2">
             <a:extLst>
               <a:ext uri="{FF2B5EF4-FFF2-40B4-BE49-F238E27FC236}">
-                <a16:creationId xmlns:a16="http://schemas.microsoft.com/office/drawing/2014/main" xmlns="" id="{D14BAA4A-E511-63A4-9663-CD84647E4EC0}"/>
+                <a16:creationId xmlns="" xmlns:a16="http://schemas.microsoft.com/office/drawing/2014/main" id="{D14BAA4A-E511-63A4-9663-CD84647E4EC0}"/>
               </a:ext>
             </a:extLst>
           </p:cNvPr>
@@ -680,7 +680,7 @@
           <p:cNvPr id="4" name="Espaço Reservado para Data 3">
             <a:extLst>
               <a:ext uri="{FF2B5EF4-FFF2-40B4-BE49-F238E27FC236}">
-                <a16:creationId xmlns:a16="http://schemas.microsoft.com/office/drawing/2014/main" xmlns="" id="{B14B50A7-659F-D18A-E3EA-08FC8BE2E8B0}"/>
+                <a16:creationId xmlns="" xmlns:a16="http://schemas.microsoft.com/office/drawing/2014/main" id="{B14B50A7-659F-D18A-E3EA-08FC8BE2E8B0}"/>
               </a:ext>
             </a:extLst>
           </p:cNvPr>
@@ -699,7 +699,7 @@
             <a:fld id="{C2FDB46F-F830-473B-9701-194C22094723}" type="datetimeFigureOut">
               <a:rPr lang="pt-BR" smtClean="0"/>
               <a:pPr/>
-              <a:t>24/12/2024</a:t>
+              <a:t>05/01/2025</a:t>
             </a:fld>
             <a:endParaRPr lang="pt-BR"/>
           </a:p>
@@ -710,7 +710,7 @@
           <p:cNvPr id="5" name="Espaço Reservado para Rodapé 4">
             <a:extLst>
               <a:ext uri="{FF2B5EF4-FFF2-40B4-BE49-F238E27FC236}">
-                <a16:creationId xmlns:a16="http://schemas.microsoft.com/office/drawing/2014/main" xmlns="" id="{AF501E28-9F3D-9A2A-F892-2196FADBA838}"/>
+                <a16:creationId xmlns="" xmlns:a16="http://schemas.microsoft.com/office/drawing/2014/main" id="{AF501E28-9F3D-9A2A-F892-2196FADBA838}"/>
               </a:ext>
             </a:extLst>
           </p:cNvPr>
@@ -735,7 +735,7 @@
           <p:cNvPr id="6" name="Espaço Reservado para Número de Slide 5">
             <a:extLst>
               <a:ext uri="{FF2B5EF4-FFF2-40B4-BE49-F238E27FC236}">
-                <a16:creationId xmlns:a16="http://schemas.microsoft.com/office/drawing/2014/main" xmlns="" id="{BF83732F-6328-C9C7-00FA-8A5009EE813F}"/>
+                <a16:creationId xmlns="" xmlns:a16="http://schemas.microsoft.com/office/drawing/2014/main" id="{BF83732F-6328-C9C7-00FA-8A5009EE813F}"/>
               </a:ext>
             </a:extLst>
           </p:cNvPr>
@@ -763,7 +763,7 @@
     </p:spTree>
     <p:extLst>
       <p:ext uri="{BB962C8B-B14F-4D97-AF65-F5344CB8AC3E}">
-        <p14:creationId xmlns:p14="http://schemas.microsoft.com/office/powerpoint/2010/main" xmlns="" val="3306190269"/>
+        <p14:creationId xmlns="" xmlns:p14="http://schemas.microsoft.com/office/powerpoint/2010/main" val="3306190269"/>
       </p:ext>
     </p:extLst>
   </p:cSld>
@@ -795,7 +795,7 @@
           <p:cNvPr id="2" name="Título 1">
             <a:extLst>
               <a:ext uri="{FF2B5EF4-FFF2-40B4-BE49-F238E27FC236}">
-                <a16:creationId xmlns:a16="http://schemas.microsoft.com/office/drawing/2014/main" xmlns="" id="{9AAFA4BB-50D5-17EA-0D13-3420891A9957}"/>
+                <a16:creationId xmlns="" xmlns:a16="http://schemas.microsoft.com/office/drawing/2014/main" id="{9AAFA4BB-50D5-17EA-0D13-3420891A9957}"/>
               </a:ext>
             </a:extLst>
           </p:cNvPr>
@@ -823,7 +823,7 @@
           <p:cNvPr id="3" name="Espaço Reservado para Texto Vertical 2">
             <a:extLst>
               <a:ext uri="{FF2B5EF4-FFF2-40B4-BE49-F238E27FC236}">
-                <a16:creationId xmlns:a16="http://schemas.microsoft.com/office/drawing/2014/main" xmlns="" id="{FD718ADC-AE0E-1796-333B-C37290F49CA2}"/>
+                <a16:creationId xmlns="" xmlns:a16="http://schemas.microsoft.com/office/drawing/2014/main" id="{FD718ADC-AE0E-1796-333B-C37290F49CA2}"/>
               </a:ext>
             </a:extLst>
           </p:cNvPr>
@@ -880,7 +880,7 @@
           <p:cNvPr id="4" name="Espaço Reservado para Data 3">
             <a:extLst>
               <a:ext uri="{FF2B5EF4-FFF2-40B4-BE49-F238E27FC236}">
-                <a16:creationId xmlns:a16="http://schemas.microsoft.com/office/drawing/2014/main" xmlns="" id="{AEE5EE24-5C05-2CC9-E55C-CE14C227677C}"/>
+                <a16:creationId xmlns="" xmlns:a16="http://schemas.microsoft.com/office/drawing/2014/main" id="{AEE5EE24-5C05-2CC9-E55C-CE14C227677C}"/>
               </a:ext>
             </a:extLst>
           </p:cNvPr>
@@ -899,7 +899,7 @@
             <a:fld id="{C2FDB46F-F830-473B-9701-194C22094723}" type="datetimeFigureOut">
               <a:rPr lang="pt-BR" smtClean="0"/>
               <a:pPr/>
-              <a:t>24/12/2024</a:t>
+              <a:t>05/01/2025</a:t>
             </a:fld>
             <a:endParaRPr lang="pt-BR"/>
           </a:p>
@@ -910,7 +910,7 @@
           <p:cNvPr id="5" name="Espaço Reservado para Rodapé 4">
             <a:extLst>
               <a:ext uri="{FF2B5EF4-FFF2-40B4-BE49-F238E27FC236}">
-                <a16:creationId xmlns:a16="http://schemas.microsoft.com/office/drawing/2014/main" xmlns="" id="{32D77E9C-D254-4B28-6E67-CD6379A635A3}"/>
+                <a16:creationId xmlns="" xmlns:a16="http://schemas.microsoft.com/office/drawing/2014/main" id="{32D77E9C-D254-4B28-6E67-CD6379A635A3}"/>
               </a:ext>
             </a:extLst>
           </p:cNvPr>
@@ -935,7 +935,7 @@
           <p:cNvPr id="6" name="Espaço Reservado para Número de Slide 5">
             <a:extLst>
               <a:ext uri="{FF2B5EF4-FFF2-40B4-BE49-F238E27FC236}">
-                <a16:creationId xmlns:a16="http://schemas.microsoft.com/office/drawing/2014/main" xmlns="" id="{8761390F-44E0-E956-38CB-9A14817E627A}"/>
+                <a16:creationId xmlns="" xmlns:a16="http://schemas.microsoft.com/office/drawing/2014/main" id="{8761390F-44E0-E956-38CB-9A14817E627A}"/>
               </a:ext>
             </a:extLst>
           </p:cNvPr>
@@ -963,7 +963,7 @@
     </p:spTree>
     <p:extLst>
       <p:ext uri="{BB962C8B-B14F-4D97-AF65-F5344CB8AC3E}">
-        <p14:creationId xmlns:p14="http://schemas.microsoft.com/office/powerpoint/2010/main" xmlns="" val="2463119296"/>
+        <p14:creationId xmlns="" xmlns:p14="http://schemas.microsoft.com/office/powerpoint/2010/main" val="2463119296"/>
       </p:ext>
     </p:extLst>
   </p:cSld>
@@ -995,7 +995,7 @@
           <p:cNvPr id="2" name="Título Vertical 1">
             <a:extLst>
               <a:ext uri="{FF2B5EF4-FFF2-40B4-BE49-F238E27FC236}">
-                <a16:creationId xmlns:a16="http://schemas.microsoft.com/office/drawing/2014/main" xmlns="" id="{267AB665-DC1E-3C1C-C488-5F2DA860520D}"/>
+                <a16:creationId xmlns="" xmlns:a16="http://schemas.microsoft.com/office/drawing/2014/main" id="{267AB665-DC1E-3C1C-C488-5F2DA860520D}"/>
               </a:ext>
             </a:extLst>
           </p:cNvPr>
@@ -1028,7 +1028,7 @@
           <p:cNvPr id="3" name="Espaço Reservado para Texto Vertical 2">
             <a:extLst>
               <a:ext uri="{FF2B5EF4-FFF2-40B4-BE49-F238E27FC236}">
-                <a16:creationId xmlns:a16="http://schemas.microsoft.com/office/drawing/2014/main" xmlns="" id="{FDF39F5B-E813-3389-EF7F-EB0C7819527F}"/>
+                <a16:creationId xmlns="" xmlns:a16="http://schemas.microsoft.com/office/drawing/2014/main" id="{FDF39F5B-E813-3389-EF7F-EB0C7819527F}"/>
               </a:ext>
             </a:extLst>
           </p:cNvPr>
@@ -1090,7 +1090,7 @@
           <p:cNvPr id="4" name="Espaço Reservado para Data 3">
             <a:extLst>
               <a:ext uri="{FF2B5EF4-FFF2-40B4-BE49-F238E27FC236}">
-                <a16:creationId xmlns:a16="http://schemas.microsoft.com/office/drawing/2014/main" xmlns="" id="{056D968F-9955-C90C-C7A6-712EF4BDAB34}"/>
+                <a16:creationId xmlns="" xmlns:a16="http://schemas.microsoft.com/office/drawing/2014/main" id="{056D968F-9955-C90C-C7A6-712EF4BDAB34}"/>
               </a:ext>
             </a:extLst>
           </p:cNvPr>
@@ -1109,7 +1109,7 @@
             <a:fld id="{C2FDB46F-F830-473B-9701-194C22094723}" type="datetimeFigureOut">
               <a:rPr lang="pt-BR" smtClean="0"/>
               <a:pPr/>
-              <a:t>24/12/2024</a:t>
+              <a:t>05/01/2025</a:t>
             </a:fld>
             <a:endParaRPr lang="pt-BR"/>
           </a:p>
@@ -1120,7 +1120,7 @@
           <p:cNvPr id="5" name="Espaço Reservado para Rodapé 4">
             <a:extLst>
               <a:ext uri="{FF2B5EF4-FFF2-40B4-BE49-F238E27FC236}">
-                <a16:creationId xmlns:a16="http://schemas.microsoft.com/office/drawing/2014/main" xmlns="" id="{7BB6DB61-5BA2-6E49-9669-3AFE56D96FE9}"/>
+                <a16:creationId xmlns="" xmlns:a16="http://schemas.microsoft.com/office/drawing/2014/main" id="{7BB6DB61-5BA2-6E49-9669-3AFE56D96FE9}"/>
               </a:ext>
             </a:extLst>
           </p:cNvPr>
@@ -1145,7 +1145,7 @@
           <p:cNvPr id="6" name="Espaço Reservado para Número de Slide 5">
             <a:extLst>
               <a:ext uri="{FF2B5EF4-FFF2-40B4-BE49-F238E27FC236}">
-                <a16:creationId xmlns:a16="http://schemas.microsoft.com/office/drawing/2014/main" xmlns="" id="{0C1DE8DB-8BCE-E7AD-072A-CD66F467ABA9}"/>
+                <a16:creationId xmlns="" xmlns:a16="http://schemas.microsoft.com/office/drawing/2014/main" id="{0C1DE8DB-8BCE-E7AD-072A-CD66F467ABA9}"/>
               </a:ext>
             </a:extLst>
           </p:cNvPr>
@@ -1173,7 +1173,7 @@
     </p:spTree>
     <p:extLst>
       <p:ext uri="{BB962C8B-B14F-4D97-AF65-F5344CB8AC3E}">
-        <p14:creationId xmlns:p14="http://schemas.microsoft.com/office/powerpoint/2010/main" xmlns="" val="2288897383"/>
+        <p14:creationId xmlns="" xmlns:p14="http://schemas.microsoft.com/office/powerpoint/2010/main" val="2288897383"/>
       </p:ext>
     </p:extLst>
   </p:cSld>
@@ -1205,7 +1205,7 @@
           <p:cNvPr id="2" name="Título 1">
             <a:extLst>
               <a:ext uri="{FF2B5EF4-FFF2-40B4-BE49-F238E27FC236}">
-                <a16:creationId xmlns:a16="http://schemas.microsoft.com/office/drawing/2014/main" xmlns="" id="{B12A5892-F254-9F72-6479-6F5390A7DA97}"/>
+                <a16:creationId xmlns="" xmlns:a16="http://schemas.microsoft.com/office/drawing/2014/main" id="{B12A5892-F254-9F72-6479-6F5390A7DA97}"/>
               </a:ext>
             </a:extLst>
           </p:cNvPr>
@@ -1233,7 +1233,7 @@
           <p:cNvPr id="3" name="Espaço Reservado para Conteúdo 2">
             <a:extLst>
               <a:ext uri="{FF2B5EF4-FFF2-40B4-BE49-F238E27FC236}">
-                <a16:creationId xmlns:a16="http://schemas.microsoft.com/office/drawing/2014/main" xmlns="" id="{70819183-0FB4-B9C0-90CD-23B76024EE57}"/>
+                <a16:creationId xmlns="" xmlns:a16="http://schemas.microsoft.com/office/drawing/2014/main" id="{70819183-0FB4-B9C0-90CD-23B76024EE57}"/>
               </a:ext>
             </a:extLst>
           </p:cNvPr>
@@ -1290,7 +1290,7 @@
           <p:cNvPr id="4" name="Espaço Reservado para Data 3">
             <a:extLst>
               <a:ext uri="{FF2B5EF4-FFF2-40B4-BE49-F238E27FC236}">
-                <a16:creationId xmlns:a16="http://schemas.microsoft.com/office/drawing/2014/main" xmlns="" id="{15FD0E21-C9CB-1CB5-EDB6-C492925A3971}"/>
+                <a16:creationId xmlns="" xmlns:a16="http://schemas.microsoft.com/office/drawing/2014/main" id="{15FD0E21-C9CB-1CB5-EDB6-C492925A3971}"/>
               </a:ext>
             </a:extLst>
           </p:cNvPr>
@@ -1309,7 +1309,7 @@
             <a:fld id="{C2FDB46F-F830-473B-9701-194C22094723}" type="datetimeFigureOut">
               <a:rPr lang="pt-BR" smtClean="0"/>
               <a:pPr/>
-              <a:t>24/12/2024</a:t>
+              <a:t>05/01/2025</a:t>
             </a:fld>
             <a:endParaRPr lang="pt-BR"/>
           </a:p>
@@ -1320,7 +1320,7 @@
           <p:cNvPr id="5" name="Espaço Reservado para Rodapé 4">
             <a:extLst>
               <a:ext uri="{FF2B5EF4-FFF2-40B4-BE49-F238E27FC236}">
-                <a16:creationId xmlns:a16="http://schemas.microsoft.com/office/drawing/2014/main" xmlns="" id="{08EDC0B4-D4C1-83C4-AFE9-C036A355B895}"/>
+                <a16:creationId xmlns="" xmlns:a16="http://schemas.microsoft.com/office/drawing/2014/main" id="{08EDC0B4-D4C1-83C4-AFE9-C036A355B895}"/>
               </a:ext>
             </a:extLst>
           </p:cNvPr>
@@ -1345,7 +1345,7 @@
           <p:cNvPr id="6" name="Espaço Reservado para Número de Slide 5">
             <a:extLst>
               <a:ext uri="{FF2B5EF4-FFF2-40B4-BE49-F238E27FC236}">
-                <a16:creationId xmlns:a16="http://schemas.microsoft.com/office/drawing/2014/main" xmlns="" id="{BCC18D1C-E7EC-4B8F-CAF2-C91C3CB14335}"/>
+                <a16:creationId xmlns="" xmlns:a16="http://schemas.microsoft.com/office/drawing/2014/main" id="{BCC18D1C-E7EC-4B8F-CAF2-C91C3CB14335}"/>
               </a:ext>
             </a:extLst>
           </p:cNvPr>
@@ -1373,7 +1373,7 @@
     </p:spTree>
     <p:extLst>
       <p:ext uri="{BB962C8B-B14F-4D97-AF65-F5344CB8AC3E}">
-        <p14:creationId xmlns:p14="http://schemas.microsoft.com/office/powerpoint/2010/main" xmlns="" val="4125385576"/>
+        <p14:creationId xmlns="" xmlns:p14="http://schemas.microsoft.com/office/powerpoint/2010/main" val="4125385576"/>
       </p:ext>
     </p:extLst>
   </p:cSld>
@@ -1405,7 +1405,7 @@
           <p:cNvPr id="2" name="Título 1">
             <a:extLst>
               <a:ext uri="{FF2B5EF4-FFF2-40B4-BE49-F238E27FC236}">
-                <a16:creationId xmlns:a16="http://schemas.microsoft.com/office/drawing/2014/main" xmlns="" id="{D4A9C659-2AB9-5D51-1588-FD7F82AB5D2E}"/>
+                <a16:creationId xmlns="" xmlns:a16="http://schemas.microsoft.com/office/drawing/2014/main" id="{D4A9C659-2AB9-5D51-1588-FD7F82AB5D2E}"/>
               </a:ext>
             </a:extLst>
           </p:cNvPr>
@@ -1442,7 +1442,7 @@
           <p:cNvPr id="3" name="Espaço Reservado para Texto 2">
             <a:extLst>
               <a:ext uri="{FF2B5EF4-FFF2-40B4-BE49-F238E27FC236}">
-                <a16:creationId xmlns:a16="http://schemas.microsoft.com/office/drawing/2014/main" xmlns="" id="{E25B6C6C-A7AE-A925-2AF4-41DB2D7D790B}"/>
+                <a16:creationId xmlns="" xmlns:a16="http://schemas.microsoft.com/office/drawing/2014/main" id="{E25B6C6C-A7AE-A925-2AF4-41DB2D7D790B}"/>
               </a:ext>
             </a:extLst>
           </p:cNvPr>
@@ -1567,7 +1567,7 @@
           <p:cNvPr id="4" name="Espaço Reservado para Data 3">
             <a:extLst>
               <a:ext uri="{FF2B5EF4-FFF2-40B4-BE49-F238E27FC236}">
-                <a16:creationId xmlns:a16="http://schemas.microsoft.com/office/drawing/2014/main" xmlns="" id="{03722599-B41B-0B09-D625-F7FD538E2594}"/>
+                <a16:creationId xmlns="" xmlns:a16="http://schemas.microsoft.com/office/drawing/2014/main" id="{03722599-B41B-0B09-D625-F7FD538E2594}"/>
               </a:ext>
             </a:extLst>
           </p:cNvPr>
@@ -1586,7 +1586,7 @@
             <a:fld id="{C2FDB46F-F830-473B-9701-194C22094723}" type="datetimeFigureOut">
               <a:rPr lang="pt-BR" smtClean="0"/>
               <a:pPr/>
-              <a:t>24/12/2024</a:t>
+              <a:t>05/01/2025</a:t>
             </a:fld>
             <a:endParaRPr lang="pt-BR"/>
           </a:p>
@@ -1597,7 +1597,7 @@
           <p:cNvPr id="5" name="Espaço Reservado para Rodapé 4">
             <a:extLst>
               <a:ext uri="{FF2B5EF4-FFF2-40B4-BE49-F238E27FC236}">
-                <a16:creationId xmlns:a16="http://schemas.microsoft.com/office/drawing/2014/main" xmlns="" id="{625723C8-31AA-1E12-696A-6D53CE6F3B81}"/>
+                <a16:creationId xmlns="" xmlns:a16="http://schemas.microsoft.com/office/drawing/2014/main" id="{625723C8-31AA-1E12-696A-6D53CE6F3B81}"/>
               </a:ext>
             </a:extLst>
           </p:cNvPr>
@@ -1622,7 +1622,7 @@
           <p:cNvPr id="6" name="Espaço Reservado para Número de Slide 5">
             <a:extLst>
               <a:ext uri="{FF2B5EF4-FFF2-40B4-BE49-F238E27FC236}">
-                <a16:creationId xmlns:a16="http://schemas.microsoft.com/office/drawing/2014/main" xmlns="" id="{6ECD1FC4-C714-5359-F27E-EC7C9628E096}"/>
+                <a16:creationId xmlns="" xmlns:a16="http://schemas.microsoft.com/office/drawing/2014/main" id="{6ECD1FC4-C714-5359-F27E-EC7C9628E096}"/>
               </a:ext>
             </a:extLst>
           </p:cNvPr>
@@ -1650,7 +1650,7 @@
     </p:spTree>
     <p:extLst>
       <p:ext uri="{BB962C8B-B14F-4D97-AF65-F5344CB8AC3E}">
-        <p14:creationId xmlns:p14="http://schemas.microsoft.com/office/powerpoint/2010/main" xmlns="" val="2788531181"/>
+        <p14:creationId xmlns="" xmlns:p14="http://schemas.microsoft.com/office/powerpoint/2010/main" val="2788531181"/>
       </p:ext>
     </p:extLst>
   </p:cSld>
@@ -1682,7 +1682,7 @@
           <p:cNvPr id="2" name="Título 1">
             <a:extLst>
               <a:ext uri="{FF2B5EF4-FFF2-40B4-BE49-F238E27FC236}">
-                <a16:creationId xmlns:a16="http://schemas.microsoft.com/office/drawing/2014/main" xmlns="" id="{8613735C-00C0-21B7-5CEB-82FAAB2228F5}"/>
+                <a16:creationId xmlns="" xmlns:a16="http://schemas.microsoft.com/office/drawing/2014/main" id="{8613735C-00C0-21B7-5CEB-82FAAB2228F5}"/>
               </a:ext>
             </a:extLst>
           </p:cNvPr>
@@ -1710,7 +1710,7 @@
           <p:cNvPr id="3" name="Espaço Reservado para Conteúdo 2">
             <a:extLst>
               <a:ext uri="{FF2B5EF4-FFF2-40B4-BE49-F238E27FC236}">
-                <a16:creationId xmlns:a16="http://schemas.microsoft.com/office/drawing/2014/main" xmlns="" id="{5C15BF11-2FBE-DC96-5A40-EE9DF04B2472}"/>
+                <a16:creationId xmlns="" xmlns:a16="http://schemas.microsoft.com/office/drawing/2014/main" id="{5C15BF11-2FBE-DC96-5A40-EE9DF04B2472}"/>
               </a:ext>
             </a:extLst>
           </p:cNvPr>
@@ -1772,7 +1772,7 @@
           <p:cNvPr id="4" name="Espaço Reservado para Conteúdo 3">
             <a:extLst>
               <a:ext uri="{FF2B5EF4-FFF2-40B4-BE49-F238E27FC236}">
-                <a16:creationId xmlns:a16="http://schemas.microsoft.com/office/drawing/2014/main" xmlns="" id="{C72EE9F7-AE7E-FCC0-489B-471F4F9C0A4C}"/>
+                <a16:creationId xmlns="" xmlns:a16="http://schemas.microsoft.com/office/drawing/2014/main" id="{C72EE9F7-AE7E-FCC0-489B-471F4F9C0A4C}"/>
               </a:ext>
             </a:extLst>
           </p:cNvPr>
@@ -1834,7 +1834,7 @@
           <p:cNvPr id="5" name="Espaço Reservado para Data 4">
             <a:extLst>
               <a:ext uri="{FF2B5EF4-FFF2-40B4-BE49-F238E27FC236}">
-                <a16:creationId xmlns:a16="http://schemas.microsoft.com/office/drawing/2014/main" xmlns="" id="{AA6E80F6-28CC-059A-CE6D-4B5D03B8C921}"/>
+                <a16:creationId xmlns="" xmlns:a16="http://schemas.microsoft.com/office/drawing/2014/main" id="{AA6E80F6-28CC-059A-CE6D-4B5D03B8C921}"/>
               </a:ext>
             </a:extLst>
           </p:cNvPr>
@@ -1853,7 +1853,7 @@
             <a:fld id="{C2FDB46F-F830-473B-9701-194C22094723}" type="datetimeFigureOut">
               <a:rPr lang="pt-BR" smtClean="0"/>
               <a:pPr/>
-              <a:t>24/12/2024</a:t>
+              <a:t>05/01/2025</a:t>
             </a:fld>
             <a:endParaRPr lang="pt-BR"/>
           </a:p>
@@ -1864,7 +1864,7 @@
           <p:cNvPr id="6" name="Espaço Reservado para Rodapé 5">
             <a:extLst>
               <a:ext uri="{FF2B5EF4-FFF2-40B4-BE49-F238E27FC236}">
-                <a16:creationId xmlns:a16="http://schemas.microsoft.com/office/drawing/2014/main" xmlns="" id="{F5414BE6-6AE2-305E-012A-857A7B84DC83}"/>
+                <a16:creationId xmlns="" xmlns:a16="http://schemas.microsoft.com/office/drawing/2014/main" id="{F5414BE6-6AE2-305E-012A-857A7B84DC83}"/>
               </a:ext>
             </a:extLst>
           </p:cNvPr>
@@ -1889,7 +1889,7 @@
           <p:cNvPr id="7" name="Espaço Reservado para Número de Slide 6">
             <a:extLst>
               <a:ext uri="{FF2B5EF4-FFF2-40B4-BE49-F238E27FC236}">
-                <a16:creationId xmlns:a16="http://schemas.microsoft.com/office/drawing/2014/main" xmlns="" id="{B46F6659-8128-77C6-2C72-BEBB52570B83}"/>
+                <a16:creationId xmlns="" xmlns:a16="http://schemas.microsoft.com/office/drawing/2014/main" id="{B46F6659-8128-77C6-2C72-BEBB52570B83}"/>
               </a:ext>
             </a:extLst>
           </p:cNvPr>
@@ -1917,7 +1917,7 @@
     </p:spTree>
     <p:extLst>
       <p:ext uri="{BB962C8B-B14F-4D97-AF65-F5344CB8AC3E}">
-        <p14:creationId xmlns:p14="http://schemas.microsoft.com/office/powerpoint/2010/main" xmlns="" val="4284516959"/>
+        <p14:creationId xmlns="" xmlns:p14="http://schemas.microsoft.com/office/powerpoint/2010/main" val="4284516959"/>
       </p:ext>
     </p:extLst>
   </p:cSld>
@@ -1949,7 +1949,7 @@
           <p:cNvPr id="2" name="Título 1">
             <a:extLst>
               <a:ext uri="{FF2B5EF4-FFF2-40B4-BE49-F238E27FC236}">
-                <a16:creationId xmlns:a16="http://schemas.microsoft.com/office/drawing/2014/main" xmlns="" id="{3612DA4F-079F-A8A1-20F2-31983DB53A97}"/>
+                <a16:creationId xmlns="" xmlns:a16="http://schemas.microsoft.com/office/drawing/2014/main" id="{3612DA4F-079F-A8A1-20F2-31983DB53A97}"/>
               </a:ext>
             </a:extLst>
           </p:cNvPr>
@@ -1982,7 +1982,7 @@
           <p:cNvPr id="3" name="Espaço Reservado para Texto 2">
             <a:extLst>
               <a:ext uri="{FF2B5EF4-FFF2-40B4-BE49-F238E27FC236}">
-                <a16:creationId xmlns:a16="http://schemas.microsoft.com/office/drawing/2014/main" xmlns="" id="{B8F4E01B-9658-F701-6527-B33B2D96754A}"/>
+                <a16:creationId xmlns="" xmlns:a16="http://schemas.microsoft.com/office/drawing/2014/main" id="{B8F4E01B-9658-F701-6527-B33B2D96754A}"/>
               </a:ext>
             </a:extLst>
           </p:cNvPr>
@@ -2053,7 +2053,7 @@
           <p:cNvPr id="4" name="Espaço Reservado para Conteúdo 3">
             <a:extLst>
               <a:ext uri="{FF2B5EF4-FFF2-40B4-BE49-F238E27FC236}">
-                <a16:creationId xmlns:a16="http://schemas.microsoft.com/office/drawing/2014/main" xmlns="" id="{AC025872-62B5-128F-7AB8-DFB4717B15BA}"/>
+                <a16:creationId xmlns="" xmlns:a16="http://schemas.microsoft.com/office/drawing/2014/main" id="{AC025872-62B5-128F-7AB8-DFB4717B15BA}"/>
               </a:ext>
             </a:extLst>
           </p:cNvPr>
@@ -2115,7 +2115,7 @@
           <p:cNvPr id="5" name="Espaço Reservado para Texto 4">
             <a:extLst>
               <a:ext uri="{FF2B5EF4-FFF2-40B4-BE49-F238E27FC236}">
-                <a16:creationId xmlns:a16="http://schemas.microsoft.com/office/drawing/2014/main" xmlns="" id="{D533D800-9086-80CC-DD7E-723A30FF27F7}"/>
+                <a16:creationId xmlns="" xmlns:a16="http://schemas.microsoft.com/office/drawing/2014/main" id="{D533D800-9086-80CC-DD7E-723A30FF27F7}"/>
               </a:ext>
             </a:extLst>
           </p:cNvPr>
@@ -2186,7 +2186,7 @@
           <p:cNvPr id="6" name="Espaço Reservado para Conteúdo 5">
             <a:extLst>
               <a:ext uri="{FF2B5EF4-FFF2-40B4-BE49-F238E27FC236}">
-                <a16:creationId xmlns:a16="http://schemas.microsoft.com/office/drawing/2014/main" xmlns="" id="{3016CC00-624E-F690-8422-309AFDB9955B}"/>
+                <a16:creationId xmlns="" xmlns:a16="http://schemas.microsoft.com/office/drawing/2014/main" id="{3016CC00-624E-F690-8422-309AFDB9955B}"/>
               </a:ext>
             </a:extLst>
           </p:cNvPr>
@@ -2248,7 +2248,7 @@
           <p:cNvPr id="7" name="Espaço Reservado para Data 6">
             <a:extLst>
               <a:ext uri="{FF2B5EF4-FFF2-40B4-BE49-F238E27FC236}">
-                <a16:creationId xmlns:a16="http://schemas.microsoft.com/office/drawing/2014/main" xmlns="" id="{FBE7A5ED-3CE1-3796-02BA-6C49664749A0}"/>
+                <a16:creationId xmlns="" xmlns:a16="http://schemas.microsoft.com/office/drawing/2014/main" id="{FBE7A5ED-3CE1-3796-02BA-6C49664749A0}"/>
               </a:ext>
             </a:extLst>
           </p:cNvPr>
@@ -2267,7 +2267,7 @@
             <a:fld id="{C2FDB46F-F830-473B-9701-194C22094723}" type="datetimeFigureOut">
               <a:rPr lang="pt-BR" smtClean="0"/>
               <a:pPr/>
-              <a:t>24/12/2024</a:t>
+              <a:t>05/01/2025</a:t>
             </a:fld>
             <a:endParaRPr lang="pt-BR"/>
           </a:p>
@@ -2278,7 +2278,7 @@
           <p:cNvPr id="8" name="Espaço Reservado para Rodapé 7">
             <a:extLst>
               <a:ext uri="{FF2B5EF4-FFF2-40B4-BE49-F238E27FC236}">
-                <a16:creationId xmlns:a16="http://schemas.microsoft.com/office/drawing/2014/main" xmlns="" id="{F50868D7-BFB9-3448-86C3-39352E81B720}"/>
+                <a16:creationId xmlns="" xmlns:a16="http://schemas.microsoft.com/office/drawing/2014/main" id="{F50868D7-BFB9-3448-86C3-39352E81B720}"/>
               </a:ext>
             </a:extLst>
           </p:cNvPr>
@@ -2303,7 +2303,7 @@
           <p:cNvPr id="9" name="Espaço Reservado para Número de Slide 8">
             <a:extLst>
               <a:ext uri="{FF2B5EF4-FFF2-40B4-BE49-F238E27FC236}">
-                <a16:creationId xmlns:a16="http://schemas.microsoft.com/office/drawing/2014/main" xmlns="" id="{7E19B0E5-E9C1-76D9-9287-43771D209FB3}"/>
+                <a16:creationId xmlns="" xmlns:a16="http://schemas.microsoft.com/office/drawing/2014/main" id="{7E19B0E5-E9C1-76D9-9287-43771D209FB3}"/>
               </a:ext>
             </a:extLst>
           </p:cNvPr>
@@ -2331,7 +2331,7 @@
     </p:spTree>
     <p:extLst>
       <p:ext uri="{BB962C8B-B14F-4D97-AF65-F5344CB8AC3E}">
-        <p14:creationId xmlns:p14="http://schemas.microsoft.com/office/powerpoint/2010/main" xmlns="" val="1925962630"/>
+        <p14:creationId xmlns="" xmlns:p14="http://schemas.microsoft.com/office/powerpoint/2010/main" val="1925962630"/>
       </p:ext>
     </p:extLst>
   </p:cSld>
@@ -2363,7 +2363,7 @@
           <p:cNvPr id="2" name="Título 1">
             <a:extLst>
               <a:ext uri="{FF2B5EF4-FFF2-40B4-BE49-F238E27FC236}">
-                <a16:creationId xmlns:a16="http://schemas.microsoft.com/office/drawing/2014/main" xmlns="" id="{54670FEC-2708-9003-B309-660E513082D8}"/>
+                <a16:creationId xmlns="" xmlns:a16="http://schemas.microsoft.com/office/drawing/2014/main" id="{54670FEC-2708-9003-B309-660E513082D8}"/>
               </a:ext>
             </a:extLst>
           </p:cNvPr>
@@ -2391,7 +2391,7 @@
           <p:cNvPr id="3" name="Espaço Reservado para Data 2">
             <a:extLst>
               <a:ext uri="{FF2B5EF4-FFF2-40B4-BE49-F238E27FC236}">
-                <a16:creationId xmlns:a16="http://schemas.microsoft.com/office/drawing/2014/main" xmlns="" id="{DB77D1E2-2D0B-D51B-494F-1F50BAF53B8B}"/>
+                <a16:creationId xmlns="" xmlns:a16="http://schemas.microsoft.com/office/drawing/2014/main" id="{DB77D1E2-2D0B-D51B-494F-1F50BAF53B8B}"/>
               </a:ext>
             </a:extLst>
           </p:cNvPr>
@@ -2410,7 +2410,7 @@
             <a:fld id="{C2FDB46F-F830-473B-9701-194C22094723}" type="datetimeFigureOut">
               <a:rPr lang="pt-BR" smtClean="0"/>
               <a:pPr/>
-              <a:t>24/12/2024</a:t>
+              <a:t>05/01/2025</a:t>
             </a:fld>
             <a:endParaRPr lang="pt-BR"/>
           </a:p>
@@ -2421,7 +2421,7 @@
           <p:cNvPr id="4" name="Espaço Reservado para Rodapé 3">
             <a:extLst>
               <a:ext uri="{FF2B5EF4-FFF2-40B4-BE49-F238E27FC236}">
-                <a16:creationId xmlns:a16="http://schemas.microsoft.com/office/drawing/2014/main" xmlns="" id="{F183C28A-D37D-8233-67BD-61661C4BCC4B}"/>
+                <a16:creationId xmlns="" xmlns:a16="http://schemas.microsoft.com/office/drawing/2014/main" id="{F183C28A-D37D-8233-67BD-61661C4BCC4B}"/>
               </a:ext>
             </a:extLst>
           </p:cNvPr>
@@ -2446,7 +2446,7 @@
           <p:cNvPr id="5" name="Espaço Reservado para Número de Slide 4">
             <a:extLst>
               <a:ext uri="{FF2B5EF4-FFF2-40B4-BE49-F238E27FC236}">
-                <a16:creationId xmlns:a16="http://schemas.microsoft.com/office/drawing/2014/main" xmlns="" id="{8AAD4D31-EB5F-9A8A-0F00-E2EB9E056BFE}"/>
+                <a16:creationId xmlns="" xmlns:a16="http://schemas.microsoft.com/office/drawing/2014/main" id="{8AAD4D31-EB5F-9A8A-0F00-E2EB9E056BFE}"/>
               </a:ext>
             </a:extLst>
           </p:cNvPr>
@@ -2474,7 +2474,7 @@
     </p:spTree>
     <p:extLst>
       <p:ext uri="{BB962C8B-B14F-4D97-AF65-F5344CB8AC3E}">
-        <p14:creationId xmlns:p14="http://schemas.microsoft.com/office/powerpoint/2010/main" xmlns="" val="878959071"/>
+        <p14:creationId xmlns="" xmlns:p14="http://schemas.microsoft.com/office/powerpoint/2010/main" val="878959071"/>
       </p:ext>
     </p:extLst>
   </p:cSld>
@@ -2506,7 +2506,7 @@
           <p:cNvPr id="2" name="Espaço Reservado para Data 1">
             <a:extLst>
               <a:ext uri="{FF2B5EF4-FFF2-40B4-BE49-F238E27FC236}">
-                <a16:creationId xmlns:a16="http://schemas.microsoft.com/office/drawing/2014/main" xmlns="" id="{4E6002C2-D115-B1B8-0405-572044E7E8EB}"/>
+                <a16:creationId xmlns="" xmlns:a16="http://schemas.microsoft.com/office/drawing/2014/main" id="{4E6002C2-D115-B1B8-0405-572044E7E8EB}"/>
               </a:ext>
             </a:extLst>
           </p:cNvPr>
@@ -2525,7 +2525,7 @@
             <a:fld id="{C2FDB46F-F830-473B-9701-194C22094723}" type="datetimeFigureOut">
               <a:rPr lang="pt-BR" smtClean="0"/>
               <a:pPr/>
-              <a:t>24/12/2024</a:t>
+              <a:t>05/01/2025</a:t>
             </a:fld>
             <a:endParaRPr lang="pt-BR"/>
           </a:p>
@@ -2536,7 +2536,7 @@
           <p:cNvPr id="3" name="Espaço Reservado para Rodapé 2">
             <a:extLst>
               <a:ext uri="{FF2B5EF4-FFF2-40B4-BE49-F238E27FC236}">
-                <a16:creationId xmlns:a16="http://schemas.microsoft.com/office/drawing/2014/main" xmlns="" id="{C03CC9A0-BFAA-1921-7883-FBBFBED9FAE2}"/>
+                <a16:creationId xmlns="" xmlns:a16="http://schemas.microsoft.com/office/drawing/2014/main" id="{C03CC9A0-BFAA-1921-7883-FBBFBED9FAE2}"/>
               </a:ext>
             </a:extLst>
           </p:cNvPr>
@@ -2561,7 +2561,7 @@
           <p:cNvPr id="4" name="Espaço Reservado para Número de Slide 3">
             <a:extLst>
               <a:ext uri="{FF2B5EF4-FFF2-40B4-BE49-F238E27FC236}">
-                <a16:creationId xmlns:a16="http://schemas.microsoft.com/office/drawing/2014/main" xmlns="" id="{182BDB6B-26E2-6B24-567A-09A3C5C05913}"/>
+                <a16:creationId xmlns="" xmlns:a16="http://schemas.microsoft.com/office/drawing/2014/main" id="{182BDB6B-26E2-6B24-567A-09A3C5C05913}"/>
               </a:ext>
             </a:extLst>
           </p:cNvPr>
@@ -2589,7 +2589,7 @@
     </p:spTree>
     <p:extLst>
       <p:ext uri="{BB962C8B-B14F-4D97-AF65-F5344CB8AC3E}">
-        <p14:creationId xmlns:p14="http://schemas.microsoft.com/office/powerpoint/2010/main" xmlns="" val="692293901"/>
+        <p14:creationId xmlns="" xmlns:p14="http://schemas.microsoft.com/office/powerpoint/2010/main" val="692293901"/>
       </p:ext>
     </p:extLst>
   </p:cSld>
@@ -2621,7 +2621,7 @@
           <p:cNvPr id="2" name="Título 1">
             <a:extLst>
               <a:ext uri="{FF2B5EF4-FFF2-40B4-BE49-F238E27FC236}">
-                <a16:creationId xmlns:a16="http://schemas.microsoft.com/office/drawing/2014/main" xmlns="" id="{C00FED91-2F70-32E0-C01D-7E8D60FB6405}"/>
+                <a16:creationId xmlns="" xmlns:a16="http://schemas.microsoft.com/office/drawing/2014/main" id="{C00FED91-2F70-32E0-C01D-7E8D60FB6405}"/>
               </a:ext>
             </a:extLst>
           </p:cNvPr>
@@ -2658,7 +2658,7 @@
           <p:cNvPr id="3" name="Espaço Reservado para Conteúdo 2">
             <a:extLst>
               <a:ext uri="{FF2B5EF4-FFF2-40B4-BE49-F238E27FC236}">
-                <a16:creationId xmlns:a16="http://schemas.microsoft.com/office/drawing/2014/main" xmlns="" id="{B57DF5A5-E2D1-E53C-6470-0B3A5E807F1E}"/>
+                <a16:creationId xmlns="" xmlns:a16="http://schemas.microsoft.com/office/drawing/2014/main" id="{B57DF5A5-E2D1-E53C-6470-0B3A5E807F1E}"/>
               </a:ext>
             </a:extLst>
           </p:cNvPr>
@@ -2748,7 +2748,7 @@
           <p:cNvPr id="4" name="Espaço Reservado para Texto 3">
             <a:extLst>
               <a:ext uri="{FF2B5EF4-FFF2-40B4-BE49-F238E27FC236}">
-                <a16:creationId xmlns:a16="http://schemas.microsoft.com/office/drawing/2014/main" xmlns="" id="{5921D17A-1508-E60C-1F79-C689CAA04622}"/>
+                <a16:creationId xmlns="" xmlns:a16="http://schemas.microsoft.com/office/drawing/2014/main" id="{5921D17A-1508-E60C-1F79-C689CAA04622}"/>
               </a:ext>
             </a:extLst>
           </p:cNvPr>
@@ -2819,7 +2819,7 @@
           <p:cNvPr id="5" name="Espaço Reservado para Data 4">
             <a:extLst>
               <a:ext uri="{FF2B5EF4-FFF2-40B4-BE49-F238E27FC236}">
-                <a16:creationId xmlns:a16="http://schemas.microsoft.com/office/drawing/2014/main" xmlns="" id="{EA8C5C6E-A82D-FC07-95D9-AC5ED4D315EB}"/>
+                <a16:creationId xmlns="" xmlns:a16="http://schemas.microsoft.com/office/drawing/2014/main" id="{EA8C5C6E-A82D-FC07-95D9-AC5ED4D315EB}"/>
               </a:ext>
             </a:extLst>
           </p:cNvPr>
@@ -2838,7 +2838,7 @@
             <a:fld id="{C2FDB46F-F830-473B-9701-194C22094723}" type="datetimeFigureOut">
               <a:rPr lang="pt-BR" smtClean="0"/>
               <a:pPr/>
-              <a:t>24/12/2024</a:t>
+              <a:t>05/01/2025</a:t>
             </a:fld>
             <a:endParaRPr lang="pt-BR"/>
           </a:p>
@@ -2849,7 +2849,7 @@
           <p:cNvPr id="6" name="Espaço Reservado para Rodapé 5">
             <a:extLst>
               <a:ext uri="{FF2B5EF4-FFF2-40B4-BE49-F238E27FC236}">
-                <a16:creationId xmlns:a16="http://schemas.microsoft.com/office/drawing/2014/main" xmlns="" id="{45C544C6-60EB-E2D0-DB19-179777E8B9DE}"/>
+                <a16:creationId xmlns="" xmlns:a16="http://schemas.microsoft.com/office/drawing/2014/main" id="{45C544C6-60EB-E2D0-DB19-179777E8B9DE}"/>
               </a:ext>
             </a:extLst>
           </p:cNvPr>
@@ -2874,7 +2874,7 @@
           <p:cNvPr id="7" name="Espaço Reservado para Número de Slide 6">
             <a:extLst>
               <a:ext uri="{FF2B5EF4-FFF2-40B4-BE49-F238E27FC236}">
-                <a16:creationId xmlns:a16="http://schemas.microsoft.com/office/drawing/2014/main" xmlns="" id="{A7ECD2E1-91AC-59E5-F3A8-788576D43F4F}"/>
+                <a16:creationId xmlns="" xmlns:a16="http://schemas.microsoft.com/office/drawing/2014/main" id="{A7ECD2E1-91AC-59E5-F3A8-788576D43F4F}"/>
               </a:ext>
             </a:extLst>
           </p:cNvPr>
@@ -2902,7 +2902,7 @@
     </p:spTree>
     <p:extLst>
       <p:ext uri="{BB962C8B-B14F-4D97-AF65-F5344CB8AC3E}">
-        <p14:creationId xmlns:p14="http://schemas.microsoft.com/office/powerpoint/2010/main" xmlns="" val="2912975385"/>
+        <p14:creationId xmlns="" xmlns:p14="http://schemas.microsoft.com/office/powerpoint/2010/main" val="2912975385"/>
       </p:ext>
     </p:extLst>
   </p:cSld>
@@ -2934,7 +2934,7 @@
           <p:cNvPr id="2" name="Título 1">
             <a:extLst>
               <a:ext uri="{FF2B5EF4-FFF2-40B4-BE49-F238E27FC236}">
-                <a16:creationId xmlns:a16="http://schemas.microsoft.com/office/drawing/2014/main" xmlns="" id="{BD5F082C-B754-F22F-6061-ECAFE5F8D934}"/>
+                <a16:creationId xmlns="" xmlns:a16="http://schemas.microsoft.com/office/drawing/2014/main" id="{BD5F082C-B754-F22F-6061-ECAFE5F8D934}"/>
               </a:ext>
             </a:extLst>
           </p:cNvPr>
@@ -2971,7 +2971,7 @@
           <p:cNvPr id="3" name="Espaço Reservado para Imagem 2">
             <a:extLst>
               <a:ext uri="{FF2B5EF4-FFF2-40B4-BE49-F238E27FC236}">
-                <a16:creationId xmlns:a16="http://schemas.microsoft.com/office/drawing/2014/main" xmlns="" id="{F5FE1425-01D0-3C87-C163-000C19D1DC35}"/>
+                <a16:creationId xmlns="" xmlns:a16="http://schemas.microsoft.com/office/drawing/2014/main" id="{F5FE1425-01D0-3C87-C163-000C19D1DC35}"/>
               </a:ext>
             </a:extLst>
           </p:cNvPr>
@@ -3038,7 +3038,7 @@
           <p:cNvPr id="4" name="Espaço Reservado para Texto 3">
             <a:extLst>
               <a:ext uri="{FF2B5EF4-FFF2-40B4-BE49-F238E27FC236}">
-                <a16:creationId xmlns:a16="http://schemas.microsoft.com/office/drawing/2014/main" xmlns="" id="{9209414B-6464-EF90-8B30-BDEA7306C26F}"/>
+                <a16:creationId xmlns="" xmlns:a16="http://schemas.microsoft.com/office/drawing/2014/main" id="{9209414B-6464-EF90-8B30-BDEA7306C26F}"/>
               </a:ext>
             </a:extLst>
           </p:cNvPr>
@@ -3109,7 +3109,7 @@
           <p:cNvPr id="5" name="Espaço Reservado para Data 4">
             <a:extLst>
               <a:ext uri="{FF2B5EF4-FFF2-40B4-BE49-F238E27FC236}">
-                <a16:creationId xmlns:a16="http://schemas.microsoft.com/office/drawing/2014/main" xmlns="" id="{4D6A3B19-02F1-82C9-2767-FCC0C4442F06}"/>
+                <a16:creationId xmlns="" xmlns:a16="http://schemas.microsoft.com/office/drawing/2014/main" id="{4D6A3B19-02F1-82C9-2767-FCC0C4442F06}"/>
               </a:ext>
             </a:extLst>
           </p:cNvPr>
@@ -3128,7 +3128,7 @@
             <a:fld id="{C2FDB46F-F830-473B-9701-194C22094723}" type="datetimeFigureOut">
               <a:rPr lang="pt-BR" smtClean="0"/>
               <a:pPr/>
-              <a:t>24/12/2024</a:t>
+              <a:t>05/01/2025</a:t>
             </a:fld>
             <a:endParaRPr lang="pt-BR"/>
           </a:p>
@@ -3139,7 +3139,7 @@
           <p:cNvPr id="6" name="Espaço Reservado para Rodapé 5">
             <a:extLst>
               <a:ext uri="{FF2B5EF4-FFF2-40B4-BE49-F238E27FC236}">
-                <a16:creationId xmlns:a16="http://schemas.microsoft.com/office/drawing/2014/main" xmlns="" id="{32BFA6DD-7795-D94F-F31F-2B0C46FD1CD5}"/>
+                <a16:creationId xmlns="" xmlns:a16="http://schemas.microsoft.com/office/drawing/2014/main" id="{32BFA6DD-7795-D94F-F31F-2B0C46FD1CD5}"/>
               </a:ext>
             </a:extLst>
           </p:cNvPr>
@@ -3164,7 +3164,7 @@
           <p:cNvPr id="7" name="Espaço Reservado para Número de Slide 6">
             <a:extLst>
               <a:ext uri="{FF2B5EF4-FFF2-40B4-BE49-F238E27FC236}">
-                <a16:creationId xmlns:a16="http://schemas.microsoft.com/office/drawing/2014/main" xmlns="" id="{6E981D2B-31A7-F08B-6248-7EBC69558F10}"/>
+                <a16:creationId xmlns="" xmlns:a16="http://schemas.microsoft.com/office/drawing/2014/main" id="{6E981D2B-31A7-F08B-6248-7EBC69558F10}"/>
               </a:ext>
             </a:extLst>
           </p:cNvPr>
@@ -3192,7 +3192,7 @@
     </p:spTree>
     <p:extLst>
       <p:ext uri="{BB962C8B-B14F-4D97-AF65-F5344CB8AC3E}">
-        <p14:creationId xmlns:p14="http://schemas.microsoft.com/office/powerpoint/2010/main" xmlns="" val="2782259678"/>
+        <p14:creationId xmlns="" xmlns:p14="http://schemas.microsoft.com/office/powerpoint/2010/main" val="2782259678"/>
       </p:ext>
     </p:extLst>
   </p:cSld>
@@ -3229,7 +3229,7 @@
           <p:cNvPr id="2" name="Espaço Reservado para Título 1">
             <a:extLst>
               <a:ext uri="{FF2B5EF4-FFF2-40B4-BE49-F238E27FC236}">
-                <a16:creationId xmlns:a16="http://schemas.microsoft.com/office/drawing/2014/main" xmlns="" id="{C7359DB0-6CF7-BFF9-82EB-A1722568276C}"/>
+                <a16:creationId xmlns="" xmlns:a16="http://schemas.microsoft.com/office/drawing/2014/main" id="{C7359DB0-6CF7-BFF9-82EB-A1722568276C}"/>
               </a:ext>
             </a:extLst>
           </p:cNvPr>
@@ -3267,7 +3267,7 @@
           <p:cNvPr id="3" name="Espaço Reservado para Texto 2">
             <a:extLst>
               <a:ext uri="{FF2B5EF4-FFF2-40B4-BE49-F238E27FC236}">
-                <a16:creationId xmlns:a16="http://schemas.microsoft.com/office/drawing/2014/main" xmlns="" id="{50991311-77A7-46BB-4BE9-A0EAF2CE7321}"/>
+                <a16:creationId xmlns="" xmlns:a16="http://schemas.microsoft.com/office/drawing/2014/main" id="{50991311-77A7-46BB-4BE9-A0EAF2CE7321}"/>
               </a:ext>
             </a:extLst>
           </p:cNvPr>
@@ -3334,7 +3334,7 @@
           <p:cNvPr id="4" name="Espaço Reservado para Data 3">
             <a:extLst>
               <a:ext uri="{FF2B5EF4-FFF2-40B4-BE49-F238E27FC236}">
-                <a16:creationId xmlns:a16="http://schemas.microsoft.com/office/drawing/2014/main" xmlns="" id="{0351B115-D935-44F7-C9EC-DACAF930B3A9}"/>
+                <a16:creationId xmlns="" xmlns:a16="http://schemas.microsoft.com/office/drawing/2014/main" id="{0351B115-D935-44F7-C9EC-DACAF930B3A9}"/>
               </a:ext>
             </a:extLst>
           </p:cNvPr>
@@ -3371,7 +3371,7 @@
             <a:fld id="{C2FDB46F-F830-473B-9701-194C22094723}" type="datetimeFigureOut">
               <a:rPr lang="pt-BR" smtClean="0"/>
               <a:pPr/>
-              <a:t>24/12/2024</a:t>
+              <a:t>05/01/2025</a:t>
             </a:fld>
             <a:endParaRPr lang="pt-BR"/>
           </a:p>
@@ -3382,7 +3382,7 @@
           <p:cNvPr id="5" name="Espaço Reservado para Rodapé 4">
             <a:extLst>
               <a:ext uri="{FF2B5EF4-FFF2-40B4-BE49-F238E27FC236}">
-                <a16:creationId xmlns:a16="http://schemas.microsoft.com/office/drawing/2014/main" xmlns="" id="{0A7392E3-E11B-20C1-C0A3-D8B8B1198451}"/>
+                <a16:creationId xmlns="" xmlns:a16="http://schemas.microsoft.com/office/drawing/2014/main" id="{0A7392E3-E11B-20C1-C0A3-D8B8B1198451}"/>
               </a:ext>
             </a:extLst>
           </p:cNvPr>
@@ -3425,7 +3425,7 @@
           <p:cNvPr id="6" name="Espaço Reservado para Número de Slide 5">
             <a:extLst>
               <a:ext uri="{FF2B5EF4-FFF2-40B4-BE49-F238E27FC236}">
-                <a16:creationId xmlns:a16="http://schemas.microsoft.com/office/drawing/2014/main" xmlns="" id="{E3851DBB-FD1A-7A7C-B342-489B53EEBC36}"/>
+                <a16:creationId xmlns="" xmlns:a16="http://schemas.microsoft.com/office/drawing/2014/main" id="{E3851DBB-FD1A-7A7C-B342-489B53EEBC36}"/>
               </a:ext>
             </a:extLst>
           </p:cNvPr>
@@ -3471,7 +3471,7 @@
     </p:spTree>
     <p:extLst>
       <p:ext uri="{BB962C8B-B14F-4D97-AF65-F5344CB8AC3E}">
-        <p14:creationId xmlns:p14="http://schemas.microsoft.com/office/powerpoint/2010/main" xmlns="" val="1719581763"/>
+        <p14:creationId xmlns="" xmlns:p14="http://schemas.microsoft.com/office/powerpoint/2010/main" val="1719581763"/>
       </p:ext>
     </p:extLst>
   </p:cSld>
@@ -3794,7 +3794,7 @@
           <p:cNvPr id="4" name="Retângulo 3">
             <a:extLst>
               <a:ext uri="{FF2B5EF4-FFF2-40B4-BE49-F238E27FC236}">
-                <a16:creationId xmlns:a16="http://schemas.microsoft.com/office/drawing/2014/main" xmlns="" id="{AFD05444-B165-4A75-11E9-0E992CDC0406}"/>
+                <a16:creationId xmlns="" xmlns:a16="http://schemas.microsoft.com/office/drawing/2014/main" id="{AFD05444-B165-4A75-11E9-0E992CDC0406}"/>
               </a:ext>
             </a:extLst>
           </p:cNvPr>
@@ -3846,7 +3846,7 @@
           <p:cNvPr id="5" name="Retângulo 4">
             <a:extLst>
               <a:ext uri="{FF2B5EF4-FFF2-40B4-BE49-F238E27FC236}">
-                <a16:creationId xmlns:a16="http://schemas.microsoft.com/office/drawing/2014/main" xmlns="" id="{9B99B2DF-2CC4-347D-0910-8830491E91B3}"/>
+                <a16:creationId xmlns="" xmlns:a16="http://schemas.microsoft.com/office/drawing/2014/main" id="{9B99B2DF-2CC4-347D-0910-8830491E91B3}"/>
               </a:ext>
             </a:extLst>
           </p:cNvPr>
@@ -3855,8 +3855,8 @@
         </p:nvSpPr>
         <p:spPr>
           <a:xfrm>
-            <a:off x="4097288" y="1844634"/>
-            <a:ext cx="1816624" cy="1817089"/>
+            <a:off x="4097288" y="3098800"/>
+            <a:ext cx="1816624" cy="1612900"/>
           </a:xfrm>
           <a:prstGeom prst="rect">
             <a:avLst/>
@@ -3898,7 +3898,7 @@
           <p:cNvPr id="6" name="Retângulo 5">
             <a:extLst>
               <a:ext uri="{FF2B5EF4-FFF2-40B4-BE49-F238E27FC236}">
-                <a16:creationId xmlns:a16="http://schemas.microsoft.com/office/drawing/2014/main" xmlns="" id="{FC554D95-20FE-3CCC-F407-D31669DC48A9}"/>
+                <a16:creationId xmlns="" xmlns:a16="http://schemas.microsoft.com/office/drawing/2014/main" id="{FC554D95-20FE-3CCC-F407-D31669DC48A9}"/>
               </a:ext>
             </a:extLst>
           </p:cNvPr>
@@ -3950,7 +3950,7 @@
           <p:cNvPr id="7" name="Seta: da Esquerda para a Direita 6">
             <a:extLst>
               <a:ext uri="{FF2B5EF4-FFF2-40B4-BE49-F238E27FC236}">
-                <a16:creationId xmlns:a16="http://schemas.microsoft.com/office/drawing/2014/main" xmlns="" id="{E81CC717-9BAE-6DCB-4602-6AFA59233F14}"/>
+                <a16:creationId xmlns="" xmlns:a16="http://schemas.microsoft.com/office/drawing/2014/main" id="{E81CC717-9BAE-6DCB-4602-6AFA59233F14}"/>
               </a:ext>
             </a:extLst>
           </p:cNvPr>
@@ -3959,7 +3959,7 @@
         </p:nvSpPr>
         <p:spPr>
           <a:xfrm>
-            <a:off x="2901720" y="2577786"/>
+            <a:off x="2901720" y="3631886"/>
             <a:ext cx="1177235" cy="320236"/>
           </a:xfrm>
           <a:prstGeom prst="leftRightArrow">
@@ -3998,7 +3998,7 @@
           <p:cNvPr id="8" name="CaixaDeTexto 7">
             <a:extLst>
               <a:ext uri="{FF2B5EF4-FFF2-40B4-BE49-F238E27FC236}">
-                <a16:creationId xmlns:a16="http://schemas.microsoft.com/office/drawing/2014/main" xmlns="" id="{326DA4C4-BC94-350B-3422-3FF0F2E13017}"/>
+                <a16:creationId xmlns="" xmlns:a16="http://schemas.microsoft.com/office/drawing/2014/main" id="{326DA4C4-BC94-350B-3422-3FF0F2E13017}"/>
               </a:ext>
             </a:extLst>
           </p:cNvPr>
@@ -4007,7 +4007,7 @@
         </p:nvSpPr>
         <p:spPr>
           <a:xfrm>
-            <a:off x="3191512" y="1914374"/>
+            <a:off x="3216912" y="2955774"/>
             <a:ext cx="884903" cy="707886"/>
           </a:xfrm>
           <a:prstGeom prst="rect">
@@ -4039,7 +4039,7 @@
           <p:cNvPr id="9" name="CaixaDeTexto 8">
             <a:extLst>
               <a:ext uri="{FF2B5EF4-FFF2-40B4-BE49-F238E27FC236}">
-                <a16:creationId xmlns:a16="http://schemas.microsoft.com/office/drawing/2014/main" xmlns="" id="{A89EFD06-C5A8-AF9C-B7D5-C46CC3DF96A6}"/>
+                <a16:creationId xmlns="" xmlns:a16="http://schemas.microsoft.com/office/drawing/2014/main" id="{A89EFD06-C5A8-AF9C-B7D5-C46CC3DF96A6}"/>
               </a:ext>
             </a:extLst>
           </p:cNvPr>
@@ -4075,7 +4075,7 @@
           <p:cNvPr id="10" name="CaixaDeTexto 9">
             <a:extLst>
               <a:ext uri="{FF2B5EF4-FFF2-40B4-BE49-F238E27FC236}">
-                <a16:creationId xmlns:a16="http://schemas.microsoft.com/office/drawing/2014/main" xmlns="" id="{E4B1C0A7-24FE-A972-FCBF-5DFF6B633E84}"/>
+                <a16:creationId xmlns="" xmlns:a16="http://schemas.microsoft.com/office/drawing/2014/main" id="{E4B1C0A7-24FE-A972-FCBF-5DFF6B633E84}"/>
               </a:ext>
             </a:extLst>
           </p:cNvPr>
@@ -4084,7 +4084,7 @@
         </p:nvSpPr>
         <p:spPr>
           <a:xfrm>
-            <a:off x="4631089" y="1371087"/>
+            <a:off x="4542189" y="2691887"/>
             <a:ext cx="1170039" cy="400110"/>
           </a:xfrm>
           <a:prstGeom prst="rect">
@@ -4110,7 +4110,7 @@
           <p:cNvPr id="11" name="Elipse 10">
             <a:extLst>
               <a:ext uri="{FF2B5EF4-FFF2-40B4-BE49-F238E27FC236}">
-                <a16:creationId xmlns:a16="http://schemas.microsoft.com/office/drawing/2014/main" xmlns="" id="{E56BC292-0549-A640-2A8E-284F332BA8A4}"/>
+                <a16:creationId xmlns="" xmlns:a16="http://schemas.microsoft.com/office/drawing/2014/main" id="{E56BC292-0549-A640-2A8E-284F332BA8A4}"/>
               </a:ext>
             </a:extLst>
           </p:cNvPr>
@@ -4119,7 +4119,7 @@
         </p:nvSpPr>
         <p:spPr>
           <a:xfrm>
-            <a:off x="5606239" y="2297035"/>
+            <a:off x="5606239" y="3363835"/>
             <a:ext cx="235974" cy="221226"/>
           </a:xfrm>
           <a:prstGeom prst="ellipse">
@@ -4162,7 +4162,7 @@
           <p:cNvPr id="12" name="Elipse 11">
             <a:extLst>
               <a:ext uri="{FF2B5EF4-FFF2-40B4-BE49-F238E27FC236}">
-                <a16:creationId xmlns:a16="http://schemas.microsoft.com/office/drawing/2014/main" xmlns="" id="{9328618F-F992-DC0E-780E-324636798C34}"/>
+                <a16:creationId xmlns="" xmlns:a16="http://schemas.microsoft.com/office/drawing/2014/main" id="{9328618F-F992-DC0E-780E-324636798C34}"/>
               </a:ext>
             </a:extLst>
           </p:cNvPr>
@@ -4171,7 +4171,7 @@
         </p:nvSpPr>
         <p:spPr>
           <a:xfrm>
-            <a:off x="5618114" y="2836008"/>
+            <a:off x="5618114" y="3902808"/>
             <a:ext cx="235974" cy="221226"/>
           </a:xfrm>
           <a:prstGeom prst="ellipse">
@@ -4214,7 +4214,7 @@
           <p:cNvPr id="13" name="Elipse 12">
             <a:extLst>
               <a:ext uri="{FF2B5EF4-FFF2-40B4-BE49-F238E27FC236}">
-                <a16:creationId xmlns:a16="http://schemas.microsoft.com/office/drawing/2014/main" xmlns="" id="{DB48A5FC-58F4-3918-B31E-CB346F457BBE}"/>
+                <a16:creationId xmlns="" xmlns:a16="http://schemas.microsoft.com/office/drawing/2014/main" id="{DB48A5FC-58F4-3918-B31E-CB346F457BBE}"/>
               </a:ext>
             </a:extLst>
           </p:cNvPr>
@@ -4266,7 +4266,7 @@
           <p:cNvPr id="14" name="Elipse 13">
             <a:extLst>
               <a:ext uri="{FF2B5EF4-FFF2-40B4-BE49-F238E27FC236}">
-                <a16:creationId xmlns:a16="http://schemas.microsoft.com/office/drawing/2014/main" xmlns="" id="{94758299-F83C-41BE-544D-0388881D9FE9}"/>
+                <a16:creationId xmlns="" xmlns:a16="http://schemas.microsoft.com/office/drawing/2014/main" id="{94758299-F83C-41BE-544D-0388881D9FE9}"/>
               </a:ext>
             </a:extLst>
           </p:cNvPr>
@@ -4318,7 +4318,7 @@
           <p:cNvPr id="15" name="Elipse 14">
             <a:extLst>
               <a:ext uri="{FF2B5EF4-FFF2-40B4-BE49-F238E27FC236}">
-                <a16:creationId xmlns:a16="http://schemas.microsoft.com/office/drawing/2014/main" xmlns="" id="{3F6A92D2-C739-D4F7-8A9D-7C6FAECA572B}"/>
+                <a16:creationId xmlns="" xmlns:a16="http://schemas.microsoft.com/office/drawing/2014/main" id="{3F6A92D2-C739-D4F7-8A9D-7C6FAECA572B}"/>
               </a:ext>
             </a:extLst>
           </p:cNvPr>
@@ -4370,7 +4370,7 @@
           <p:cNvPr id="16" name="CaixaDeTexto 15">
             <a:extLst>
               <a:ext uri="{FF2B5EF4-FFF2-40B4-BE49-F238E27FC236}">
-                <a16:creationId xmlns:a16="http://schemas.microsoft.com/office/drawing/2014/main" xmlns="" id="{1F5E03BA-F7D4-DDCF-37E8-E3563F767D14}"/>
+                <a16:creationId xmlns="" xmlns:a16="http://schemas.microsoft.com/office/drawing/2014/main" id="{1F5E03BA-F7D4-DDCF-37E8-E3563F767D14}"/>
               </a:ext>
             </a:extLst>
           </p:cNvPr>
@@ -4406,7 +4406,7 @@
           <p:cNvPr id="17" name="CaixaDeTexto 16">
             <a:extLst>
               <a:ext uri="{FF2B5EF4-FFF2-40B4-BE49-F238E27FC236}">
-                <a16:creationId xmlns:a16="http://schemas.microsoft.com/office/drawing/2014/main" xmlns="" id="{C52FAFB3-AADD-D94F-BE01-17BE82079EAA}"/>
+                <a16:creationId xmlns="" xmlns:a16="http://schemas.microsoft.com/office/drawing/2014/main" id="{C52FAFB3-AADD-D94F-BE01-17BE82079EAA}"/>
               </a:ext>
             </a:extLst>
           </p:cNvPr>
@@ -4475,7 +4475,7 @@
           <p:cNvPr id="18" name="CaixaDeTexto 17">
             <a:extLst>
               <a:ext uri="{FF2B5EF4-FFF2-40B4-BE49-F238E27FC236}">
-                <a16:creationId xmlns:a16="http://schemas.microsoft.com/office/drawing/2014/main" xmlns="" id="{342AD33B-5506-D380-AC01-792F4E7B5E81}"/>
+                <a16:creationId xmlns="" xmlns:a16="http://schemas.microsoft.com/office/drawing/2014/main" id="{342AD33B-5506-D380-AC01-792F4E7B5E81}"/>
               </a:ext>
             </a:extLst>
           </p:cNvPr>
@@ -4484,7 +4484,7 @@
         </p:nvSpPr>
         <p:spPr>
           <a:xfrm>
-            <a:off x="5142944" y="2214293"/>
+            <a:off x="5142944" y="3281093"/>
             <a:ext cx="439544" cy="400110"/>
           </a:xfrm>
           <a:prstGeom prst="rect">
@@ -4510,7 +4510,7 @@
           <p:cNvPr id="19" name="CaixaDeTexto 18">
             <a:extLst>
               <a:ext uri="{FF2B5EF4-FFF2-40B4-BE49-F238E27FC236}">
-                <a16:creationId xmlns:a16="http://schemas.microsoft.com/office/drawing/2014/main" xmlns="" id="{ABB31AC0-1AA9-0D1F-621F-32C569023A82}"/>
+                <a16:creationId xmlns="" xmlns:a16="http://schemas.microsoft.com/office/drawing/2014/main" id="{ABB31AC0-1AA9-0D1F-621F-32C569023A82}"/>
               </a:ext>
             </a:extLst>
           </p:cNvPr>
@@ -4519,7 +4519,7 @@
         </p:nvSpPr>
         <p:spPr>
           <a:xfrm>
-            <a:off x="5097133" y="2720895"/>
+            <a:off x="5097133" y="3787695"/>
             <a:ext cx="575799" cy="400110"/>
           </a:xfrm>
           <a:prstGeom prst="rect">
@@ -4545,7 +4545,7 @@
           <p:cNvPr id="20" name="Seta: para a Direita 19">
             <a:extLst>
               <a:ext uri="{FF2B5EF4-FFF2-40B4-BE49-F238E27FC236}">
-                <a16:creationId xmlns:a16="http://schemas.microsoft.com/office/drawing/2014/main" xmlns="" id="{A6C8175D-DA74-98A7-2FF7-2AADD28711FE}"/>
+                <a16:creationId xmlns="" xmlns:a16="http://schemas.microsoft.com/office/drawing/2014/main" id="{A6C8175D-DA74-98A7-2FF7-2AADD28711FE}"/>
               </a:ext>
             </a:extLst>
           </p:cNvPr>
@@ -4593,7 +4593,7 @@
           <p:cNvPr id="21" name="Seta: para a Direita 20">
             <a:extLst>
               <a:ext uri="{FF2B5EF4-FFF2-40B4-BE49-F238E27FC236}">
-                <a16:creationId xmlns:a16="http://schemas.microsoft.com/office/drawing/2014/main" xmlns="" id="{ACEFE10B-F9A6-370E-3AA8-81ED9EA0FE65}"/>
+                <a16:creationId xmlns="" xmlns:a16="http://schemas.microsoft.com/office/drawing/2014/main" id="{ACEFE10B-F9A6-370E-3AA8-81ED9EA0FE65}"/>
               </a:ext>
             </a:extLst>
           </p:cNvPr>
@@ -4641,7 +4641,7 @@
           <p:cNvPr id="23" name="CaixaDeTexto 22">
             <a:extLst>
               <a:ext uri="{FF2B5EF4-FFF2-40B4-BE49-F238E27FC236}">
-                <a16:creationId xmlns:a16="http://schemas.microsoft.com/office/drawing/2014/main" xmlns="" id="{607014D1-3D91-BD30-B3AE-D099C95002AE}"/>
+                <a16:creationId xmlns="" xmlns:a16="http://schemas.microsoft.com/office/drawing/2014/main" id="{607014D1-3D91-BD30-B3AE-D099C95002AE}"/>
               </a:ext>
             </a:extLst>
           </p:cNvPr>
@@ -4692,7 +4692,7 @@
           <p:cNvPr id="24" name="Seta: da Esquerda para a Direita 23">
             <a:extLst>
               <a:ext uri="{FF2B5EF4-FFF2-40B4-BE49-F238E27FC236}">
-                <a16:creationId xmlns:a16="http://schemas.microsoft.com/office/drawing/2014/main" xmlns="" id="{D623AB96-0004-9789-2392-077F923A52D5}"/>
+                <a16:creationId xmlns="" xmlns:a16="http://schemas.microsoft.com/office/drawing/2014/main" id="{D623AB96-0004-9789-2392-077F923A52D5}"/>
               </a:ext>
             </a:extLst>
           </p:cNvPr>
@@ -4740,7 +4740,7 @@
           <p:cNvPr id="25" name="CaixaDeTexto 24">
             <a:extLst>
               <a:ext uri="{FF2B5EF4-FFF2-40B4-BE49-F238E27FC236}">
-                <a16:creationId xmlns:a16="http://schemas.microsoft.com/office/drawing/2014/main" xmlns="" id="{D5AF4867-FAB2-B8D2-F591-F5C3016709F0}"/>
+                <a16:creationId xmlns="" xmlns:a16="http://schemas.microsoft.com/office/drawing/2014/main" id="{D5AF4867-FAB2-B8D2-F591-F5C3016709F0}"/>
               </a:ext>
             </a:extLst>
           </p:cNvPr>
@@ -4775,7 +4775,7 @@
           <p:cNvPr id="26" name="Elipse 25">
             <a:extLst>
               <a:ext uri="{FF2B5EF4-FFF2-40B4-BE49-F238E27FC236}">
-                <a16:creationId xmlns:a16="http://schemas.microsoft.com/office/drawing/2014/main" xmlns="" id="{0FCBA766-4A3C-29E6-977C-8162A3074AAD}"/>
+                <a16:creationId xmlns="" xmlns:a16="http://schemas.microsoft.com/office/drawing/2014/main" id="{0FCBA766-4A3C-29E6-977C-8162A3074AAD}"/>
               </a:ext>
             </a:extLst>
           </p:cNvPr>
@@ -4827,7 +4827,7 @@
           <p:cNvPr id="27" name="Elipse 26">
             <a:extLst>
               <a:ext uri="{FF2B5EF4-FFF2-40B4-BE49-F238E27FC236}">
-                <a16:creationId xmlns:a16="http://schemas.microsoft.com/office/drawing/2014/main" xmlns="" id="{075457F7-7103-90B2-4503-55D46B1578B3}"/>
+                <a16:creationId xmlns="" xmlns:a16="http://schemas.microsoft.com/office/drawing/2014/main" id="{075457F7-7103-90B2-4503-55D46B1578B3}"/>
               </a:ext>
             </a:extLst>
           </p:cNvPr>
@@ -4879,7 +4879,7 @@
           <p:cNvPr id="28" name="Elipse 27">
             <a:extLst>
               <a:ext uri="{FF2B5EF4-FFF2-40B4-BE49-F238E27FC236}">
-                <a16:creationId xmlns:a16="http://schemas.microsoft.com/office/drawing/2014/main" xmlns="" id="{BBE680FF-CA0B-C3AB-2E37-04B33505E5A3}"/>
+                <a16:creationId xmlns="" xmlns:a16="http://schemas.microsoft.com/office/drawing/2014/main" id="{BBE680FF-CA0B-C3AB-2E37-04B33505E5A3}"/>
               </a:ext>
             </a:extLst>
           </p:cNvPr>
@@ -4931,7 +4931,7 @@
           <p:cNvPr id="29" name="Elipse 28">
             <a:extLst>
               <a:ext uri="{FF2B5EF4-FFF2-40B4-BE49-F238E27FC236}">
-                <a16:creationId xmlns:a16="http://schemas.microsoft.com/office/drawing/2014/main" xmlns="" id="{E51FD0E9-ECBB-0C63-5C53-00357AAAF1D9}"/>
+                <a16:creationId xmlns="" xmlns:a16="http://schemas.microsoft.com/office/drawing/2014/main" id="{E51FD0E9-ECBB-0C63-5C53-00357AAAF1D9}"/>
               </a:ext>
             </a:extLst>
           </p:cNvPr>
@@ -4983,7 +4983,7 @@
           <p:cNvPr id="30" name="CaixaDeTexto 29">
             <a:extLst>
               <a:ext uri="{FF2B5EF4-FFF2-40B4-BE49-F238E27FC236}">
-                <a16:creationId xmlns:a16="http://schemas.microsoft.com/office/drawing/2014/main" xmlns="" id="{2ECDC66F-11B9-F343-1ACF-A7E24A25055D}"/>
+                <a16:creationId xmlns="" xmlns:a16="http://schemas.microsoft.com/office/drawing/2014/main" id="{2ECDC66F-11B9-F343-1ACF-A7E24A25055D}"/>
               </a:ext>
             </a:extLst>
           </p:cNvPr>
@@ -5018,7 +5018,7 @@
           <p:cNvPr id="31" name="CaixaDeTexto 30">
             <a:extLst>
               <a:ext uri="{FF2B5EF4-FFF2-40B4-BE49-F238E27FC236}">
-                <a16:creationId xmlns:a16="http://schemas.microsoft.com/office/drawing/2014/main" xmlns="" id="{0A640CA7-9F72-26B5-04B2-1AE12EC251C3}"/>
+                <a16:creationId xmlns="" xmlns:a16="http://schemas.microsoft.com/office/drawing/2014/main" id="{0A640CA7-9F72-26B5-04B2-1AE12EC251C3}"/>
               </a:ext>
             </a:extLst>
           </p:cNvPr>
@@ -5053,7 +5053,7 @@
           <p:cNvPr id="32" name="CaixaDeTexto 31">
             <a:extLst>
               <a:ext uri="{FF2B5EF4-FFF2-40B4-BE49-F238E27FC236}">
-                <a16:creationId xmlns:a16="http://schemas.microsoft.com/office/drawing/2014/main" xmlns="" id="{CFD29719-2B6A-0E35-77B3-5E21E6CA7E40}"/>
+                <a16:creationId xmlns="" xmlns:a16="http://schemas.microsoft.com/office/drawing/2014/main" id="{CFD29719-2B6A-0E35-77B3-5E21E6CA7E40}"/>
               </a:ext>
             </a:extLst>
           </p:cNvPr>
@@ -5088,7 +5088,7 @@
           <p:cNvPr id="33" name="CaixaDeTexto 32">
             <a:extLst>
               <a:ext uri="{FF2B5EF4-FFF2-40B4-BE49-F238E27FC236}">
-                <a16:creationId xmlns:a16="http://schemas.microsoft.com/office/drawing/2014/main" xmlns="" id="{027E1D0C-6BEC-4387-0A91-E0CA7E1C0FAD}"/>
+                <a16:creationId xmlns="" xmlns:a16="http://schemas.microsoft.com/office/drawing/2014/main" id="{027E1D0C-6BEC-4387-0A91-E0CA7E1C0FAD}"/>
               </a:ext>
             </a:extLst>
           </p:cNvPr>
@@ -5123,7 +5123,7 @@
           <p:cNvPr id="42" name="Elipse 41">
             <a:extLst>
               <a:ext uri="{FF2B5EF4-FFF2-40B4-BE49-F238E27FC236}">
-                <a16:creationId xmlns:a16="http://schemas.microsoft.com/office/drawing/2014/main" xmlns="" id="{DDF816FE-F327-4BED-ABAB-0ADD644C6680}"/>
+                <a16:creationId xmlns="" xmlns:a16="http://schemas.microsoft.com/office/drawing/2014/main" id="{DDF816FE-F327-4BED-ABAB-0ADD644C6680}"/>
               </a:ext>
             </a:extLst>
           </p:cNvPr>
@@ -5175,7 +5175,7 @@
           <p:cNvPr id="43" name="Elipse 42">
             <a:extLst>
               <a:ext uri="{FF2B5EF4-FFF2-40B4-BE49-F238E27FC236}">
-                <a16:creationId xmlns:a16="http://schemas.microsoft.com/office/drawing/2014/main" xmlns="" id="{54687A0B-0E56-E09E-6AFB-A237D19B4687}"/>
+                <a16:creationId xmlns="" xmlns:a16="http://schemas.microsoft.com/office/drawing/2014/main" id="{54687A0B-0E56-E09E-6AFB-A237D19B4687}"/>
               </a:ext>
             </a:extLst>
           </p:cNvPr>
@@ -5227,7 +5227,7 @@
           <p:cNvPr id="46" name="CaixaDeTexto 45">
             <a:extLst>
               <a:ext uri="{FF2B5EF4-FFF2-40B4-BE49-F238E27FC236}">
-                <a16:creationId xmlns:a16="http://schemas.microsoft.com/office/drawing/2014/main" xmlns="" id="{E58ABD62-728D-400C-7F8F-16407E1BDEFE}"/>
+                <a16:creationId xmlns="" xmlns:a16="http://schemas.microsoft.com/office/drawing/2014/main" id="{E58ABD62-728D-400C-7F8F-16407E1BDEFE}"/>
               </a:ext>
             </a:extLst>
           </p:cNvPr>
@@ -5262,7 +5262,7 @@
           <p:cNvPr id="47" name="CaixaDeTexto 46">
             <a:extLst>
               <a:ext uri="{FF2B5EF4-FFF2-40B4-BE49-F238E27FC236}">
-                <a16:creationId xmlns:a16="http://schemas.microsoft.com/office/drawing/2014/main" xmlns="" id="{36C2A0E8-C9BC-6B87-52D8-8780B2203D03}"/>
+                <a16:creationId xmlns="" xmlns:a16="http://schemas.microsoft.com/office/drawing/2014/main" id="{36C2A0E8-C9BC-6B87-52D8-8780B2203D03}"/>
               </a:ext>
             </a:extLst>
           </p:cNvPr>
@@ -5297,7 +5297,7 @@
           <p:cNvPr id="60" name="CaixaDeTexto 59">
             <a:extLst>
               <a:ext uri="{FF2B5EF4-FFF2-40B4-BE49-F238E27FC236}">
-                <a16:creationId xmlns:a16="http://schemas.microsoft.com/office/drawing/2014/main" xmlns="" id="{2D678683-9958-033E-DDB1-6B5951D6A1D1}"/>
+                <a16:creationId xmlns="" xmlns:a16="http://schemas.microsoft.com/office/drawing/2014/main" id="{2D678683-9958-033E-DDB1-6B5951D6A1D1}"/>
               </a:ext>
             </a:extLst>
           </p:cNvPr>
@@ -5306,8 +5306,8 @@
         </p:nvSpPr>
         <p:spPr>
           <a:xfrm>
-            <a:off x="7460347" y="2245710"/>
-            <a:ext cx="439544" cy="400110"/>
+            <a:off x="7396847" y="2233010"/>
+            <a:ext cx="397866" cy="369332"/>
           </a:xfrm>
           <a:prstGeom prst="rect">
             <a:avLst/>
@@ -5321,7 +5321,7 @@
           <a:lstStyle/>
           <a:p>
             <a:r>
-              <a:rPr lang="pt-BR" sz="2000" b="1" dirty="0"/>
+              <a:rPr lang="pt-BR" b="1" dirty="0"/>
               <a:t>0º</a:t>
             </a:r>
           </a:p>
@@ -5332,7 +5332,7 @@
           <p:cNvPr id="61" name="CaixaDeTexto 60">
             <a:extLst>
               <a:ext uri="{FF2B5EF4-FFF2-40B4-BE49-F238E27FC236}">
-                <a16:creationId xmlns:a16="http://schemas.microsoft.com/office/drawing/2014/main" xmlns="" id="{BDD3728C-B459-9E15-1403-477384A7810F}"/>
+                <a16:creationId xmlns="" xmlns:a16="http://schemas.microsoft.com/office/drawing/2014/main" id="{BDD3728C-B459-9E15-1403-477384A7810F}"/>
               </a:ext>
             </a:extLst>
           </p:cNvPr>
@@ -5342,7 +5342,7 @@
         <p:spPr>
           <a:xfrm>
             <a:off x="7420773" y="2705019"/>
-            <a:ext cx="575799" cy="400110"/>
+            <a:ext cx="526106" cy="369332"/>
           </a:xfrm>
           <a:prstGeom prst="rect">
             <a:avLst/>
@@ -5356,7 +5356,7 @@
           <a:lstStyle/>
           <a:p>
             <a:r>
-              <a:rPr lang="pt-BR" sz="2000" b="1" dirty="0"/>
+              <a:rPr lang="pt-BR" b="1" dirty="0"/>
               <a:t>90º</a:t>
             </a:r>
           </a:p>
@@ -5367,7 +5367,7 @@
           <p:cNvPr id="73" name="Conector reto 72">
             <a:extLst>
               <a:ext uri="{FF2B5EF4-FFF2-40B4-BE49-F238E27FC236}">
-                <a16:creationId xmlns:a16="http://schemas.microsoft.com/office/drawing/2014/main" xmlns="" id="{640AF185-58CA-FFA2-77DE-096A154FBB1B}"/>
+                <a16:creationId xmlns="" xmlns:a16="http://schemas.microsoft.com/office/drawing/2014/main" id="{640AF185-58CA-FFA2-77DE-096A154FBB1B}"/>
               </a:ext>
             </a:extLst>
           </p:cNvPr>
@@ -5376,7 +5376,7 @@
         </p:nvCxnSpPr>
         <p:spPr>
           <a:xfrm rot="16200000" flipH="1">
-            <a:off x="6260727" y="716269"/>
+            <a:off x="3238127" y="627369"/>
             <a:ext cx="419833" cy="316689"/>
           </a:xfrm>
           <a:prstGeom prst="line">
@@ -5408,7 +5408,7 @@
           <p:cNvPr id="79" name="Conector reto 78">
             <a:extLst>
               <a:ext uri="{FF2B5EF4-FFF2-40B4-BE49-F238E27FC236}">
-                <a16:creationId xmlns:a16="http://schemas.microsoft.com/office/drawing/2014/main" xmlns="" id="{A8E09D53-DF6A-4093-F7E8-B58B09DF94CA}"/>
+                <a16:creationId xmlns="" xmlns:a16="http://schemas.microsoft.com/office/drawing/2014/main" id="{A8E09D53-DF6A-4093-F7E8-B58B09DF94CA}"/>
               </a:ext>
             </a:extLst>
           </p:cNvPr>
@@ -5417,7 +5417,7 @@
         </p:nvCxnSpPr>
         <p:spPr>
           <a:xfrm>
-            <a:off x="6327866" y="663895"/>
+            <a:off x="3292566" y="574995"/>
             <a:ext cx="631723" cy="0"/>
           </a:xfrm>
           <a:prstGeom prst="line">
@@ -5449,7 +5449,7 @@
           <p:cNvPr id="94" name="CaixaDeTexto 93">
             <a:extLst>
               <a:ext uri="{FF2B5EF4-FFF2-40B4-BE49-F238E27FC236}">
-                <a16:creationId xmlns:a16="http://schemas.microsoft.com/office/drawing/2014/main" xmlns="" id="{47937699-4C9D-7A70-D0CE-DE69E92C68E7}"/>
+                <a16:creationId xmlns="" xmlns:a16="http://schemas.microsoft.com/office/drawing/2014/main" id="{47937699-4C9D-7A70-D0CE-DE69E92C68E7}"/>
               </a:ext>
             </a:extLst>
           </p:cNvPr>
@@ -5484,7 +5484,7 @@
           <p:cNvPr id="50" name="Conector reto 49">
             <a:extLst>
               <a:ext uri="{FF2B5EF4-FFF2-40B4-BE49-F238E27FC236}">
-                <a16:creationId xmlns:a16="http://schemas.microsoft.com/office/drawing/2014/main" xmlns="" id="{811D5894-47D2-9A9D-7580-F119056FAA8C}"/>
+                <a16:creationId xmlns="" xmlns:a16="http://schemas.microsoft.com/office/drawing/2014/main" id="{811D5894-47D2-9A9D-7580-F119056FAA8C}"/>
               </a:ext>
             </a:extLst>
           </p:cNvPr>
@@ -5495,7 +5495,7 @@
         </p:nvCxnSpPr>
         <p:spPr>
           <a:xfrm rot="5400000">
-            <a:off x="6562727" y="720726"/>
+            <a:off x="3552827" y="644526"/>
             <a:ext cx="450851" cy="292103"/>
           </a:xfrm>
           <a:prstGeom prst="line">
@@ -5527,7 +5527,7 @@
           <p:cNvPr id="59" name="CaixaDeTexto 58">
             <a:extLst>
               <a:ext uri="{FF2B5EF4-FFF2-40B4-BE49-F238E27FC236}">
-                <a16:creationId xmlns:a16="http://schemas.microsoft.com/office/drawing/2014/main" xmlns="" id="{651D24C1-5718-B609-6640-D055989DB7D8}"/>
+                <a16:creationId xmlns="" xmlns:a16="http://schemas.microsoft.com/office/drawing/2014/main" id="{651D24C1-5718-B609-6640-D055989DB7D8}"/>
               </a:ext>
             </a:extLst>
           </p:cNvPr>
@@ -5536,7 +5536,7 @@
         </p:nvSpPr>
         <p:spPr>
           <a:xfrm>
-            <a:off x="6335047" y="325356"/>
+            <a:off x="3274347" y="211056"/>
             <a:ext cx="633507" cy="369332"/>
           </a:xfrm>
           <a:prstGeom prst="rect">
@@ -5563,7 +5563,7 @@
           <p:cNvPr id="63" name="Retângulo 62">
             <a:extLst>
               <a:ext uri="{FF2B5EF4-FFF2-40B4-BE49-F238E27FC236}">
-                <a16:creationId xmlns:a16="http://schemas.microsoft.com/office/drawing/2014/main" xmlns="" id="{DDDFDD75-C103-76C1-F579-BA7299EDCC04}"/>
+                <a16:creationId xmlns="" xmlns:a16="http://schemas.microsoft.com/office/drawing/2014/main" id="{DDDFDD75-C103-76C1-F579-BA7299EDCC04}"/>
               </a:ext>
             </a:extLst>
           </p:cNvPr>
@@ -5572,7 +5572,7 @@
         </p:nvSpPr>
         <p:spPr>
           <a:xfrm>
-            <a:off x="1242550" y="2180534"/>
+            <a:off x="1229850" y="2180534"/>
             <a:ext cx="1348250" cy="1689408"/>
           </a:xfrm>
           <a:prstGeom prst="rect">
@@ -5615,7 +5615,7 @@
           <p:cNvPr id="64" name="CaixaDeTexto 63">
             <a:extLst>
               <a:ext uri="{FF2B5EF4-FFF2-40B4-BE49-F238E27FC236}">
-                <a16:creationId xmlns:a16="http://schemas.microsoft.com/office/drawing/2014/main" xmlns="" id="{F6CF7F29-2B13-8A49-E419-263DFFE14826}"/>
+                <a16:creationId xmlns="" xmlns:a16="http://schemas.microsoft.com/office/drawing/2014/main" id="{F6CF7F29-2B13-8A49-E419-263DFFE14826}"/>
               </a:ext>
             </a:extLst>
           </p:cNvPr>
@@ -5625,7 +5625,7 @@
         <p:spPr>
           <a:xfrm>
             <a:off x="7351840" y="1748528"/>
-            <a:ext cx="612668" cy="400110"/>
+            <a:ext cx="577402" cy="400110"/>
           </a:xfrm>
           <a:prstGeom prst="rect">
             <a:avLst/>
@@ -5639,8 +5639,12 @@
           <a:lstStyle/>
           <a:p>
             <a:r>
+              <a:rPr lang="pt-BR" b="1" dirty="0" err="1" smtClean="0"/>
+              <a:t>An</a:t>
+            </a:r>
+            <a:r>
               <a:rPr lang="pt-BR" sz="2000" b="1" dirty="0" err="1" smtClean="0"/>
-              <a:t>Ant</a:t>
+              <a:t>t</a:t>
             </a:r>
             <a:endParaRPr lang="pt-BR" sz="2000" b="1" dirty="0"/>
           </a:p>
@@ -5651,7 +5655,7 @@
           <p:cNvPr id="67" name="Imagem 66" descr="Ícone&#10;&#10;Descrição gerada automaticamente">
             <a:extLst>
               <a:ext uri="{FF2B5EF4-FFF2-40B4-BE49-F238E27FC236}">
-                <a16:creationId xmlns:a16="http://schemas.microsoft.com/office/drawing/2014/main" xmlns="" id="{25DC76B7-0ACA-4371-9074-CD45E0763F72}"/>
+                <a16:creationId xmlns="" xmlns:a16="http://schemas.microsoft.com/office/drawing/2014/main" id="{25DC76B7-0ACA-4371-9074-CD45E0763F72}"/>
               </a:ext>
             </a:extLst>
           </p:cNvPr>
@@ -5664,7 +5668,7 @@
           <a:blip r:embed="rId3">
             <a:extLst>
               <a:ext uri="{28A0092B-C50C-407E-A947-70E740481C1C}">
-                <a14:useLocalDpi xmlns:a14="http://schemas.microsoft.com/office/drawing/2010/main" xmlns="" val="0"/>
+                <a14:useLocalDpi xmlns="" xmlns:a14="http://schemas.microsoft.com/office/drawing/2010/main" val="0"/>
               </a:ext>
             </a:extLst>
           </a:blip>
@@ -5687,7 +5691,7 @@
           <p:cNvPr id="69" name="Imagem 68" descr="Forma&#10;&#10;Descrição gerada automaticamente com confiança baixa">
             <a:extLst>
               <a:ext uri="{FF2B5EF4-FFF2-40B4-BE49-F238E27FC236}">
-                <a16:creationId xmlns:a16="http://schemas.microsoft.com/office/drawing/2014/main" xmlns="" id="{5CA770ED-F297-349B-059C-E1E85AFD25BC}"/>
+                <a16:creationId xmlns="" xmlns:a16="http://schemas.microsoft.com/office/drawing/2014/main" id="{5CA770ED-F297-349B-059C-E1E85AFD25BC}"/>
               </a:ext>
             </a:extLst>
           </p:cNvPr>
@@ -5700,7 +5704,7 @@
           <a:blip r:embed="rId4" cstate="print">
             <a:extLst>
               <a:ext uri="{28A0092B-C50C-407E-A947-70E740481C1C}">
-                <a14:useLocalDpi xmlns:a14="http://schemas.microsoft.com/office/drawing/2010/main" xmlns="" val="0"/>
+                <a14:useLocalDpi xmlns="" xmlns:a14="http://schemas.microsoft.com/office/drawing/2010/main" val="0"/>
               </a:ext>
             </a:extLst>
           </a:blip>
@@ -5723,7 +5727,7 @@
           <p:cNvPr id="70" name="Retângulo 69">
             <a:extLst>
               <a:ext uri="{FF2B5EF4-FFF2-40B4-BE49-F238E27FC236}">
-                <a16:creationId xmlns:a16="http://schemas.microsoft.com/office/drawing/2014/main" xmlns="" id="{4CAC67C5-43C3-E969-2F17-754F163BF215}"/>
+                <a16:creationId xmlns="" xmlns:a16="http://schemas.microsoft.com/office/drawing/2014/main" id="{4CAC67C5-43C3-E969-2F17-754F163BF215}"/>
               </a:ext>
             </a:extLst>
           </p:cNvPr>
@@ -5775,7 +5779,7 @@
           <p:cNvPr id="72" name="CaixaDeTexto 71">
             <a:extLst>
               <a:ext uri="{FF2B5EF4-FFF2-40B4-BE49-F238E27FC236}">
-                <a16:creationId xmlns:a16="http://schemas.microsoft.com/office/drawing/2014/main" xmlns="" id="{332C26F0-DB31-9CB7-D7E0-D81BB1A3495B}"/>
+                <a16:creationId xmlns="" xmlns:a16="http://schemas.microsoft.com/office/drawing/2014/main" id="{332C26F0-DB31-9CB7-D7E0-D81BB1A3495B}"/>
               </a:ext>
             </a:extLst>
           </p:cNvPr>
@@ -5825,7 +5829,7 @@
           <p:cNvPr id="74" name="Seta: para a Direita 73">
             <a:extLst>
               <a:ext uri="{FF2B5EF4-FFF2-40B4-BE49-F238E27FC236}">
-                <a16:creationId xmlns:a16="http://schemas.microsoft.com/office/drawing/2014/main" xmlns="" id="{9A1E5A66-1525-426A-923B-BA5D1DD809CE}"/>
+                <a16:creationId xmlns="" xmlns:a16="http://schemas.microsoft.com/office/drawing/2014/main" id="{9A1E5A66-1525-426A-923B-BA5D1DD809CE}"/>
               </a:ext>
             </a:extLst>
           </p:cNvPr>
@@ -5873,7 +5877,7 @@
           <p:cNvPr id="76" name="Seta: para a Direita 75">
             <a:extLst>
               <a:ext uri="{FF2B5EF4-FFF2-40B4-BE49-F238E27FC236}">
-                <a16:creationId xmlns:a16="http://schemas.microsoft.com/office/drawing/2014/main" xmlns="" id="{FE6433E0-0E00-37C4-D651-BC01E2122CE4}"/>
+                <a16:creationId xmlns="" xmlns:a16="http://schemas.microsoft.com/office/drawing/2014/main" id="{FE6433E0-0E00-37C4-D651-BC01E2122CE4}"/>
               </a:ext>
             </a:extLst>
           </p:cNvPr>
@@ -5921,7 +5925,7 @@
           <p:cNvPr id="86" name="Retângulo 85">
             <a:extLst>
               <a:ext uri="{FF2B5EF4-FFF2-40B4-BE49-F238E27FC236}">
-                <a16:creationId xmlns:a16="http://schemas.microsoft.com/office/drawing/2014/main" xmlns="" id="{A19DDC4F-9EDA-0B92-7BC8-FABE106E482D}"/>
+                <a16:creationId xmlns="" xmlns:a16="http://schemas.microsoft.com/office/drawing/2014/main" id="{A19DDC4F-9EDA-0B92-7BC8-FABE106E482D}"/>
               </a:ext>
             </a:extLst>
           </p:cNvPr>
@@ -5971,7 +5975,7 @@
           <p:cNvPr id="87" name="Seta: da Esquerda para a Direita 86">
             <a:extLst>
               <a:ext uri="{FF2B5EF4-FFF2-40B4-BE49-F238E27FC236}">
-                <a16:creationId xmlns:a16="http://schemas.microsoft.com/office/drawing/2014/main" xmlns="" id="{B820F3DF-EDBE-3779-8D09-D9CEF9473068}"/>
+                <a16:creationId xmlns="" xmlns:a16="http://schemas.microsoft.com/office/drawing/2014/main" id="{B820F3DF-EDBE-3779-8D09-D9CEF9473068}"/>
               </a:ext>
             </a:extLst>
           </p:cNvPr>
@@ -6019,7 +6023,7 @@
           <p:cNvPr id="88" name="Seta: de Cima para Baixo 87">
             <a:extLst>
               <a:ext uri="{FF2B5EF4-FFF2-40B4-BE49-F238E27FC236}">
-                <a16:creationId xmlns:a16="http://schemas.microsoft.com/office/drawing/2014/main" xmlns="" id="{D467B800-D0B6-44B5-CD3B-BAE0275619A7}"/>
+                <a16:creationId xmlns="" xmlns:a16="http://schemas.microsoft.com/office/drawing/2014/main" id="{D467B800-D0B6-44B5-CD3B-BAE0275619A7}"/>
               </a:ext>
             </a:extLst>
           </p:cNvPr>
@@ -6071,7 +6075,7 @@
           <p:cNvPr id="89" name="CaixaDeTexto 88">
             <a:extLst>
               <a:ext uri="{FF2B5EF4-FFF2-40B4-BE49-F238E27FC236}">
-                <a16:creationId xmlns:a16="http://schemas.microsoft.com/office/drawing/2014/main" xmlns="" id="{96785FFE-D475-3FFD-6F34-8D4544CC49A5}"/>
+                <a16:creationId xmlns="" xmlns:a16="http://schemas.microsoft.com/office/drawing/2014/main" id="{96785FFE-D475-3FFD-6F34-8D4544CC49A5}"/>
               </a:ext>
             </a:extLst>
           </p:cNvPr>
@@ -6080,7 +6084,7 @@
         </p:nvSpPr>
         <p:spPr>
           <a:xfrm>
-            <a:off x="4345968" y="2488261"/>
+            <a:off x="4384068" y="3656661"/>
             <a:ext cx="633507" cy="369332"/>
           </a:xfrm>
           <a:prstGeom prst="rect">
@@ -6095,9 +6099,10 @@
           <a:lstStyle/>
           <a:p>
             <a:r>
-              <a:rPr lang="pt-BR" b="1" dirty="0"/>
+              <a:rPr lang="pt-BR" b="1" dirty="0" smtClean="0"/>
               <a:t>CTL</a:t>
             </a:r>
+            <a:endParaRPr lang="pt-BR" b="1" dirty="0"/>
           </a:p>
         </p:txBody>
       </p:sp>
@@ -6106,7 +6111,7 @@
           <p:cNvPr id="90" name="Elipse 89">
             <a:extLst>
               <a:ext uri="{FF2B5EF4-FFF2-40B4-BE49-F238E27FC236}">
-                <a16:creationId xmlns:a16="http://schemas.microsoft.com/office/drawing/2014/main" xmlns="" id="{B1B5B6AB-BD70-BD39-40E8-820E9D044425}"/>
+                <a16:creationId xmlns="" xmlns:a16="http://schemas.microsoft.com/office/drawing/2014/main" id="{B1B5B6AB-BD70-BD39-40E8-820E9D044425}"/>
               </a:ext>
             </a:extLst>
           </p:cNvPr>
@@ -6115,7 +6120,7 @@
         </p:nvSpPr>
         <p:spPr>
           <a:xfrm>
-            <a:off x="4152405" y="2596984"/>
+            <a:off x="4152405" y="3752684"/>
             <a:ext cx="235974" cy="221226"/>
           </a:xfrm>
           <a:prstGeom prst="ellipse">
@@ -6158,7 +6163,7 @@
           <p:cNvPr id="53" name="CaixaDeTexto 52">
             <a:extLst>
               <a:ext uri="{FF2B5EF4-FFF2-40B4-BE49-F238E27FC236}">
-                <a16:creationId xmlns:a16="http://schemas.microsoft.com/office/drawing/2014/main" xmlns="" id="{98E70995-2C2F-6839-1F9F-A4EE30C9C79B}"/>
+                <a16:creationId xmlns="" xmlns:a16="http://schemas.microsoft.com/office/drawing/2014/main" id="{98E70995-2C2F-6839-1F9F-A4EE30C9C79B}"/>
               </a:ext>
             </a:extLst>
           </p:cNvPr>
@@ -6167,7 +6172,7 @@
         </p:nvSpPr>
         <p:spPr>
           <a:xfrm>
-            <a:off x="4910864" y="3196815"/>
+            <a:off x="4910864" y="4263615"/>
             <a:ext cx="620683" cy="369332"/>
           </a:xfrm>
           <a:prstGeom prst="rect">
@@ -6193,7 +6198,7 @@
           <p:cNvPr id="82" name="Elipse 81">
             <a:extLst>
               <a:ext uri="{FF2B5EF4-FFF2-40B4-BE49-F238E27FC236}">
-                <a16:creationId xmlns:a16="http://schemas.microsoft.com/office/drawing/2014/main" xmlns="" id="{9328618F-F992-DC0E-780E-324636798C34}"/>
+                <a16:creationId xmlns="" xmlns:a16="http://schemas.microsoft.com/office/drawing/2014/main" id="{9328618F-F992-DC0E-780E-324636798C34}"/>
               </a:ext>
             </a:extLst>
           </p:cNvPr>
@@ -6202,7 +6207,7 @@
         </p:nvSpPr>
         <p:spPr>
           <a:xfrm>
-            <a:off x="5608383" y="3261543"/>
+            <a:off x="5608383" y="4328343"/>
             <a:ext cx="235974" cy="221226"/>
           </a:xfrm>
           <a:prstGeom prst="ellipse">
@@ -6245,7 +6250,7 @@
           <p:cNvPr id="84" name="Retângulo 83">
             <a:extLst>
               <a:ext uri="{FF2B5EF4-FFF2-40B4-BE49-F238E27FC236}">
-                <a16:creationId xmlns:a16="http://schemas.microsoft.com/office/drawing/2014/main" xmlns="" id="{FC554D95-20FE-3CCC-F407-D31669DC48A9}"/>
+                <a16:creationId xmlns="" xmlns:a16="http://schemas.microsoft.com/office/drawing/2014/main" id="{FC554D95-20FE-3CCC-F407-D31669DC48A9}"/>
               </a:ext>
             </a:extLst>
           </p:cNvPr>
@@ -6297,7 +6302,7 @@
           <p:cNvPr id="99" name="Seta: para a Direita 20">
             <a:extLst>
               <a:ext uri="{FF2B5EF4-FFF2-40B4-BE49-F238E27FC236}">
-                <a16:creationId xmlns:a16="http://schemas.microsoft.com/office/drawing/2014/main" xmlns="" id="{ACEFE10B-F9A6-370E-3AA8-81ED9EA0FE65}"/>
+                <a16:creationId xmlns="" xmlns:a16="http://schemas.microsoft.com/office/drawing/2014/main" id="{ACEFE10B-F9A6-370E-3AA8-81ED9EA0FE65}"/>
               </a:ext>
             </a:extLst>
           </p:cNvPr>
@@ -6345,7 +6350,7 @@
           <p:cNvPr id="100" name="Seta: para a Direita 20">
             <a:extLst>
               <a:ext uri="{FF2B5EF4-FFF2-40B4-BE49-F238E27FC236}">
-                <a16:creationId xmlns:a16="http://schemas.microsoft.com/office/drawing/2014/main" xmlns="" id="{ACEFE10B-F9A6-370E-3AA8-81ED9EA0FE65}"/>
+                <a16:creationId xmlns="" xmlns:a16="http://schemas.microsoft.com/office/drawing/2014/main" id="{ACEFE10B-F9A6-370E-3AA8-81ED9EA0FE65}"/>
               </a:ext>
             </a:extLst>
           </p:cNvPr>
@@ -6393,7 +6398,7 @@
           <p:cNvPr id="101" name="Retângulo 100">
             <a:extLst>
               <a:ext uri="{FF2B5EF4-FFF2-40B4-BE49-F238E27FC236}">
-                <a16:creationId xmlns:a16="http://schemas.microsoft.com/office/drawing/2014/main" xmlns="" id="{FC554D95-20FE-3CCC-F407-D31669DC48A9}"/>
+                <a16:creationId xmlns="" xmlns:a16="http://schemas.microsoft.com/office/drawing/2014/main" id="{FC554D95-20FE-3CCC-F407-D31669DC48A9}"/>
               </a:ext>
             </a:extLst>
           </p:cNvPr>
@@ -6475,7 +6480,7 @@
           <p:cNvPr id="104" name="Elipse 103">
             <a:extLst>
               <a:ext uri="{FF2B5EF4-FFF2-40B4-BE49-F238E27FC236}">
-                <a16:creationId xmlns:a16="http://schemas.microsoft.com/office/drawing/2014/main" xmlns="" id="{3F6A92D2-C739-D4F7-8A9D-7C6FAECA572B}"/>
+                <a16:creationId xmlns="" xmlns:a16="http://schemas.microsoft.com/office/drawing/2014/main" id="{3F6A92D2-C739-D4F7-8A9D-7C6FAECA572B}"/>
               </a:ext>
             </a:extLst>
           </p:cNvPr>
@@ -6557,7 +6562,7 @@
           <p:cNvPr id="106" name="Elipse 105">
             <a:extLst>
               <a:ext uri="{FF2B5EF4-FFF2-40B4-BE49-F238E27FC236}">
-                <a16:creationId xmlns:a16="http://schemas.microsoft.com/office/drawing/2014/main" xmlns="" id="{BBE680FF-CA0B-C3AB-2E37-04B33505E5A3}"/>
+                <a16:creationId xmlns="" xmlns:a16="http://schemas.microsoft.com/office/drawing/2014/main" id="{BBE680FF-CA0B-C3AB-2E37-04B33505E5A3}"/>
               </a:ext>
             </a:extLst>
           </p:cNvPr>
@@ -6609,7 +6614,7 @@
           <p:cNvPr id="107" name="Elipse 106">
             <a:extLst>
               <a:ext uri="{FF2B5EF4-FFF2-40B4-BE49-F238E27FC236}">
-                <a16:creationId xmlns:a16="http://schemas.microsoft.com/office/drawing/2014/main" xmlns="" id="{DB48A5FC-58F4-3918-B31E-CB346F457BBE}"/>
+                <a16:creationId xmlns="" xmlns:a16="http://schemas.microsoft.com/office/drawing/2014/main" id="{DB48A5FC-58F4-3918-B31E-CB346F457BBE}"/>
               </a:ext>
             </a:extLst>
           </p:cNvPr>
@@ -6661,7 +6666,7 @@
           <p:cNvPr id="108" name="Elipse 107">
             <a:extLst>
               <a:ext uri="{FF2B5EF4-FFF2-40B4-BE49-F238E27FC236}">
-                <a16:creationId xmlns:a16="http://schemas.microsoft.com/office/drawing/2014/main" xmlns="" id="{94758299-F83C-41BE-544D-0388881D9FE9}"/>
+                <a16:creationId xmlns="" xmlns:a16="http://schemas.microsoft.com/office/drawing/2014/main" id="{94758299-F83C-41BE-544D-0388881D9FE9}"/>
               </a:ext>
             </a:extLst>
           </p:cNvPr>
@@ -6713,7 +6718,7 @@
           <p:cNvPr id="109" name="Seta: para a Direita 20">
             <a:extLst>
               <a:ext uri="{FF2B5EF4-FFF2-40B4-BE49-F238E27FC236}">
-                <a16:creationId xmlns:a16="http://schemas.microsoft.com/office/drawing/2014/main" xmlns="" id="{ACEFE10B-F9A6-370E-3AA8-81ED9EA0FE65}"/>
+                <a16:creationId xmlns="" xmlns:a16="http://schemas.microsoft.com/office/drawing/2014/main" id="{ACEFE10B-F9A6-370E-3AA8-81ED9EA0FE65}"/>
               </a:ext>
             </a:extLst>
           </p:cNvPr>
@@ -6761,7 +6766,7 @@
           <p:cNvPr id="110" name="Elipse 109">
             <a:extLst>
               <a:ext uri="{FF2B5EF4-FFF2-40B4-BE49-F238E27FC236}">
-                <a16:creationId xmlns:a16="http://schemas.microsoft.com/office/drawing/2014/main" xmlns="" id="{BBE680FF-CA0B-C3AB-2E37-04B33505E5A3}"/>
+                <a16:creationId xmlns="" xmlns:a16="http://schemas.microsoft.com/office/drawing/2014/main" id="{BBE680FF-CA0B-C3AB-2E37-04B33505E5A3}"/>
               </a:ext>
             </a:extLst>
           </p:cNvPr>
@@ -6813,7 +6818,7 @@
           <p:cNvPr id="111" name="Seta: para a Direita 20">
             <a:extLst>
               <a:ext uri="{FF2B5EF4-FFF2-40B4-BE49-F238E27FC236}">
-                <a16:creationId xmlns:a16="http://schemas.microsoft.com/office/drawing/2014/main" xmlns="" id="{ACEFE10B-F9A6-370E-3AA8-81ED9EA0FE65}"/>
+                <a16:creationId xmlns="" xmlns:a16="http://schemas.microsoft.com/office/drawing/2014/main" id="{ACEFE10B-F9A6-370E-3AA8-81ED9EA0FE65}"/>
               </a:ext>
             </a:extLst>
           </p:cNvPr>
@@ -6927,9 +6932,9 @@
           <p:nvPr/>
         </p:nvCxnSpPr>
         <p:spPr>
-          <a:xfrm rot="16200000" flipH="1">
-            <a:off x="5118100" y="2616200"/>
-            <a:ext cx="3060700" cy="12700"/>
+          <a:xfrm rot="5400000">
+            <a:off x="3238500" y="1384300"/>
+            <a:ext cx="787400" cy="1588"/>
           </a:xfrm>
           <a:prstGeom prst="line">
             <a:avLst/>
@@ -7003,6 +7008,630 @@
             <a:solidFill>
               <a:schemeClr val="tx1"/>
             </a:solidFill>
+          </a:ln>
+        </p:spPr>
+        <p:style>
+          <a:lnRef idx="2">
+            <a:schemeClr val="accent1"/>
+          </a:lnRef>
+          <a:fillRef idx="0">
+            <a:schemeClr val="accent1"/>
+          </a:fillRef>
+          <a:effectRef idx="1">
+            <a:schemeClr val="accent1"/>
+          </a:effectRef>
+          <a:fontRef idx="minor">
+            <a:schemeClr val="tx1"/>
+          </a:fontRef>
+        </p:style>
+      </p:cxnSp>
+      <p:sp>
+        <p:nvSpPr>
+          <p:cNvPr id="137" name="Retângulo 136"/>
+          <p:cNvSpPr/>
+          <p:nvPr/>
+        </p:nvSpPr>
+        <p:spPr>
+          <a:xfrm>
+            <a:off x="6362700" y="2260600"/>
+            <a:ext cx="63500" cy="3175000"/>
+          </a:xfrm>
+          <a:prstGeom prst="rect">
+            <a:avLst/>
+          </a:prstGeom>
+          <a:solidFill>
+            <a:schemeClr val="tx1"/>
+          </a:solidFill>
+          <a:ln w="25400"/>
+        </p:spPr>
+        <p:style>
+          <a:lnRef idx="2">
+            <a:schemeClr val="accent1">
+              <a:shade val="50000"/>
+            </a:schemeClr>
+          </a:lnRef>
+          <a:fillRef idx="1">
+            <a:schemeClr val="accent1"/>
+          </a:fillRef>
+          <a:effectRef idx="0">
+            <a:schemeClr val="accent1"/>
+          </a:effectRef>
+          <a:fontRef idx="minor">
+            <a:schemeClr val="lt1"/>
+          </a:fontRef>
+        </p:style>
+        <p:txBody>
+          <a:bodyPr rtlCol="0" anchor="ctr"/>
+          <a:lstStyle/>
+          <a:p>
+            <a:pPr algn="ctr"/>
+            <a:endParaRPr lang="pt-BR"/>
+          </a:p>
+        </p:txBody>
+      </p:sp>
+      <p:sp>
+        <p:nvSpPr>
+          <p:cNvPr id="140" name="Seta: para a Direita 20">
+            <a:extLst>
+              <a:ext uri="{FF2B5EF4-FFF2-40B4-BE49-F238E27FC236}">
+                <a16:creationId xmlns="" xmlns:a16="http://schemas.microsoft.com/office/drawing/2014/main" id="{ACEFE10B-F9A6-370E-3AA8-81ED9EA0FE65}"/>
+              </a:ext>
+            </a:extLst>
+          </p:cNvPr>
+          <p:cNvSpPr/>
+          <p:nvPr/>
+        </p:nvSpPr>
+        <p:spPr>
+          <a:xfrm>
+            <a:off x="6413500" y="5067300"/>
+            <a:ext cx="533400" cy="419100"/>
+          </a:xfrm>
+          <a:prstGeom prst="rightArrow">
+            <a:avLst/>
+          </a:prstGeom>
+          <a:noFill/>
+          <a:ln w="25400"/>
+        </p:spPr>
+        <p:style>
+          <a:lnRef idx="2">
+            <a:schemeClr val="accent1">
+              <a:shade val="15000"/>
+            </a:schemeClr>
+          </a:lnRef>
+          <a:fillRef idx="1">
+            <a:schemeClr val="accent1"/>
+          </a:fillRef>
+          <a:effectRef idx="0">
+            <a:schemeClr val="accent1"/>
+          </a:effectRef>
+          <a:fontRef idx="minor">
+            <a:schemeClr val="lt1"/>
+          </a:fontRef>
+        </p:style>
+        <p:txBody>
+          <a:bodyPr rtlCol="0" anchor="ctr"/>
+          <a:lstStyle/>
+          <a:p>
+            <a:pPr algn="ctr"/>
+            <a:endParaRPr lang="pt-BR"/>
+          </a:p>
+        </p:txBody>
+      </p:sp>
+      <p:sp>
+        <p:nvSpPr>
+          <p:cNvPr id="141" name="Seta: para a Direita 19">
+            <a:extLst>
+              <a:ext uri="{FF2B5EF4-FFF2-40B4-BE49-F238E27FC236}">
+                <a16:creationId xmlns="" xmlns:a16="http://schemas.microsoft.com/office/drawing/2014/main" id="{A6C8175D-DA74-98A7-2FF7-2AADD28711FE}"/>
+              </a:ext>
+            </a:extLst>
+          </p:cNvPr>
+          <p:cNvSpPr/>
+          <p:nvPr/>
+        </p:nvSpPr>
+        <p:spPr>
+          <a:xfrm>
+            <a:off x="5905500" y="3302000"/>
+            <a:ext cx="457200" cy="412062"/>
+          </a:xfrm>
+          <a:prstGeom prst="rightArrow">
+            <a:avLst/>
+          </a:prstGeom>
+          <a:noFill/>
+          <a:ln w="25400"/>
+        </p:spPr>
+        <p:style>
+          <a:lnRef idx="2">
+            <a:schemeClr val="accent1">
+              <a:shade val="15000"/>
+            </a:schemeClr>
+          </a:lnRef>
+          <a:fillRef idx="1">
+            <a:schemeClr val="accent1"/>
+          </a:fillRef>
+          <a:effectRef idx="0">
+            <a:schemeClr val="accent1"/>
+          </a:effectRef>
+          <a:fontRef idx="minor">
+            <a:schemeClr val="lt1"/>
+          </a:fontRef>
+        </p:style>
+        <p:txBody>
+          <a:bodyPr rtlCol="0" anchor="ctr"/>
+          <a:lstStyle/>
+          <a:p>
+            <a:pPr algn="ctr"/>
+            <a:endParaRPr lang="pt-BR"/>
+          </a:p>
+        </p:txBody>
+      </p:sp>
+      <p:sp>
+        <p:nvSpPr>
+          <p:cNvPr id="142" name="Seta: para a Direita 19">
+            <a:extLst>
+              <a:ext uri="{FF2B5EF4-FFF2-40B4-BE49-F238E27FC236}">
+                <a16:creationId xmlns="" xmlns:a16="http://schemas.microsoft.com/office/drawing/2014/main" id="{A6C8175D-DA74-98A7-2FF7-2AADD28711FE}"/>
+              </a:ext>
+            </a:extLst>
+          </p:cNvPr>
+          <p:cNvSpPr/>
+          <p:nvPr/>
+        </p:nvSpPr>
+        <p:spPr>
+          <a:xfrm>
+            <a:off x="5905500" y="3815208"/>
+            <a:ext cx="469900" cy="406854"/>
+          </a:xfrm>
+          <a:prstGeom prst="rightArrow">
+            <a:avLst/>
+          </a:prstGeom>
+          <a:noFill/>
+          <a:ln w="25400"/>
+        </p:spPr>
+        <p:style>
+          <a:lnRef idx="2">
+            <a:schemeClr val="accent1">
+              <a:shade val="15000"/>
+            </a:schemeClr>
+          </a:lnRef>
+          <a:fillRef idx="1">
+            <a:schemeClr val="accent1"/>
+          </a:fillRef>
+          <a:effectRef idx="0">
+            <a:schemeClr val="accent1"/>
+          </a:effectRef>
+          <a:fontRef idx="minor">
+            <a:schemeClr val="lt1"/>
+          </a:fontRef>
+        </p:style>
+        <p:txBody>
+          <a:bodyPr rtlCol="0" anchor="ctr"/>
+          <a:lstStyle/>
+          <a:p>
+            <a:pPr algn="ctr"/>
+            <a:endParaRPr lang="pt-BR"/>
+          </a:p>
+        </p:txBody>
+      </p:sp>
+      <p:sp>
+        <p:nvSpPr>
+          <p:cNvPr id="143" name="CaixaDeTexto 142"/>
+          <p:cNvSpPr txBox="1"/>
+          <p:nvPr/>
+        </p:nvSpPr>
+        <p:spPr>
+          <a:xfrm>
+            <a:off x="7353300" y="5016500"/>
+            <a:ext cx="526106" cy="369332"/>
+          </a:xfrm>
+          <a:prstGeom prst="rect">
+            <a:avLst/>
+          </a:prstGeom>
+          <a:noFill/>
+        </p:spPr>
+        <p:txBody>
+          <a:bodyPr wrap="none" rtlCol="0">
+            <a:spAutoFit/>
+          </a:bodyPr>
+          <a:lstStyle/>
+          <a:p>
+            <a:r>
+              <a:rPr lang="pt-BR" b="1" dirty="0" smtClean="0"/>
+              <a:t>90º</a:t>
+            </a:r>
+            <a:endParaRPr lang="pt-BR" b="1" dirty="0"/>
+          </a:p>
+        </p:txBody>
+      </p:sp>
+      <p:sp>
+        <p:nvSpPr>
+          <p:cNvPr id="145" name="Seta: para a Direita 20">
+            <a:extLst>
+              <a:ext uri="{FF2B5EF4-FFF2-40B4-BE49-F238E27FC236}">
+                <a16:creationId xmlns="" xmlns:a16="http://schemas.microsoft.com/office/drawing/2014/main" id="{ACEFE10B-F9A6-370E-3AA8-81ED9EA0FE65}"/>
+              </a:ext>
+            </a:extLst>
+          </p:cNvPr>
+          <p:cNvSpPr/>
+          <p:nvPr/>
+        </p:nvSpPr>
+        <p:spPr>
+          <a:xfrm>
+            <a:off x="6438900" y="4517961"/>
+            <a:ext cx="533400" cy="409639"/>
+          </a:xfrm>
+          <a:prstGeom prst="rightArrow">
+            <a:avLst/>
+          </a:prstGeom>
+          <a:noFill/>
+          <a:ln w="25400"/>
+        </p:spPr>
+        <p:style>
+          <a:lnRef idx="2">
+            <a:schemeClr val="accent1">
+              <a:shade val="15000"/>
+            </a:schemeClr>
+          </a:lnRef>
+          <a:fillRef idx="1">
+            <a:schemeClr val="accent1"/>
+          </a:fillRef>
+          <a:effectRef idx="0">
+            <a:schemeClr val="accent1"/>
+          </a:effectRef>
+          <a:fontRef idx="minor">
+            <a:schemeClr val="lt1"/>
+          </a:fontRef>
+        </p:style>
+        <p:txBody>
+          <a:bodyPr rtlCol="0" anchor="ctr"/>
+          <a:lstStyle/>
+          <a:p>
+            <a:pPr algn="ctr"/>
+            <a:endParaRPr lang="pt-BR"/>
+          </a:p>
+        </p:txBody>
+      </p:sp>
+      <p:sp>
+        <p:nvSpPr>
+          <p:cNvPr id="146" name="CaixaDeTexto 145"/>
+          <p:cNvSpPr txBox="1"/>
+          <p:nvPr/>
+        </p:nvSpPr>
+        <p:spPr>
+          <a:xfrm>
+            <a:off x="9398000" y="4470400"/>
+            <a:ext cx="941283" cy="369332"/>
+          </a:xfrm>
+          <a:prstGeom prst="rect">
+            <a:avLst/>
+          </a:prstGeom>
+          <a:noFill/>
+        </p:spPr>
+        <p:txBody>
+          <a:bodyPr wrap="none" rtlCol="0">
+            <a:spAutoFit/>
+          </a:bodyPr>
+          <a:lstStyle/>
+          <a:p>
+            <a:r>
+              <a:rPr lang="pt-BR" b="1" dirty="0" smtClean="0"/>
+              <a:t>Output</a:t>
+            </a:r>
+            <a:endParaRPr lang="pt-BR" b="1" dirty="0"/>
+          </a:p>
+        </p:txBody>
+      </p:sp>
+      <p:sp>
+        <p:nvSpPr>
+          <p:cNvPr id="147" name="Elipse 146">
+            <a:extLst>
+              <a:ext uri="{FF2B5EF4-FFF2-40B4-BE49-F238E27FC236}">
+                <a16:creationId xmlns="" xmlns:a16="http://schemas.microsoft.com/office/drawing/2014/main" id="{E51FD0E9-ECBB-0C63-5C53-00357AAAF1D9}"/>
+              </a:ext>
+            </a:extLst>
+          </p:cNvPr>
+          <p:cNvSpPr/>
+          <p:nvPr/>
+        </p:nvSpPr>
+        <p:spPr>
+          <a:xfrm>
+            <a:off x="10548559" y="5753225"/>
+            <a:ext cx="235974" cy="221226"/>
+          </a:xfrm>
+          <a:prstGeom prst="ellipse">
+            <a:avLst/>
+          </a:prstGeom>
+          <a:noFill/>
+          <a:ln>
+            <a:solidFill>
+              <a:schemeClr val="tx1"/>
+            </a:solidFill>
+          </a:ln>
+        </p:spPr>
+        <p:style>
+          <a:lnRef idx="2">
+            <a:schemeClr val="accent1">
+              <a:shade val="15000"/>
+            </a:schemeClr>
+          </a:lnRef>
+          <a:fillRef idx="1">
+            <a:schemeClr val="accent1"/>
+          </a:fillRef>
+          <a:effectRef idx="0">
+            <a:schemeClr val="accent1"/>
+          </a:effectRef>
+          <a:fontRef idx="minor">
+            <a:schemeClr val="lt1"/>
+          </a:fontRef>
+        </p:style>
+        <p:txBody>
+          <a:bodyPr rtlCol="0" anchor="ctr"/>
+          <a:lstStyle/>
+          <a:p>
+            <a:pPr algn="ctr"/>
+            <a:endParaRPr lang="pt-BR"/>
+          </a:p>
+        </p:txBody>
+      </p:sp>
+      <p:sp>
+        <p:nvSpPr>
+          <p:cNvPr id="148" name="CaixaDeTexto 147"/>
+          <p:cNvSpPr txBox="1"/>
+          <p:nvPr/>
+        </p:nvSpPr>
+        <p:spPr>
+          <a:xfrm>
+            <a:off x="10845800" y="5715000"/>
+            <a:ext cx="671979" cy="369332"/>
+          </a:xfrm>
+          <a:prstGeom prst="rect">
+            <a:avLst/>
+          </a:prstGeom>
+          <a:noFill/>
+        </p:spPr>
+        <p:txBody>
+          <a:bodyPr wrap="none" rtlCol="0">
+            <a:spAutoFit/>
+          </a:bodyPr>
+          <a:lstStyle/>
+          <a:p>
+            <a:r>
+              <a:rPr lang="pt-BR" b="1" dirty="0" smtClean="0"/>
+              <a:t>USB</a:t>
+            </a:r>
+            <a:endParaRPr lang="pt-BR" b="1" dirty="0"/>
+          </a:p>
+        </p:txBody>
+      </p:sp>
+      <p:sp>
+        <p:nvSpPr>
+          <p:cNvPr id="85" name="Retângulo 84">
+            <a:extLst>
+              <a:ext uri="{FF2B5EF4-FFF2-40B4-BE49-F238E27FC236}">
+                <a16:creationId xmlns="" xmlns:a16="http://schemas.microsoft.com/office/drawing/2014/main" id="{9B99B2DF-2CC4-347D-0910-8830491E91B3}"/>
+              </a:ext>
+            </a:extLst>
+          </p:cNvPr>
+          <p:cNvSpPr/>
+          <p:nvPr/>
+        </p:nvSpPr>
+        <p:spPr>
+          <a:xfrm>
+            <a:off x="4216400" y="1257300"/>
+            <a:ext cx="1443512" cy="977900"/>
+          </a:xfrm>
+          <a:prstGeom prst="rect">
+            <a:avLst/>
+          </a:prstGeom>
+          <a:noFill/>
+          <a:ln w="25400">
+            <a:solidFill>
+              <a:schemeClr val="tx1"/>
+            </a:solidFill>
+          </a:ln>
+        </p:spPr>
+        <p:style>
+          <a:lnRef idx="2">
+            <a:schemeClr val="accent1">
+              <a:shade val="15000"/>
+            </a:schemeClr>
+          </a:lnRef>
+          <a:fillRef idx="1">
+            <a:schemeClr val="accent1"/>
+          </a:fillRef>
+          <a:effectRef idx="0">
+            <a:schemeClr val="accent1"/>
+          </a:effectRef>
+          <a:fontRef idx="minor">
+            <a:schemeClr val="lt1"/>
+          </a:fontRef>
+        </p:style>
+        <p:txBody>
+          <a:bodyPr rtlCol="0" anchor="ctr"/>
+          <a:lstStyle/>
+          <a:p>
+            <a:pPr algn="ctr"/>
+            <a:endParaRPr lang="pt-BR"/>
+          </a:p>
+        </p:txBody>
+      </p:sp>
+      <p:sp>
+        <p:nvSpPr>
+          <p:cNvPr id="91" name="Elipse 90">
+            <a:extLst>
+              <a:ext uri="{FF2B5EF4-FFF2-40B4-BE49-F238E27FC236}">
+                <a16:creationId xmlns="" xmlns:a16="http://schemas.microsoft.com/office/drawing/2014/main" id="{DB48A5FC-58F4-3918-B31E-CB346F457BBE}"/>
+              </a:ext>
+            </a:extLst>
+          </p:cNvPr>
+          <p:cNvSpPr/>
+          <p:nvPr/>
+        </p:nvSpPr>
+        <p:spPr>
+          <a:xfrm>
+            <a:off x="5337866" y="1373023"/>
+            <a:ext cx="235974" cy="221226"/>
+          </a:xfrm>
+          <a:prstGeom prst="ellipse">
+            <a:avLst/>
+          </a:prstGeom>
+          <a:noFill/>
+          <a:ln>
+            <a:solidFill>
+              <a:schemeClr val="tx1"/>
+            </a:solidFill>
+          </a:ln>
+        </p:spPr>
+        <p:style>
+          <a:lnRef idx="2">
+            <a:schemeClr val="accent1">
+              <a:shade val="15000"/>
+            </a:schemeClr>
+          </a:lnRef>
+          <a:fillRef idx="1">
+            <a:schemeClr val="accent1"/>
+          </a:fillRef>
+          <a:effectRef idx="0">
+            <a:schemeClr val="accent1"/>
+          </a:effectRef>
+          <a:fontRef idx="minor">
+            <a:schemeClr val="lt1"/>
+          </a:fontRef>
+        </p:style>
+        <p:txBody>
+          <a:bodyPr rtlCol="0" anchor="ctr"/>
+          <a:lstStyle/>
+          <a:p>
+            <a:pPr algn="ctr"/>
+            <a:endParaRPr lang="pt-BR"/>
+          </a:p>
+        </p:txBody>
+      </p:sp>
+      <p:sp>
+        <p:nvSpPr>
+          <p:cNvPr id="92" name="Elipse 91">
+            <a:extLst>
+              <a:ext uri="{FF2B5EF4-FFF2-40B4-BE49-F238E27FC236}">
+                <a16:creationId xmlns="" xmlns:a16="http://schemas.microsoft.com/office/drawing/2014/main" id="{DB48A5FC-58F4-3918-B31E-CB346F457BBE}"/>
+              </a:ext>
+            </a:extLst>
+          </p:cNvPr>
+          <p:cNvSpPr/>
+          <p:nvPr/>
+        </p:nvSpPr>
+        <p:spPr>
+          <a:xfrm>
+            <a:off x="5337866" y="1817523"/>
+            <a:ext cx="235974" cy="221226"/>
+          </a:xfrm>
+          <a:prstGeom prst="ellipse">
+            <a:avLst/>
+          </a:prstGeom>
+          <a:noFill/>
+          <a:ln>
+            <a:solidFill>
+              <a:schemeClr val="tx1"/>
+            </a:solidFill>
+          </a:ln>
+        </p:spPr>
+        <p:style>
+          <a:lnRef idx="2">
+            <a:schemeClr val="accent1">
+              <a:shade val="15000"/>
+            </a:schemeClr>
+          </a:lnRef>
+          <a:fillRef idx="1">
+            <a:schemeClr val="accent1"/>
+          </a:fillRef>
+          <a:effectRef idx="0">
+            <a:schemeClr val="accent1"/>
+          </a:effectRef>
+          <a:fontRef idx="minor">
+            <a:schemeClr val="lt1"/>
+          </a:fontRef>
+        </p:style>
+        <p:txBody>
+          <a:bodyPr rtlCol="0" anchor="ctr"/>
+          <a:lstStyle/>
+          <a:p>
+            <a:pPr algn="ctr"/>
+            <a:endParaRPr lang="pt-BR"/>
+          </a:p>
+        </p:txBody>
+      </p:sp>
+      <p:sp>
+        <p:nvSpPr>
+          <p:cNvPr id="93" name="Elipse 92">
+            <a:extLst>
+              <a:ext uri="{FF2B5EF4-FFF2-40B4-BE49-F238E27FC236}">
+                <a16:creationId xmlns="" xmlns:a16="http://schemas.microsoft.com/office/drawing/2014/main" id="{DB48A5FC-58F4-3918-B31E-CB346F457BBE}"/>
+              </a:ext>
+            </a:extLst>
+          </p:cNvPr>
+          <p:cNvSpPr/>
+          <p:nvPr/>
+        </p:nvSpPr>
+        <p:spPr>
+          <a:xfrm>
+            <a:off x="4283766" y="1627023"/>
+            <a:ext cx="235974" cy="221226"/>
+          </a:xfrm>
+          <a:prstGeom prst="ellipse">
+            <a:avLst/>
+          </a:prstGeom>
+          <a:noFill/>
+          <a:ln>
+            <a:solidFill>
+              <a:schemeClr val="tx1"/>
+            </a:solidFill>
+          </a:ln>
+        </p:spPr>
+        <p:style>
+          <a:lnRef idx="2">
+            <a:schemeClr val="accent1">
+              <a:shade val="15000"/>
+            </a:schemeClr>
+          </a:lnRef>
+          <a:fillRef idx="1">
+            <a:schemeClr val="accent1"/>
+          </a:fillRef>
+          <a:effectRef idx="0">
+            <a:schemeClr val="accent1"/>
+          </a:effectRef>
+          <a:fontRef idx="minor">
+            <a:schemeClr val="lt1"/>
+          </a:fontRef>
+        </p:style>
+        <p:txBody>
+          <a:bodyPr rtlCol="0" anchor="ctr"/>
+          <a:lstStyle/>
+          <a:p>
+            <a:pPr algn="ctr"/>
+            <a:endParaRPr lang="pt-BR"/>
+          </a:p>
+        </p:txBody>
+      </p:sp>
+      <p:cxnSp>
+        <p:nvCxnSpPr>
+          <p:cNvPr id="96" name="Conector de seta reta 95"/>
+          <p:cNvCxnSpPr>
+            <a:endCxn id="91" idx="2"/>
+          </p:cNvCxnSpPr>
+          <p:nvPr/>
+        </p:nvCxnSpPr>
+        <p:spPr>
+          <a:xfrm flipV="1">
+            <a:off x="4510583" y="1483636"/>
+            <a:ext cx="827283" cy="243316"/>
+          </a:xfrm>
+          <a:prstGeom prst="straightConnector1">
+            <a:avLst/>
+          </a:prstGeom>
+          <a:ln w="25400">
+            <a:solidFill>
+              <a:schemeClr val="tx1"/>
+            </a:solidFill>
+            <a:tailEnd type="arrow"/>
           </a:ln>
         </p:spPr>
         <p:style>
@@ -7022,14 +7651,14 @@
       </p:cxnSp>
       <p:cxnSp>
         <p:nvCxnSpPr>
-          <p:cNvPr id="135" name="Conector reto 134"/>
+          <p:cNvPr id="102" name="Conector reto 101"/>
           <p:cNvCxnSpPr/>
           <p:nvPr/>
         </p:nvCxnSpPr>
         <p:spPr>
-          <a:xfrm>
-            <a:off x="6629400" y="1905000"/>
-            <a:ext cx="419424" cy="1185"/>
+          <a:xfrm rot="5400000">
+            <a:off x="5505450" y="3028950"/>
+            <a:ext cx="2235200" cy="12700"/>
           </a:xfrm>
           <a:prstGeom prst="line">
             <a:avLst/>
@@ -7055,324 +7684,21 @@
           </a:fontRef>
         </p:style>
       </p:cxnSp>
-      <p:sp>
-        <p:nvSpPr>
-          <p:cNvPr id="137" name="Retângulo 136"/>
-          <p:cNvSpPr/>
-          <p:nvPr/>
-        </p:nvSpPr>
-        <p:spPr>
-          <a:xfrm>
-            <a:off x="6362700" y="2235200"/>
-            <a:ext cx="63500" cy="3175000"/>
-          </a:xfrm>
-          <a:prstGeom prst="rect">
-            <a:avLst/>
-          </a:prstGeom>
-          <a:solidFill>
-            <a:schemeClr val="tx1"/>
-          </a:solidFill>
-          <a:ln w="25400"/>
-        </p:spPr>
-        <p:style>
-          <a:lnRef idx="2">
-            <a:schemeClr val="accent1">
-              <a:shade val="50000"/>
-            </a:schemeClr>
-          </a:lnRef>
-          <a:fillRef idx="1">
-            <a:schemeClr val="accent1"/>
-          </a:fillRef>
-          <a:effectRef idx="0">
-            <a:schemeClr val="accent1"/>
-          </a:effectRef>
-          <a:fontRef idx="minor">
-            <a:schemeClr val="lt1"/>
-          </a:fontRef>
-        </p:style>
-        <p:txBody>
-          <a:bodyPr rtlCol="0" anchor="ctr"/>
-          <a:lstStyle/>
-          <a:p>
-            <a:pPr algn="ctr"/>
-            <a:endParaRPr lang="pt-BR"/>
-          </a:p>
-        </p:txBody>
-      </p:sp>
-      <p:sp>
-        <p:nvSpPr>
-          <p:cNvPr id="140" name="Seta: para a Direita 20">
-            <a:extLst>
-              <a:ext uri="{FF2B5EF4-FFF2-40B4-BE49-F238E27FC236}">
-                <a16:creationId xmlns:a16="http://schemas.microsoft.com/office/drawing/2014/main" xmlns="" id="{ACEFE10B-F9A6-370E-3AA8-81ED9EA0FE65}"/>
-              </a:ext>
-            </a:extLst>
-          </p:cNvPr>
-          <p:cNvSpPr/>
-          <p:nvPr/>
-        </p:nvSpPr>
-        <p:spPr>
-          <a:xfrm>
-            <a:off x="6413500" y="5067300"/>
-            <a:ext cx="533400" cy="419100"/>
-          </a:xfrm>
-          <a:prstGeom prst="rightArrow">
-            <a:avLst/>
-          </a:prstGeom>
-          <a:noFill/>
-          <a:ln w="25400"/>
-        </p:spPr>
-        <p:style>
-          <a:lnRef idx="2">
-            <a:schemeClr val="accent1">
-              <a:shade val="15000"/>
-            </a:schemeClr>
-          </a:lnRef>
-          <a:fillRef idx="1">
-            <a:schemeClr val="accent1"/>
-          </a:fillRef>
-          <a:effectRef idx="0">
-            <a:schemeClr val="accent1"/>
-          </a:effectRef>
-          <a:fontRef idx="minor">
-            <a:schemeClr val="lt1"/>
-          </a:fontRef>
-        </p:style>
-        <p:txBody>
-          <a:bodyPr rtlCol="0" anchor="ctr"/>
-          <a:lstStyle/>
-          <a:p>
-            <a:pPr algn="ctr"/>
-            <a:endParaRPr lang="pt-BR"/>
-          </a:p>
-        </p:txBody>
-      </p:sp>
-      <p:sp>
-        <p:nvSpPr>
-          <p:cNvPr id="141" name="Seta: para a Direita 19">
-            <a:extLst>
-              <a:ext uri="{FF2B5EF4-FFF2-40B4-BE49-F238E27FC236}">
-                <a16:creationId xmlns:a16="http://schemas.microsoft.com/office/drawing/2014/main" xmlns="" id="{A6C8175D-DA74-98A7-2FF7-2AADD28711FE}"/>
-              </a:ext>
-            </a:extLst>
-          </p:cNvPr>
-          <p:cNvSpPr/>
-          <p:nvPr/>
-        </p:nvSpPr>
-        <p:spPr>
-          <a:xfrm>
-            <a:off x="5905500" y="2235200"/>
-            <a:ext cx="457200" cy="412062"/>
-          </a:xfrm>
-          <a:prstGeom prst="rightArrow">
-            <a:avLst/>
-          </a:prstGeom>
-          <a:noFill/>
-          <a:ln w="25400"/>
-        </p:spPr>
-        <p:style>
-          <a:lnRef idx="2">
-            <a:schemeClr val="accent1">
-              <a:shade val="15000"/>
-            </a:schemeClr>
-          </a:lnRef>
-          <a:fillRef idx="1">
-            <a:schemeClr val="accent1"/>
-          </a:fillRef>
-          <a:effectRef idx="0">
-            <a:schemeClr val="accent1"/>
-          </a:effectRef>
-          <a:fontRef idx="minor">
-            <a:schemeClr val="lt1"/>
-          </a:fontRef>
-        </p:style>
-        <p:txBody>
-          <a:bodyPr rtlCol="0" anchor="ctr"/>
-          <a:lstStyle/>
-          <a:p>
-            <a:pPr algn="ctr"/>
-            <a:endParaRPr lang="pt-BR"/>
-          </a:p>
-        </p:txBody>
-      </p:sp>
-      <p:sp>
-        <p:nvSpPr>
-          <p:cNvPr id="142" name="Seta: para a Direita 19">
-            <a:extLst>
-              <a:ext uri="{FF2B5EF4-FFF2-40B4-BE49-F238E27FC236}">
-                <a16:creationId xmlns:a16="http://schemas.microsoft.com/office/drawing/2014/main" xmlns="" id="{A6C8175D-DA74-98A7-2FF7-2AADD28711FE}"/>
-              </a:ext>
-            </a:extLst>
-          </p:cNvPr>
-          <p:cNvSpPr/>
-          <p:nvPr/>
-        </p:nvSpPr>
-        <p:spPr>
-          <a:xfrm>
-            <a:off x="5943600" y="2748408"/>
-            <a:ext cx="419100" cy="406854"/>
-          </a:xfrm>
-          <a:prstGeom prst="rightArrow">
-            <a:avLst/>
-          </a:prstGeom>
-          <a:noFill/>
-          <a:ln w="25400"/>
-        </p:spPr>
-        <p:style>
-          <a:lnRef idx="2">
-            <a:schemeClr val="accent1">
-              <a:shade val="15000"/>
-            </a:schemeClr>
-          </a:lnRef>
-          <a:fillRef idx="1">
-            <a:schemeClr val="accent1"/>
-          </a:fillRef>
-          <a:effectRef idx="0">
-            <a:schemeClr val="accent1"/>
-          </a:effectRef>
-          <a:fontRef idx="minor">
-            <a:schemeClr val="lt1"/>
-          </a:fontRef>
-        </p:style>
-        <p:txBody>
-          <a:bodyPr rtlCol="0" anchor="ctr"/>
-          <a:lstStyle/>
-          <a:p>
-            <a:pPr algn="ctr"/>
-            <a:endParaRPr lang="pt-BR"/>
-          </a:p>
-        </p:txBody>
-      </p:sp>
-      <p:sp>
-        <p:nvSpPr>
-          <p:cNvPr id="143" name="CaixaDeTexto 142"/>
-          <p:cNvSpPr txBox="1"/>
-          <p:nvPr/>
-        </p:nvSpPr>
-        <p:spPr>
-          <a:xfrm>
-            <a:off x="7353300" y="5016500"/>
-            <a:ext cx="526106" cy="369332"/>
-          </a:xfrm>
-          <a:prstGeom prst="rect">
-            <a:avLst/>
-          </a:prstGeom>
-          <a:noFill/>
-        </p:spPr>
-        <p:txBody>
-          <a:bodyPr wrap="none" rtlCol="0">
-            <a:spAutoFit/>
-          </a:bodyPr>
-          <a:lstStyle/>
-          <a:p>
-            <a:r>
-              <a:rPr lang="pt-BR" b="1" dirty="0" smtClean="0"/>
-              <a:t>90º</a:t>
-            </a:r>
-            <a:endParaRPr lang="pt-BR" b="1" dirty="0"/>
-          </a:p>
-        </p:txBody>
-      </p:sp>
-      <p:sp>
-        <p:nvSpPr>
-          <p:cNvPr id="145" name="Seta: para a Direita 20">
-            <a:extLst>
-              <a:ext uri="{FF2B5EF4-FFF2-40B4-BE49-F238E27FC236}">
-                <a16:creationId xmlns:a16="http://schemas.microsoft.com/office/drawing/2014/main" xmlns="" id="{ACEFE10B-F9A6-370E-3AA8-81ED9EA0FE65}"/>
-              </a:ext>
-            </a:extLst>
-          </p:cNvPr>
-          <p:cNvSpPr/>
-          <p:nvPr/>
-        </p:nvSpPr>
-        <p:spPr>
-          <a:xfrm>
-            <a:off x="6438900" y="4517961"/>
-            <a:ext cx="533400" cy="409639"/>
-          </a:xfrm>
-          <a:prstGeom prst="rightArrow">
-            <a:avLst/>
-          </a:prstGeom>
-          <a:noFill/>
-          <a:ln w="25400"/>
-        </p:spPr>
-        <p:style>
-          <a:lnRef idx="2">
-            <a:schemeClr val="accent1">
-              <a:shade val="15000"/>
-            </a:schemeClr>
-          </a:lnRef>
-          <a:fillRef idx="1">
-            <a:schemeClr val="accent1"/>
-          </a:fillRef>
-          <a:effectRef idx="0">
-            <a:schemeClr val="accent1"/>
-          </a:effectRef>
-          <a:fontRef idx="minor">
-            <a:schemeClr val="lt1"/>
-          </a:fontRef>
-        </p:style>
-        <p:txBody>
-          <a:bodyPr rtlCol="0" anchor="ctr"/>
-          <a:lstStyle/>
-          <a:p>
-            <a:pPr algn="ctr"/>
-            <a:endParaRPr lang="pt-BR"/>
-          </a:p>
-        </p:txBody>
-      </p:sp>
-      <p:sp>
-        <p:nvSpPr>
-          <p:cNvPr id="146" name="CaixaDeTexto 145"/>
-          <p:cNvSpPr txBox="1"/>
-          <p:nvPr/>
-        </p:nvSpPr>
-        <p:spPr>
-          <a:xfrm>
-            <a:off x="9398000" y="4470400"/>
-            <a:ext cx="941283" cy="369332"/>
-          </a:xfrm>
-          <a:prstGeom prst="rect">
-            <a:avLst/>
-          </a:prstGeom>
-          <a:noFill/>
-        </p:spPr>
-        <p:txBody>
-          <a:bodyPr wrap="none" rtlCol="0">
-            <a:spAutoFit/>
-          </a:bodyPr>
-          <a:lstStyle/>
-          <a:p>
-            <a:r>
-              <a:rPr lang="pt-BR" b="1" dirty="0" smtClean="0"/>
-              <a:t>Output</a:t>
-            </a:r>
-            <a:endParaRPr lang="pt-BR" b="1" dirty="0"/>
-          </a:p>
-        </p:txBody>
-      </p:sp>
-      <p:sp>
-        <p:nvSpPr>
-          <p:cNvPr id="147" name="Elipse 146">
-            <a:extLst>
-              <a:ext uri="{FF2B5EF4-FFF2-40B4-BE49-F238E27FC236}">
-                <a16:creationId xmlns:a16="http://schemas.microsoft.com/office/drawing/2014/main" xmlns="" id="{E51FD0E9-ECBB-0C63-5C53-00357AAAF1D9}"/>
-              </a:ext>
-            </a:extLst>
-          </p:cNvPr>
-          <p:cNvSpPr/>
-          <p:nvPr/>
-        </p:nvSpPr>
-        <p:spPr>
-          <a:xfrm>
-            <a:off x="10548559" y="5753225"/>
-            <a:ext cx="235974" cy="221226"/>
-          </a:xfrm>
-          <a:prstGeom prst="ellipse">
-            <a:avLst/>
-          </a:prstGeom>
-          <a:noFill/>
-          <a:ln>
+      <p:cxnSp>
+        <p:nvCxnSpPr>
+          <p:cNvPr id="116" name="Conector reto 115"/>
+          <p:cNvCxnSpPr/>
+          <p:nvPr/>
+        </p:nvCxnSpPr>
+        <p:spPr>
+          <a:xfrm flipV="1">
+            <a:off x="3644900" y="1741085"/>
+            <a:ext cx="648024" cy="11515"/>
+          </a:xfrm>
+          <a:prstGeom prst="line">
+            <a:avLst/>
+          </a:prstGeom>
+          <a:ln w="38100">
             <a:solidFill>
               <a:schemeClr val="tx1"/>
             </a:solidFill>
@@ -7380,39 +7706,169 @@
         </p:spPr>
         <p:style>
           <a:lnRef idx="2">
-            <a:schemeClr val="accent1">
-              <a:shade val="15000"/>
-            </a:schemeClr>
+            <a:schemeClr val="accent1"/>
           </a:lnRef>
-          <a:fillRef idx="1">
+          <a:fillRef idx="0">
             <a:schemeClr val="accent1"/>
           </a:fillRef>
-          <a:effectRef idx="0">
+          <a:effectRef idx="1">
             <a:schemeClr val="accent1"/>
           </a:effectRef>
           <a:fontRef idx="minor">
-            <a:schemeClr val="lt1"/>
+            <a:schemeClr val="tx1"/>
           </a:fontRef>
         </p:style>
-        <p:txBody>
-          <a:bodyPr rtlCol="0" anchor="ctr"/>
-          <a:lstStyle/>
-          <a:p>
-            <a:pPr algn="ctr"/>
-            <a:endParaRPr lang="pt-BR"/>
-          </a:p>
-        </p:txBody>
-      </p:sp>
-      <p:sp>
-        <p:nvSpPr>
-          <p:cNvPr id="148" name="CaixaDeTexto 147"/>
+      </p:cxnSp>
+      <p:cxnSp>
+        <p:nvCxnSpPr>
+          <p:cNvPr id="127" name="Conector reto 126"/>
+          <p:cNvCxnSpPr/>
+          <p:nvPr/>
+        </p:nvCxnSpPr>
+        <p:spPr>
+          <a:xfrm>
+            <a:off x="5561140" y="1928136"/>
+            <a:ext cx="1093660" cy="2264"/>
+          </a:xfrm>
+          <a:prstGeom prst="line">
+            <a:avLst/>
+          </a:prstGeom>
+          <a:ln w="38100">
+            <a:solidFill>
+              <a:schemeClr val="tx1"/>
+            </a:solidFill>
+          </a:ln>
+        </p:spPr>
+        <p:style>
+          <a:lnRef idx="2">
+            <a:schemeClr val="accent1"/>
+          </a:lnRef>
+          <a:fillRef idx="0">
+            <a:schemeClr val="accent1"/>
+          </a:fillRef>
+          <a:effectRef idx="1">
+            <a:schemeClr val="accent1"/>
+          </a:effectRef>
+          <a:fontRef idx="minor">
+            <a:schemeClr val="tx1"/>
+          </a:fontRef>
+        </p:style>
+      </p:cxnSp>
+      <p:cxnSp>
+        <p:nvCxnSpPr>
+          <p:cNvPr id="131" name="Conector reto 130"/>
+          <p:cNvCxnSpPr/>
+          <p:nvPr/>
+        </p:nvCxnSpPr>
+        <p:spPr>
+          <a:xfrm rot="5400000">
+            <a:off x="5156200" y="1079500"/>
+            <a:ext cx="609600" cy="1588"/>
+          </a:xfrm>
+          <a:prstGeom prst="line">
+            <a:avLst/>
+          </a:prstGeom>
+          <a:ln w="38100">
+            <a:solidFill>
+              <a:schemeClr val="tx1"/>
+            </a:solidFill>
+          </a:ln>
+        </p:spPr>
+        <p:style>
+          <a:lnRef idx="2">
+            <a:schemeClr val="accent1"/>
+          </a:lnRef>
+          <a:fillRef idx="0">
+            <a:schemeClr val="accent1"/>
+          </a:fillRef>
+          <a:effectRef idx="1">
+            <a:schemeClr val="accent1"/>
+          </a:effectRef>
+          <a:fontRef idx="minor">
+            <a:schemeClr val="tx1"/>
+          </a:fontRef>
+        </p:style>
+      </p:cxnSp>
+      <p:cxnSp>
+        <p:nvCxnSpPr>
+          <p:cNvPr id="134" name="Conector reto 133"/>
+          <p:cNvCxnSpPr/>
+          <p:nvPr/>
+        </p:nvCxnSpPr>
+        <p:spPr>
+          <a:xfrm flipV="1">
+            <a:off x="5459540" y="774700"/>
+            <a:ext cx="1804860" cy="10436"/>
+          </a:xfrm>
+          <a:prstGeom prst="line">
+            <a:avLst/>
+          </a:prstGeom>
+          <a:ln w="38100">
+            <a:solidFill>
+              <a:schemeClr val="tx1"/>
+            </a:solidFill>
+          </a:ln>
+        </p:spPr>
+        <p:style>
+          <a:lnRef idx="2">
+            <a:schemeClr val="accent1"/>
+          </a:lnRef>
+          <a:fillRef idx="0">
+            <a:schemeClr val="accent1"/>
+          </a:fillRef>
+          <a:effectRef idx="1">
+            <a:schemeClr val="accent1"/>
+          </a:effectRef>
+          <a:fontRef idx="minor">
+            <a:schemeClr val="tx1"/>
+          </a:fontRef>
+        </p:style>
+      </p:cxnSp>
+      <p:cxnSp>
+        <p:nvCxnSpPr>
+          <p:cNvPr id="138" name="Conector reto 137"/>
+          <p:cNvCxnSpPr/>
+          <p:nvPr/>
+        </p:nvCxnSpPr>
+        <p:spPr>
+          <a:xfrm rot="5400000">
+            <a:off x="6688899" y="1294255"/>
+            <a:ext cx="1069656" cy="5147"/>
+          </a:xfrm>
+          <a:prstGeom prst="line">
+            <a:avLst/>
+          </a:prstGeom>
+          <a:ln w="38100">
+            <a:solidFill>
+              <a:schemeClr val="tx1"/>
+            </a:solidFill>
+          </a:ln>
+        </p:spPr>
+        <p:style>
+          <a:lnRef idx="2">
+            <a:schemeClr val="accent1"/>
+          </a:lnRef>
+          <a:fillRef idx="0">
+            <a:schemeClr val="accent1"/>
+          </a:fillRef>
+          <a:effectRef idx="1">
+            <a:schemeClr val="accent1"/>
+          </a:effectRef>
+          <a:fontRef idx="minor">
+            <a:schemeClr val="tx1"/>
+          </a:fontRef>
+        </p:style>
+      </p:cxnSp>
+      <p:sp>
+        <p:nvSpPr>
+          <p:cNvPr id="152" name="CaixaDeTexto 151"/>
           <p:cNvSpPr txBox="1"/>
           <p:nvPr/>
         </p:nvSpPr>
         <p:spPr>
           <a:xfrm>
-            <a:off x="10845800" y="5715000"/>
-            <a:ext cx="671979" cy="369332"/>
+            <a:off x="5930900" y="787400"/>
+            <a:ext cx="505267" cy="369332"/>
           </a:xfrm>
           <a:prstGeom prst="rect">
             <a:avLst/>
@@ -7427,16 +7883,76 @@
           <a:p>
             <a:r>
               <a:rPr lang="pt-BR" b="1" dirty="0" smtClean="0"/>
-              <a:t>USB</a:t>
+              <a:t>RX</a:t>
             </a:r>
             <a:endParaRPr lang="pt-BR" b="1" dirty="0"/>
+          </a:p>
+        </p:txBody>
+      </p:sp>
+      <p:sp>
+        <p:nvSpPr>
+          <p:cNvPr id="153" name="CaixaDeTexto 152"/>
+          <p:cNvSpPr txBox="1"/>
+          <p:nvPr/>
+        </p:nvSpPr>
+        <p:spPr>
+          <a:xfrm>
+            <a:off x="5905500" y="1511300"/>
+            <a:ext cx="479618" cy="369332"/>
+          </a:xfrm>
+          <a:prstGeom prst="rect">
+            <a:avLst/>
+          </a:prstGeom>
+          <a:noFill/>
+        </p:spPr>
+        <p:txBody>
+          <a:bodyPr wrap="none" rtlCol="0">
+            <a:spAutoFit/>
+          </a:bodyPr>
+          <a:lstStyle/>
+          <a:p>
+            <a:r>
+              <a:rPr lang="pt-BR" b="1" dirty="0" smtClean="0"/>
+              <a:t>TX</a:t>
+            </a:r>
+            <a:endParaRPr lang="pt-BR" b="1" dirty="0"/>
+          </a:p>
+        </p:txBody>
+      </p:sp>
+      <p:sp>
+        <p:nvSpPr>
+          <p:cNvPr id="154" name="CaixaDeTexto 153"/>
+          <p:cNvSpPr txBox="1"/>
+          <p:nvPr/>
+        </p:nvSpPr>
+        <p:spPr>
+          <a:xfrm>
+            <a:off x="3136900" y="3949700"/>
+            <a:ext cx="891591" cy="338554"/>
+          </a:xfrm>
+          <a:prstGeom prst="rect">
+            <a:avLst/>
+          </a:prstGeom>
+          <a:noFill/>
+        </p:spPr>
+        <p:txBody>
+          <a:bodyPr wrap="none" rtlCol="0">
+            <a:spAutoFit/>
+          </a:bodyPr>
+          <a:lstStyle/>
+          <a:p>
+            <a:r>
+              <a:rPr lang="pt-BR" sz="1600" b="1" dirty="0" smtClean="0"/>
+              <a:t>Strings</a:t>
+            </a:r>
+            <a:endParaRPr lang="pt-BR" sz="1600" b="1" dirty="0"/>
           </a:p>
         </p:txBody>
       </p:sp>
     </p:spTree>
     <p:extLst>
       <p:ext uri="{BB962C8B-B14F-4D97-AF65-F5344CB8AC3E}">
-        <p14:creationId xmlns:p14="http://schemas.microsoft.com/office/powerpoint/2010/main" xmlns="" val="2486033752"/>
+        <p14:creationId xmlns="" xmlns:p14="http://schemas.microsoft.com/office/powerpoint/2010/main" val="2486033752"/>
       </p:ext>
     </p:extLst>
   </p:cSld>
@@ -7755,7 +8271,7 @@
   <a:extraClrSchemeLst/>
   <a:extLst>
     <a:ext uri="{05A4C25C-085E-4340-85A3-A5531E510DB2}">
-      <thm15:themeFamily xmlns:thm15="http://schemas.microsoft.com/office/thememl/2012/main" xmlns="" name="Office Theme" id="{2E142A2C-CD16-42D6-873A-C26D2A0506FA}" vid="{1BDDFF52-6CD6-40A5-AB3C-68EB2F1E4D0A}"/>
+      <thm15:themeFamily xmlns="" xmlns:thm15="http://schemas.microsoft.com/office/thememl/2012/main" name="Office Theme" id="{2E142A2C-CD16-42D6-873A-C26D2A0506FA}" vid="{1BDDFF52-6CD6-40A5-AB3C-68EB2F1E4D0A}"/>
     </a:ext>
   </a:extLst>
 </a:theme>
@@ -8070,7 +8586,7 @@
   <a:extraClrSchemeLst/>
   <a:extLst>
     <a:ext uri="{05A4C25C-085E-4340-85A3-A5531E510DB2}">
-      <thm15:themeFamily xmlns:thm15="http://schemas.microsoft.com/office/thememl/2012/main" xmlns="" name="Office Theme" id="{2E142A2C-CD16-42D6-873A-C26D2A0506FA}" vid="{1BDDFF52-6CD6-40A5-AB3C-68EB2F1E4D0A}"/>
+      <thm15:themeFamily xmlns="" xmlns:thm15="http://schemas.microsoft.com/office/thememl/2012/main" name="Office Theme" id="{2E142A2C-CD16-42D6-873A-C26D2A0506FA}" vid="{1BDDFF52-6CD6-40A5-AB3C-68EB2F1E4D0A}"/>
     </a:ext>
   </a:extLst>
 </a:theme>
